--- a/meeting/_generated/deck_v5.pptx
+++ b/meeting/_generated/deck_v5.pptx
@@ -863,7 +863,7 @@
           <a:p>
             <a:r>
               <a:rPr lang="en-US" dirty="0"/>
-              <a:t>이 슬라이드가 오늘의 핵심입니다. 인과 순서상 이미지1은 이미지2를 볼 수 없으므로 경로는 둘뿐입니다. 놀랍게도 질문이 방해 이미지를 읽는 경로만 끊으면 전면 차단과 결과가 소수점까지 같습니다. 반대로 이미지끼리 보는 경로를 끊으면 크게 나빠집니다. 즉 저희가 처음에 세웠던 '정보가 섞여서 나쁘다'는 가설은 틀렸고, 섞이는 것은 오히려 도움이 됩니다.</a:t>
+              <a:t>이 슬라이드가 오늘의 핵심입니다. 왼쪽 박스는 솔직히 말씀드리면 구조상 예상되는 결과입니다. 관련 이미지가 방해보다 앞에 있으면 방해를 볼 수 없으니, 경로가 읽기 하나로 강제됩니다. 저희 구현이 정확하다는 검증으로 봐주시면 됩니다. 진짜 발견은 오른쪽입니다. 이미지끼리 보는 경로를 끊으면 크게 나빠집니다. 방해 이미지가 관련 이미지를 보고 맥락화되면 오히려 덜 해롭고, 고립시키면 더 도드라져서 침입한다는 뜻입니다. 그리고 순서를 뒤집으면 관련 이미지가 방해를 볼 수 있게 되어 표현 오염 경로가 실제로 생깁니다. 그 배치에서 다시 재고 있습니다.</a:t>
             </a:r>
             <a:endParaRPr lang="en-US" dirty="0"/>
           </a:p>
@@ -9182,7 +9182,7 @@
                 <a:ea typeface="Arial" pitchFamily="34" charset="-122"/>
                 <a:cs typeface="Arial" pitchFamily="34" charset="-120"/>
               </a:rPr>
-              <a:t>① 읽기 경로 차단 = 전면 차단, 소수점까지 동일</a:t>
+              <a:t>① 이 배치에서는 해악의 경로가 '읽기' 하나뿐</a:t>
             </a:r>
             <a:endParaRPr lang="en-US" sz="1300" dirty="0"/>
           </a:p>
@@ -9224,7 +9224,7 @@
                 <a:ea typeface="Arial" pitchFamily="34" charset="-122"/>
                 <a:cs typeface="Arial" pitchFamily="34" charset="-120"/>
               </a:rPr>
-              <a:t>차이 0.0000, 95% CI [0, 0].</a:t>
+              <a:t>읽기 차단 = 전면 차단, 차이 0.0000 (CI [0,0]).</a:t>
             </a:r>
             <a:endParaRPr lang="en-US" sz="1100" dirty="0"/>
           </a:p>
@@ -9244,7 +9244,7 @@
                 <a:ea typeface="Arial" pitchFamily="34" charset="-122"/>
                 <a:cs typeface="Arial" pitchFamily="34" charset="-120"/>
               </a:rPr>
-              <a:t>방해 이미지의 영향은 '질문 토큰이 그것을 읽는'</a:t>
+              <a:t>관련 이미지가 방해보다 앞이라 방해를 볼 수 없기 때문 —</a:t>
             </a:r>
             <a:endParaRPr lang="en-US" sz="1100" dirty="0"/>
           </a:p>
@@ -9264,7 +9264,7 @@
                 <a:ea typeface="Arial" pitchFamily="34" charset="-122"/>
                 <a:cs typeface="Arial" pitchFamily="34" charset="-120"/>
               </a:rPr>
-              <a:t>경로 하나로만 흐릅니다. 다른 채널이 없습니다.</a:t>
+              <a:t>구조상 예상되며, 구현 정확성 검증을 겸합니다.</a:t>
             </a:r>
             <a:endParaRPr lang="en-US" sz="1100" dirty="0"/>
           </a:p>
@@ -9330,7 +9330,7 @@
                 <a:ea typeface="Arial" pitchFamily="34" charset="-122"/>
                 <a:cs typeface="Arial" pitchFamily="34" charset="-120"/>
               </a:rPr>
-              <a:t>② 이미지 간 혼합을 끊으면 오히려 크게 나빠짐</a:t>
+              <a:t>② 예상 밖 — 이미지 간 혼합을 끊으면 크게 나빠짐</a:t>
             </a:r>
             <a:endParaRPr lang="en-US" sz="1300" dirty="0"/>
           </a:p>
@@ -9392,7 +9392,7 @@
                 <a:ea typeface="Arial" pitchFamily="34" charset="-122"/>
                 <a:cs typeface="Arial" pitchFamily="34" charset="-120"/>
               </a:rPr>
-              <a:t>이미지끼리 보는 것은 도움이 됩니다.</a:t>
+              <a:t>방해가 관련 이미지를 보고 맥락화되면 오히려 덜 해롭습니다.</a:t>
             </a:r>
             <a:endParaRPr lang="en-US" sz="1100" dirty="0"/>
           </a:p>
@@ -9412,7 +9412,7 @@
                 <a:ea typeface="Arial" pitchFamily="34" charset="-122"/>
                 <a:cs typeface="Arial" pitchFamily="34" charset="-120"/>
               </a:rPr>
-              <a:t>설계 가설과 정반대 방향입니다.</a:t>
+              <a:t>고립시키면 더 도드라져 침입합니다. 이것이 실제 발견입니다.</a:t>
             </a:r>
             <a:endParaRPr lang="en-US" sz="1100" dirty="0"/>
           </a:p>
@@ -9490,7 +9490,7 @@
                 <a:ea typeface="Arial" pitchFamily="34" charset="-122"/>
                 <a:cs typeface="Arial" pitchFamily="34" charset="-120"/>
               </a:rPr>
-              <a:t>n=300 · AUC · 4D mask의 (질의 행 × 키 열) 사각형 단위 개입. 읽기차단 ≡ 전면차단은 구현 정확성 검증도 겸함</a:t>
+              <a:t>n=300 · AUC · 4D mask의 (질의 행 × 키 열) 사각형 단위 개입. 순서를 뒤집으면 관련 이미지가 방해를 볼 수 있어 표현 오염 경로가 생김 — 현재 측정 중</a:t>
             </a:r>
             <a:endParaRPr lang="en-US" sz="1000" dirty="0"/>
           </a:p>

--- a/meeting/_generated/deck_v5.pptx
+++ b/meeting/_generated/deck_v5.pptx
@@ -2063,7 +2063,7 @@
                 <a:ea typeface="Arial" pitchFamily="34" charset="-122"/>
                 <a:cs typeface="Arial" pitchFamily="34" charset="-120"/>
               </a:rPr>
-              <a:t>원인을 특정했다</a:t>
+              <a:t>원인이 예상과 반대였다</a:t>
             </a:r>
             <a:endParaRPr lang="en-US" sz="1500" dirty="0"/>
           </a:p>
@@ -2105,7 +2105,7 @@
                 <a:ea typeface="Arial" pitchFamily="34" charset="-122"/>
                 <a:cs typeface="Arial" pitchFamily="34" charset="-120"/>
               </a:rPr>
-              <a:t>해악은 '질문 → 무관이미지' 읽기 경로</a:t>
+              <a:t>이미지 간 혼합을 끊으면 오히려</a:t>
             </a:r>
             <a:endParaRPr lang="en-US" sz="1200" dirty="0"/>
           </a:p>
@@ -2125,7 +2125,7 @@
                 <a:ea typeface="Arial" pitchFamily="34" charset="-122"/>
                 <a:cs typeface="Arial" pitchFamily="34" charset="-120"/>
               </a:rPr>
-              <a:t>하나로만 흐른다. 이미지 간 혼합을 끊으면</a:t>
+              <a:t>−0.29 / −0.42로 크게 나빠진다.</a:t>
             </a:r>
             <a:endParaRPr lang="en-US" sz="1200" dirty="0"/>
           </a:p>
@@ -2145,7 +2145,7 @@
                 <a:ea typeface="Arial" pitchFamily="34" charset="-122"/>
                 <a:cs typeface="Arial" pitchFamily="34" charset="-120"/>
               </a:rPr>
-              <a:t>오히려 −0.29로 크게 나빠진다</a:t>
+              <a:t>해악은 혼합이 아니라 읽기 단계에 있다</a:t>
             </a:r>
             <a:endParaRPr lang="en-US" sz="1200" dirty="0"/>
           </a:p>
@@ -2184,7 +2184,7 @@
                 <a:ea typeface="Arial" pitchFamily="34" charset="-122"/>
                 <a:cs typeface="Arial" pitchFamily="34" charset="-120"/>
               </a:rPr>
-              <a:t>읽기차단 ≡ 전면차단, CI [0, 0]</a:t>
+              <a:t>설계 가설을 우리 손으로 반증</a:t>
             </a:r>
             <a:endParaRPr lang="en-US" sz="1050" dirty="0"/>
           </a:p>

--- a/meeting/_generated/deck_v5.pptx
+++ b/meeting/_generated/deck_v5.pptx
@@ -14272,7 +14272,64 @@
                 <a:gridCol w="1866900"/>
                 <a:gridCol w="1866900"/>
               </a:tblGrid>
-              <a:tr h="411480">
+              <a:tr h="384048">
+                <a:tc>
+                  <a:txBody>
+                    <a:bodyPr/>
+                    <a:lstStyle/>
+                    <a:p>
+                      <a:pPr algn="ctr" indent="0" marL="0">
+                        <a:buNone/>
+                      </a:pPr>
+                      <a:endParaRPr lang="en-US" sz="1150" dirty="0">
+                        <a:latin typeface="Arial" charset="0"/>
+                        <a:ea typeface="Arial" charset="0"/>
+                        <a:cs typeface="Arial" charset="0"/>
+                      </a:endParaRPr>
+                    </a:p>
+                  </a:txBody>
+                  <a:tcPr marL="91440" marR="91440" marT="45720" marB="45720" anchor="ctr">
+                    <a:lnL w="9525" cap="flat" cmpd="sng" algn="ctr">
+                      <a:solidFill>
+                        <a:srgbClr val="E2E8F0"/>
+                      </a:solidFill>
+                      <a:prstDash val="solid"/>
+                      <a:round/>
+                      <a:headEnd type="none" w="med" len="med"/>
+                      <a:tailEnd type="none" w="med" len="med"/>
+                    </a:lnL>
+                    <a:lnR w="9525" cap="flat" cmpd="sng" algn="ctr">
+                      <a:solidFill>
+                        <a:srgbClr val="E2E8F0"/>
+                      </a:solidFill>
+                      <a:prstDash val="solid"/>
+                      <a:round/>
+                      <a:headEnd type="none" w="med" len="med"/>
+                      <a:tailEnd type="none" w="med" len="med"/>
+                    </a:lnR>
+                    <a:lnT w="9525" cap="flat" cmpd="sng" algn="ctr">
+                      <a:solidFill>
+                        <a:srgbClr val="E2E8F0"/>
+                      </a:solidFill>
+                      <a:prstDash val="solid"/>
+                      <a:round/>
+                      <a:headEnd type="none" w="med" len="med"/>
+                      <a:tailEnd type="none" w="med" len="med"/>
+                    </a:lnT>
+                    <a:lnB w="9525" cap="flat" cmpd="sng" algn="ctr">
+                      <a:solidFill>
+                        <a:srgbClr val="E2E8F0"/>
+                      </a:solidFill>
+                      <a:prstDash val="solid"/>
+                      <a:round/>
+                      <a:headEnd type="none" w="med" len="med"/>
+                      <a:tailEnd type="none" w="med" len="med"/>
+                    </a:lnB>
+                    <a:solidFill>
+                      <a:srgbClr val="1F3B57"/>
+                    </a:solidFill>
+                  </a:tcPr>
+                </a:tc>
                 <a:tc>
                   <a:txBody>
                     <a:bodyPr/>
@@ -14358,75 +14415,7 @@
                           <a:ea typeface="Arial" pitchFamily="34" charset="-122"/>
                           <a:cs typeface="Arial" pitchFamily="34" charset="-120"/>
                         </a:rPr>
-                        <a:t>컨트롤러 정확도</a:t>
-                      </a:r>
-                      <a:endParaRPr lang="en-US" sz="1150" dirty="0">
-                        <a:latin typeface="Arial" charset="0"/>
-                        <a:ea typeface="Arial" charset="0"/>
-                        <a:cs typeface="Arial" charset="0"/>
-                      </a:endParaRPr>
-                    </a:p>
-                  </a:txBody>
-                  <a:tcPr marL="91440" marR="91440" marT="45720" marB="45720" anchor="ctr">
-                    <a:lnL w="9525" cap="flat" cmpd="sng" algn="ctr">
-                      <a:solidFill>
-                        <a:srgbClr val="E2E8F0"/>
-                      </a:solidFill>
-                      <a:prstDash val="solid"/>
-                      <a:round/>
-                      <a:headEnd type="none" w="med" len="med"/>
-                      <a:tailEnd type="none" w="med" len="med"/>
-                    </a:lnL>
-                    <a:lnR w="9525" cap="flat" cmpd="sng" algn="ctr">
-                      <a:solidFill>
-                        <a:srgbClr val="E2E8F0"/>
-                      </a:solidFill>
-                      <a:prstDash val="solid"/>
-                      <a:round/>
-                      <a:headEnd type="none" w="med" len="med"/>
-                      <a:tailEnd type="none" w="med" len="med"/>
-                    </a:lnR>
-                    <a:lnT w="9525" cap="flat" cmpd="sng" algn="ctr">
-                      <a:solidFill>
-                        <a:srgbClr val="E2E8F0"/>
-                      </a:solidFill>
-                      <a:prstDash val="solid"/>
-                      <a:round/>
-                      <a:headEnd type="none" w="med" len="med"/>
-                      <a:tailEnd type="none" w="med" len="med"/>
-                    </a:lnT>
-                    <a:lnB w="9525" cap="flat" cmpd="sng" algn="ctr">
-                      <a:solidFill>
-                        <a:srgbClr val="E2E8F0"/>
-                      </a:solidFill>
-                      <a:prstDash val="solid"/>
-                      <a:round/>
-                      <a:headEnd type="none" w="med" len="med"/>
-                      <a:tailEnd type="none" w="med" len="med"/>
-                    </a:lnB>
-                    <a:solidFill>
-                      <a:srgbClr val="1F3B57"/>
-                    </a:solidFill>
-                  </a:tcPr>
-                </a:tc>
-                <a:tc>
-                  <a:txBody>
-                    <a:bodyPr/>
-                    <a:lstStyle/>
-                    <a:p>
-                      <a:pPr algn="ctr" indent="0" marL="0">
-                        <a:buNone/>
-                      </a:pPr>
-                      <a:r>
-                        <a:rPr lang="en-US" sz="1150" b="1" dirty="0">
-                          <a:solidFill>
-                            <a:srgbClr val="FFFFFF"/>
-                          </a:solidFill>
-                          <a:latin typeface="Arial" pitchFamily="34" charset="0"/>
-                          <a:ea typeface="Arial" pitchFamily="34" charset="-122"/>
-                          <a:cs typeface="Arial" pitchFamily="34" charset="-120"/>
-                        </a:rPr>
-                        <a:t>무작위 기준</a:t>
+                        <a:t>컨트롤러</a:t>
                       </a:r>
                       <a:endParaRPr lang="en-US" sz="1150" dirty="0">
                         <a:latin typeface="Arial" charset="0"/>
@@ -14682,7 +14671,7 @@
                   </a:tcPr>
                 </a:tc>
               </a:tr>
-              <a:tr h="384048">
+              <a:tr h="347472">
                 <a:tc>
                   <a:txBody>
                     <a:bodyPr/>
@@ -14693,6 +14682,74 @@
                       </a:pPr>
                       <a:r>
                         <a:rPr lang="en-US" sz="1150" b="1" dirty="0">
+                          <a:solidFill>
+                            <a:srgbClr val="1F3B57"/>
+                          </a:solidFill>
+                          <a:latin typeface="Arial" pitchFamily="34" charset="0"/>
+                          <a:ea typeface="Arial" pitchFamily="34" charset="-122"/>
+                          <a:cs typeface="Arial" pitchFamily="34" charset="-120"/>
+                        </a:rPr>
+                        <a:t>3B</a:t>
+                      </a:r>
+                      <a:endParaRPr lang="en-US" sz="1150" dirty="0">
+                        <a:latin typeface="Arial" charset="0"/>
+                        <a:ea typeface="Arial" charset="0"/>
+                        <a:cs typeface="Arial" charset="0"/>
+                      </a:endParaRPr>
+                    </a:p>
+                  </a:txBody>
+                  <a:tcPr marL="91440" marR="91440" marT="45720" marB="45720" anchor="ctr">
+                    <a:lnL w="9525" cap="flat" cmpd="sng" algn="ctr">
+                      <a:solidFill>
+                        <a:srgbClr val="E2E8F0"/>
+                      </a:solidFill>
+                      <a:prstDash val="solid"/>
+                      <a:round/>
+                      <a:headEnd type="none" w="med" len="med"/>
+                      <a:tailEnd type="none" w="med" len="med"/>
+                    </a:lnL>
+                    <a:lnR w="9525" cap="flat" cmpd="sng" algn="ctr">
+                      <a:solidFill>
+                        <a:srgbClr val="E2E8F0"/>
+                      </a:solidFill>
+                      <a:prstDash val="solid"/>
+                      <a:round/>
+                      <a:headEnd type="none" w="med" len="med"/>
+                      <a:tailEnd type="none" w="med" len="med"/>
+                    </a:lnR>
+                    <a:lnT w="9525" cap="flat" cmpd="sng" algn="ctr">
+                      <a:solidFill>
+                        <a:srgbClr val="E2E8F0"/>
+                      </a:solidFill>
+                      <a:prstDash val="solid"/>
+                      <a:round/>
+                      <a:headEnd type="none" w="med" len="med"/>
+                      <a:tailEnd type="none" w="med" len="med"/>
+                    </a:lnT>
+                    <a:lnB w="9525" cap="flat" cmpd="sng" algn="ctr">
+                      <a:solidFill>
+                        <a:srgbClr val="E2E8F0"/>
+                      </a:solidFill>
+                      <a:prstDash val="solid"/>
+                      <a:round/>
+                      <a:headEnd type="none" w="med" len="med"/>
+                      <a:tailEnd type="none" w="med" len="med"/>
+                    </a:lnB>
+                    <a:solidFill>
+                      <a:srgbClr val="FFFFFF"/>
+                    </a:solidFill>
+                  </a:tcPr>
+                </a:tc>
+                <a:tc>
+                  <a:txBody>
+                    <a:bodyPr/>
+                    <a:lstStyle/>
+                    <a:p>
+                      <a:pPr algn="ctr" indent="0" marL="0">
+                        <a:buNone/>
+                      </a:pPr>
+                      <a:r>
+                        <a:rPr lang="en-US" sz="1150" dirty="0">
                           <a:solidFill>
                             <a:srgbClr val="1F3B57"/>
                           </a:solidFill>
@@ -14830,74 +14887,6 @@
                       <a:r>
                         <a:rPr lang="en-US" sz="1150" dirty="0">
                           <a:solidFill>
-                            <a:srgbClr val="1F3B57"/>
-                          </a:solidFill>
-                          <a:latin typeface="Arial" pitchFamily="34" charset="0"/>
-                          <a:ea typeface="Arial" pitchFamily="34" charset="-122"/>
-                          <a:cs typeface="Arial" pitchFamily="34" charset="-120"/>
-                        </a:rPr>
-                        <a:t>0.500</a:t>
-                      </a:r>
-                      <a:endParaRPr lang="en-US" sz="1150" dirty="0">
-                        <a:latin typeface="Arial" charset="0"/>
-                        <a:ea typeface="Arial" charset="0"/>
-                        <a:cs typeface="Arial" charset="0"/>
-                      </a:endParaRPr>
-                    </a:p>
-                  </a:txBody>
-                  <a:tcPr marL="91440" marR="91440" marT="45720" marB="45720" anchor="ctr">
-                    <a:lnL w="9525" cap="flat" cmpd="sng" algn="ctr">
-                      <a:solidFill>
-                        <a:srgbClr val="E2E8F0"/>
-                      </a:solidFill>
-                      <a:prstDash val="solid"/>
-                      <a:round/>
-                      <a:headEnd type="none" w="med" len="med"/>
-                      <a:tailEnd type="none" w="med" len="med"/>
-                    </a:lnL>
-                    <a:lnR w="9525" cap="flat" cmpd="sng" algn="ctr">
-                      <a:solidFill>
-                        <a:srgbClr val="E2E8F0"/>
-                      </a:solidFill>
-                      <a:prstDash val="solid"/>
-                      <a:round/>
-                      <a:headEnd type="none" w="med" len="med"/>
-                      <a:tailEnd type="none" w="med" len="med"/>
-                    </a:lnR>
-                    <a:lnT w="9525" cap="flat" cmpd="sng" algn="ctr">
-                      <a:solidFill>
-                        <a:srgbClr val="E2E8F0"/>
-                      </a:solidFill>
-                      <a:prstDash val="solid"/>
-                      <a:round/>
-                      <a:headEnd type="none" w="med" len="med"/>
-                      <a:tailEnd type="none" w="med" len="med"/>
-                    </a:lnT>
-                    <a:lnB w="9525" cap="flat" cmpd="sng" algn="ctr">
-                      <a:solidFill>
-                        <a:srgbClr val="E2E8F0"/>
-                      </a:solidFill>
-                      <a:prstDash val="solid"/>
-                      <a:round/>
-                      <a:headEnd type="none" w="med" len="med"/>
-                      <a:tailEnd type="none" w="med" len="med"/>
-                    </a:lnB>
-                    <a:solidFill>
-                      <a:srgbClr val="FFFFFF"/>
-                    </a:solidFill>
-                  </a:tcPr>
-                </a:tc>
-                <a:tc>
-                  <a:txBody>
-                    <a:bodyPr/>
-                    <a:lstStyle/>
-                    <a:p>
-                      <a:pPr algn="ctr" indent="0" marL="0">
-                        <a:buNone/>
-                      </a:pPr>
-                      <a:r>
-                        <a:rPr lang="en-US" sz="1150" dirty="0">
-                          <a:solidFill>
                             <a:srgbClr val="D62728"/>
                           </a:solidFill>
                           <a:latin typeface="Arial" pitchFamily="34" charset="0"/>
@@ -15092,7 +15081,64 @@
                   </a:tcPr>
                 </a:tc>
               </a:tr>
-              <a:tr h="384048">
+              <a:tr h="347472">
+                <a:tc>
+                  <a:txBody>
+                    <a:bodyPr/>
+                    <a:lstStyle/>
+                    <a:p>
+                      <a:pPr algn="ctr" indent="0" marL="0">
+                        <a:buNone/>
+                      </a:pPr>
+                      <a:endParaRPr lang="en-US" sz="1150" dirty="0">
+                        <a:latin typeface="Arial" charset="0"/>
+                        <a:ea typeface="Arial" charset="0"/>
+                        <a:cs typeface="Arial" charset="0"/>
+                      </a:endParaRPr>
+                    </a:p>
+                  </a:txBody>
+                  <a:tcPr marL="91440" marR="91440" marT="45720" marB="45720" anchor="ctr">
+                    <a:lnL w="9525" cap="flat" cmpd="sng" algn="ctr">
+                      <a:solidFill>
+                        <a:srgbClr val="E2E8F0"/>
+                      </a:solidFill>
+                      <a:prstDash val="solid"/>
+                      <a:round/>
+                      <a:headEnd type="none" w="med" len="med"/>
+                      <a:tailEnd type="none" w="med" len="med"/>
+                    </a:lnL>
+                    <a:lnR w="9525" cap="flat" cmpd="sng" algn="ctr">
+                      <a:solidFill>
+                        <a:srgbClr val="E2E8F0"/>
+                      </a:solidFill>
+                      <a:prstDash val="solid"/>
+                      <a:round/>
+                      <a:headEnd type="none" w="med" len="med"/>
+                      <a:tailEnd type="none" w="med" len="med"/>
+                    </a:lnR>
+                    <a:lnT w="9525" cap="flat" cmpd="sng" algn="ctr">
+                      <a:solidFill>
+                        <a:srgbClr val="E2E8F0"/>
+                      </a:solidFill>
+                      <a:prstDash val="solid"/>
+                      <a:round/>
+                      <a:headEnd type="none" w="med" len="med"/>
+                      <a:tailEnd type="none" w="med" len="med"/>
+                    </a:lnT>
+                    <a:lnB w="9525" cap="flat" cmpd="sng" algn="ctr">
+                      <a:solidFill>
+                        <a:srgbClr val="E2E8F0"/>
+                      </a:solidFill>
+                      <a:prstDash val="solid"/>
+                      <a:round/>
+                      <a:headEnd type="none" w="med" len="med"/>
+                      <a:tailEnd type="none" w="med" len="med"/>
+                    </a:lnB>
+                    <a:solidFill>
+                      <a:srgbClr val="FFFFFF"/>
+                    </a:solidFill>
+                  </a:tcPr>
+                </a:tc>
                 <a:tc>
                   <a:txBody>
                     <a:bodyPr/>
@@ -15102,7 +15148,7 @@
                         <a:buNone/>
                       </a:pPr>
                       <a:r>
-                        <a:rPr lang="en-US" sz="1150" b="1" dirty="0">
+                        <a:rPr lang="en-US" sz="1150" dirty="0">
                           <a:solidFill>
                             <a:srgbClr val="1F3B57"/>
                           </a:solidFill>
@@ -15246,74 +15292,6 @@
                           <a:ea typeface="Arial" pitchFamily="34" charset="-122"/>
                           <a:cs typeface="Arial" pitchFamily="34" charset="-120"/>
                         </a:rPr>
-                        <a:t>0.333</a:t>
-                      </a:r>
-                      <a:endParaRPr lang="en-US" sz="1150" dirty="0">
-                        <a:latin typeface="Arial" charset="0"/>
-                        <a:ea typeface="Arial" charset="0"/>
-                        <a:cs typeface="Arial" charset="0"/>
-                      </a:endParaRPr>
-                    </a:p>
-                  </a:txBody>
-                  <a:tcPr marL="91440" marR="91440" marT="45720" marB="45720" anchor="ctr">
-                    <a:lnL w="9525" cap="flat" cmpd="sng" algn="ctr">
-                      <a:solidFill>
-                        <a:srgbClr val="E2E8F0"/>
-                      </a:solidFill>
-                      <a:prstDash val="solid"/>
-                      <a:round/>
-                      <a:headEnd type="none" w="med" len="med"/>
-                      <a:tailEnd type="none" w="med" len="med"/>
-                    </a:lnL>
-                    <a:lnR w="9525" cap="flat" cmpd="sng" algn="ctr">
-                      <a:solidFill>
-                        <a:srgbClr val="E2E8F0"/>
-                      </a:solidFill>
-                      <a:prstDash val="solid"/>
-                      <a:round/>
-                      <a:headEnd type="none" w="med" len="med"/>
-                      <a:tailEnd type="none" w="med" len="med"/>
-                    </a:lnR>
-                    <a:lnT w="9525" cap="flat" cmpd="sng" algn="ctr">
-                      <a:solidFill>
-                        <a:srgbClr val="E2E8F0"/>
-                      </a:solidFill>
-                      <a:prstDash val="solid"/>
-                      <a:round/>
-                      <a:headEnd type="none" w="med" len="med"/>
-                      <a:tailEnd type="none" w="med" len="med"/>
-                    </a:lnT>
-                    <a:lnB w="9525" cap="flat" cmpd="sng" algn="ctr">
-                      <a:solidFill>
-                        <a:srgbClr val="E2E8F0"/>
-                      </a:solidFill>
-                      <a:prstDash val="solid"/>
-                      <a:round/>
-                      <a:headEnd type="none" w="med" len="med"/>
-                      <a:tailEnd type="none" w="med" len="med"/>
-                    </a:lnB>
-                    <a:solidFill>
-                      <a:srgbClr val="FFFFFF"/>
-                    </a:solidFill>
-                  </a:tcPr>
-                </a:tc>
-                <a:tc>
-                  <a:txBody>
-                    <a:bodyPr/>
-                    <a:lstStyle/>
-                    <a:p>
-                      <a:pPr algn="ctr" indent="0" marL="0">
-                        <a:buNone/>
-                      </a:pPr>
-                      <a:r>
-                        <a:rPr lang="en-US" sz="1150" dirty="0">
-                          <a:solidFill>
-                            <a:srgbClr val="1F3B57"/>
-                          </a:solidFill>
-                          <a:latin typeface="Arial" pitchFamily="34" charset="0"/>
-                          <a:ea typeface="Arial" pitchFamily="34" charset="-122"/>
-                          <a:cs typeface="Arial" pitchFamily="34" charset="-120"/>
-                        </a:rPr>
                         <a:t>0.661</a:t>
                       </a:r>
                       <a:endParaRPr lang="en-US" sz="1150" dirty="0">
@@ -15502,7 +15480,64 @@
                   </a:tcPr>
                 </a:tc>
               </a:tr>
-              <a:tr h="420624">
+              <a:tr h="384048">
+                <a:tc>
+                  <a:txBody>
+                    <a:bodyPr/>
+                    <a:lstStyle/>
+                    <a:p>
+                      <a:pPr algn="ctr" indent="0" marL="0">
+                        <a:buNone/>
+                      </a:pPr>
+                      <a:endParaRPr lang="en-US" sz="1150" dirty="0">
+                        <a:latin typeface="Arial" charset="0"/>
+                        <a:ea typeface="Arial" charset="0"/>
+                        <a:cs typeface="Arial" charset="0"/>
+                      </a:endParaRPr>
+                    </a:p>
+                  </a:txBody>
+                  <a:tcPr marL="91440" marR="91440" marT="45720" marB="45720" anchor="ctr">
+                    <a:lnL w="9525" cap="flat" cmpd="sng" algn="ctr">
+                      <a:solidFill>
+                        <a:srgbClr val="E2E8F0"/>
+                      </a:solidFill>
+                      <a:prstDash val="solid"/>
+                      <a:round/>
+                      <a:headEnd type="none" w="med" len="med"/>
+                      <a:tailEnd type="none" w="med" len="med"/>
+                    </a:lnL>
+                    <a:lnR w="9525" cap="flat" cmpd="sng" algn="ctr">
+                      <a:solidFill>
+                        <a:srgbClr val="E2E8F0"/>
+                      </a:solidFill>
+                      <a:prstDash val="solid"/>
+                      <a:round/>
+                      <a:headEnd type="none" w="med" len="med"/>
+                      <a:tailEnd type="none" w="med" len="med"/>
+                    </a:lnR>
+                    <a:lnT w="9525" cap="flat" cmpd="sng" algn="ctr">
+                      <a:solidFill>
+                        <a:srgbClr val="E2E8F0"/>
+                      </a:solidFill>
+                      <a:prstDash val="solid"/>
+                      <a:round/>
+                      <a:headEnd type="none" w="med" len="med"/>
+                      <a:tailEnd type="none" w="med" len="med"/>
+                    </a:lnT>
+                    <a:lnB w="9525" cap="flat" cmpd="sng" algn="ctr">
+                      <a:solidFill>
+                        <a:srgbClr val="E2E8F0"/>
+                      </a:solidFill>
+                      <a:prstDash val="solid"/>
+                      <a:round/>
+                      <a:headEnd type="none" w="med" len="med"/>
+                      <a:tailEnd type="none" w="med" len="med"/>
+                    </a:lnB>
+                    <a:solidFill>
+                      <a:srgbClr val="FFFFFF"/>
+                    </a:solidFill>
+                  </a:tcPr>
+                </a:tc>
                 <a:tc>
                   <a:txBody>
                     <a:bodyPr/>
@@ -15512,7 +15547,7 @@
                         <a:buNone/>
                       </a:pPr>
                       <a:r>
-                        <a:rPr lang="en-US" sz="1150" b="1" dirty="0">
+                        <a:rPr lang="en-US" sz="1150" dirty="0">
                           <a:solidFill>
                             <a:srgbClr val="1F3B57"/>
                           </a:solidFill>
@@ -15648,74 +15683,6 @@
                         <a:buNone/>
                       </a:pPr>
                       <a:r>
-                        <a:rPr lang="en-US" sz="1150" dirty="0">
-                          <a:solidFill>
-                            <a:srgbClr val="1F3B57"/>
-                          </a:solidFill>
-                          <a:latin typeface="Arial" pitchFamily="34" charset="0"/>
-                          <a:ea typeface="Arial" pitchFamily="34" charset="-122"/>
-                          <a:cs typeface="Arial" pitchFamily="34" charset="-120"/>
-                        </a:rPr>
-                        <a:t>0.250</a:t>
-                      </a:r>
-                      <a:endParaRPr lang="en-US" sz="1150" dirty="0">
-                        <a:latin typeface="Arial" charset="0"/>
-                        <a:ea typeface="Arial" charset="0"/>
-                        <a:cs typeface="Arial" charset="0"/>
-                      </a:endParaRPr>
-                    </a:p>
-                  </a:txBody>
-                  <a:tcPr marL="91440" marR="91440" marT="45720" marB="45720" anchor="ctr">
-                    <a:lnL w="9525" cap="flat" cmpd="sng" algn="ctr">
-                      <a:solidFill>
-                        <a:srgbClr val="E2E8F0"/>
-                      </a:solidFill>
-                      <a:prstDash val="solid"/>
-                      <a:round/>
-                      <a:headEnd type="none" w="med" len="med"/>
-                      <a:tailEnd type="none" w="med" len="med"/>
-                    </a:lnL>
-                    <a:lnR w="9525" cap="flat" cmpd="sng" algn="ctr">
-                      <a:solidFill>
-                        <a:srgbClr val="E2E8F0"/>
-                      </a:solidFill>
-                      <a:prstDash val="solid"/>
-                      <a:round/>
-                      <a:headEnd type="none" w="med" len="med"/>
-                      <a:tailEnd type="none" w="med" len="med"/>
-                    </a:lnR>
-                    <a:lnT w="9525" cap="flat" cmpd="sng" algn="ctr">
-                      <a:solidFill>
-                        <a:srgbClr val="E2E8F0"/>
-                      </a:solidFill>
-                      <a:prstDash val="solid"/>
-                      <a:round/>
-                      <a:headEnd type="none" w="med" len="med"/>
-                      <a:tailEnd type="none" w="med" len="med"/>
-                    </a:lnT>
-                    <a:lnB w="9525" cap="flat" cmpd="sng" algn="ctr">
-                      <a:solidFill>
-                        <a:srgbClr val="E2E8F0"/>
-                      </a:solidFill>
-                      <a:prstDash val="solid"/>
-                      <a:round/>
-                      <a:headEnd type="none" w="med" len="med"/>
-                      <a:tailEnd type="none" w="med" len="med"/>
-                    </a:lnB>
-                    <a:solidFill>
-                      <a:srgbClr val="FFFFFF"/>
-                    </a:solidFill>
-                  </a:tcPr>
-                </a:tc>
-                <a:tc>
-                  <a:txBody>
-                    <a:bodyPr/>
-                    <a:lstStyle/>
-                    <a:p>
-                      <a:pPr algn="ctr" indent="0" marL="0">
-                        <a:buNone/>
-                      </a:pPr>
-                      <a:r>
                         <a:rPr lang="en-US" sz="1150" b="1" dirty="0">
                           <a:solidFill>
                             <a:srgbClr val="2E8B57"/>
@@ -15912,6 +15879,815 @@
                   </a:tcPr>
                 </a:tc>
               </a:tr>
+              <a:tr h="365760">
+                <a:tc>
+                  <a:txBody>
+                    <a:bodyPr/>
+                    <a:lstStyle/>
+                    <a:p>
+                      <a:pPr algn="ctr" indent="0" marL="0">
+                        <a:buNone/>
+                      </a:pPr>
+                      <a:r>
+                        <a:rPr lang="en-US" sz="1150" b="1" dirty="0">
+                          <a:solidFill>
+                            <a:srgbClr val="1F3B57"/>
+                          </a:solidFill>
+                          <a:latin typeface="Arial" pitchFamily="34" charset="0"/>
+                          <a:ea typeface="Arial" pitchFamily="34" charset="-122"/>
+                          <a:cs typeface="Arial" pitchFamily="34" charset="-120"/>
+                        </a:rPr>
+                        <a:t>7B</a:t>
+                      </a:r>
+                      <a:endParaRPr lang="en-US" sz="1150" dirty="0">
+                        <a:latin typeface="Arial" charset="0"/>
+                        <a:ea typeface="Arial" charset="0"/>
+                        <a:cs typeface="Arial" charset="0"/>
+                      </a:endParaRPr>
+                    </a:p>
+                  </a:txBody>
+                  <a:tcPr marL="91440" marR="91440" marT="45720" marB="45720" anchor="ctr">
+                    <a:lnL w="9525" cap="flat" cmpd="sng" algn="ctr">
+                      <a:solidFill>
+                        <a:srgbClr val="E2E8F0"/>
+                      </a:solidFill>
+                      <a:prstDash val="solid"/>
+                      <a:round/>
+                      <a:headEnd type="none" w="med" len="med"/>
+                      <a:tailEnd type="none" w="med" len="med"/>
+                    </a:lnL>
+                    <a:lnR w="9525" cap="flat" cmpd="sng" algn="ctr">
+                      <a:solidFill>
+                        <a:srgbClr val="E2E8F0"/>
+                      </a:solidFill>
+                      <a:prstDash val="solid"/>
+                      <a:round/>
+                      <a:headEnd type="none" w="med" len="med"/>
+                      <a:tailEnd type="none" w="med" len="med"/>
+                    </a:lnR>
+                    <a:lnT w="9525" cap="flat" cmpd="sng" algn="ctr">
+                      <a:solidFill>
+                        <a:srgbClr val="E2E8F0"/>
+                      </a:solidFill>
+                      <a:prstDash val="solid"/>
+                      <a:round/>
+                      <a:headEnd type="none" w="med" len="med"/>
+                      <a:tailEnd type="none" w="med" len="med"/>
+                    </a:lnT>
+                    <a:lnB w="9525" cap="flat" cmpd="sng" algn="ctr">
+                      <a:solidFill>
+                        <a:srgbClr val="E2E8F0"/>
+                      </a:solidFill>
+                      <a:prstDash val="solid"/>
+                      <a:round/>
+                      <a:headEnd type="none" w="med" len="med"/>
+                      <a:tailEnd type="none" w="med" len="med"/>
+                    </a:lnB>
+                    <a:solidFill>
+                      <a:srgbClr val="FFFFFF"/>
+                    </a:solidFill>
+                  </a:tcPr>
+                </a:tc>
+                <a:tc>
+                  <a:txBody>
+                    <a:bodyPr/>
+                    <a:lstStyle/>
+                    <a:p>
+                      <a:pPr algn="ctr" indent="0" marL="0">
+                        <a:buNone/>
+                      </a:pPr>
+                      <a:r>
+                        <a:rPr lang="en-US" sz="1150" dirty="0">
+                          <a:solidFill>
+                            <a:srgbClr val="1F3B57"/>
+                          </a:solidFill>
+                          <a:latin typeface="Arial" pitchFamily="34" charset="0"/>
+                          <a:ea typeface="Arial" pitchFamily="34" charset="-122"/>
+                          <a:cs typeface="Arial" pitchFamily="34" charset="-120"/>
+                        </a:rPr>
+                        <a:t>1</a:t>
+                      </a:r>
+                      <a:endParaRPr lang="en-US" sz="1150" dirty="0">
+                        <a:latin typeface="Arial" charset="0"/>
+                        <a:ea typeface="Arial" charset="0"/>
+                        <a:cs typeface="Arial" charset="0"/>
+                      </a:endParaRPr>
+                    </a:p>
+                  </a:txBody>
+                  <a:tcPr marL="91440" marR="91440" marT="45720" marB="45720" anchor="ctr">
+                    <a:lnL w="9525" cap="flat" cmpd="sng" algn="ctr">
+                      <a:solidFill>
+                        <a:srgbClr val="E2E8F0"/>
+                      </a:solidFill>
+                      <a:prstDash val="solid"/>
+                      <a:round/>
+                      <a:headEnd type="none" w="med" len="med"/>
+                      <a:tailEnd type="none" w="med" len="med"/>
+                    </a:lnL>
+                    <a:lnR w="9525" cap="flat" cmpd="sng" algn="ctr">
+                      <a:solidFill>
+                        <a:srgbClr val="E2E8F0"/>
+                      </a:solidFill>
+                      <a:prstDash val="solid"/>
+                      <a:round/>
+                      <a:headEnd type="none" w="med" len="med"/>
+                      <a:tailEnd type="none" w="med" len="med"/>
+                    </a:lnR>
+                    <a:lnT w="9525" cap="flat" cmpd="sng" algn="ctr">
+                      <a:solidFill>
+                        <a:srgbClr val="E2E8F0"/>
+                      </a:solidFill>
+                      <a:prstDash val="solid"/>
+                      <a:round/>
+                      <a:headEnd type="none" w="med" len="med"/>
+                      <a:tailEnd type="none" w="med" len="med"/>
+                    </a:lnT>
+                    <a:lnB w="9525" cap="flat" cmpd="sng" algn="ctr">
+                      <a:solidFill>
+                        <a:srgbClr val="E2E8F0"/>
+                      </a:solidFill>
+                      <a:prstDash val="solid"/>
+                      <a:round/>
+                      <a:headEnd type="none" w="med" len="med"/>
+                      <a:tailEnd type="none" w="med" len="med"/>
+                    </a:lnB>
+                    <a:solidFill>
+                      <a:srgbClr val="FFFFFF"/>
+                    </a:solidFill>
+                  </a:tcPr>
+                </a:tc>
+                <a:tc>
+                  <a:txBody>
+                    <a:bodyPr/>
+                    <a:lstStyle/>
+                    <a:p>
+                      <a:pPr algn="ctr" indent="0" marL="0">
+                        <a:buNone/>
+                      </a:pPr>
+                      <a:r>
+                        <a:rPr lang="en-US" sz="1150" b="1" dirty="0">
+                          <a:solidFill>
+                            <a:srgbClr val="1F77B4"/>
+                          </a:solidFill>
+                          <a:latin typeface="Arial" pitchFamily="34" charset="0"/>
+                          <a:ea typeface="Arial" pitchFamily="34" charset="-122"/>
+                          <a:cs typeface="Arial" pitchFamily="34" charset="-120"/>
+                        </a:rPr>
+                        <a:t>0.953</a:t>
+                      </a:r>
+                      <a:endParaRPr lang="en-US" sz="1150" dirty="0">
+                        <a:latin typeface="Arial" charset="0"/>
+                        <a:ea typeface="Arial" charset="0"/>
+                        <a:cs typeface="Arial" charset="0"/>
+                      </a:endParaRPr>
+                    </a:p>
+                  </a:txBody>
+                  <a:tcPr marL="91440" marR="91440" marT="45720" marB="45720" anchor="ctr">
+                    <a:lnL w="9525" cap="flat" cmpd="sng" algn="ctr">
+                      <a:solidFill>
+                        <a:srgbClr val="E2E8F0"/>
+                      </a:solidFill>
+                      <a:prstDash val="solid"/>
+                      <a:round/>
+                      <a:headEnd type="none" w="med" len="med"/>
+                      <a:tailEnd type="none" w="med" len="med"/>
+                    </a:lnL>
+                    <a:lnR w="9525" cap="flat" cmpd="sng" algn="ctr">
+                      <a:solidFill>
+                        <a:srgbClr val="E2E8F0"/>
+                      </a:solidFill>
+                      <a:prstDash val="solid"/>
+                      <a:round/>
+                      <a:headEnd type="none" w="med" len="med"/>
+                      <a:tailEnd type="none" w="med" len="med"/>
+                    </a:lnR>
+                    <a:lnT w="9525" cap="flat" cmpd="sng" algn="ctr">
+                      <a:solidFill>
+                        <a:srgbClr val="E2E8F0"/>
+                      </a:solidFill>
+                      <a:prstDash val="solid"/>
+                      <a:round/>
+                      <a:headEnd type="none" w="med" len="med"/>
+                      <a:tailEnd type="none" w="med" len="med"/>
+                    </a:lnT>
+                    <a:lnB w="9525" cap="flat" cmpd="sng" algn="ctr">
+                      <a:solidFill>
+                        <a:srgbClr val="E2E8F0"/>
+                      </a:solidFill>
+                      <a:prstDash val="solid"/>
+                      <a:round/>
+                      <a:headEnd type="none" w="med" len="med"/>
+                      <a:tailEnd type="none" w="med" len="med"/>
+                    </a:lnB>
+                    <a:solidFill>
+                      <a:srgbClr val="FFFFFF"/>
+                    </a:solidFill>
+                  </a:tcPr>
+                </a:tc>
+                <a:tc>
+                  <a:txBody>
+                    <a:bodyPr/>
+                    <a:lstStyle/>
+                    <a:p>
+                      <a:pPr algn="ctr" indent="0" marL="0">
+                        <a:buNone/>
+                      </a:pPr>
+                      <a:r>
+                        <a:rPr lang="en-US" sz="1150" dirty="0">
+                          <a:solidFill>
+                            <a:srgbClr val="D62728"/>
+                          </a:solidFill>
+                          <a:latin typeface="Arial" pitchFamily="34" charset="0"/>
+                          <a:ea typeface="Arial" pitchFamily="34" charset="-122"/>
+                          <a:cs typeface="Arial" pitchFamily="34" charset="-120"/>
+                        </a:rPr>
+                        <a:t>0.966</a:t>
+                      </a:r>
+                      <a:endParaRPr lang="en-US" sz="1150" dirty="0">
+                        <a:latin typeface="Arial" charset="0"/>
+                        <a:ea typeface="Arial" charset="0"/>
+                        <a:cs typeface="Arial" charset="0"/>
+                      </a:endParaRPr>
+                    </a:p>
+                  </a:txBody>
+                  <a:tcPr marL="91440" marR="91440" marT="45720" marB="45720" anchor="ctr">
+                    <a:lnL w="9525" cap="flat" cmpd="sng" algn="ctr">
+                      <a:solidFill>
+                        <a:srgbClr val="E2E8F0"/>
+                      </a:solidFill>
+                      <a:prstDash val="solid"/>
+                      <a:round/>
+                      <a:headEnd type="none" w="med" len="med"/>
+                      <a:tailEnd type="none" w="med" len="med"/>
+                    </a:lnL>
+                    <a:lnR w="9525" cap="flat" cmpd="sng" algn="ctr">
+                      <a:solidFill>
+                        <a:srgbClr val="E2E8F0"/>
+                      </a:solidFill>
+                      <a:prstDash val="solid"/>
+                      <a:round/>
+                      <a:headEnd type="none" w="med" len="med"/>
+                      <a:tailEnd type="none" w="med" len="med"/>
+                    </a:lnR>
+                    <a:lnT w="9525" cap="flat" cmpd="sng" algn="ctr">
+                      <a:solidFill>
+                        <a:srgbClr val="E2E8F0"/>
+                      </a:solidFill>
+                      <a:prstDash val="solid"/>
+                      <a:round/>
+                      <a:headEnd type="none" w="med" len="med"/>
+                      <a:tailEnd type="none" w="med" len="med"/>
+                    </a:lnT>
+                    <a:lnB w="9525" cap="flat" cmpd="sng" algn="ctr">
+                      <a:solidFill>
+                        <a:srgbClr val="E2E8F0"/>
+                      </a:solidFill>
+                      <a:prstDash val="solid"/>
+                      <a:round/>
+                      <a:headEnd type="none" w="med" len="med"/>
+                      <a:tailEnd type="none" w="med" len="med"/>
+                    </a:lnB>
+                    <a:solidFill>
+                      <a:srgbClr val="FFFFFF"/>
+                    </a:solidFill>
+                  </a:tcPr>
+                </a:tc>
+                <a:tc>
+                  <a:txBody>
+                    <a:bodyPr/>
+                    <a:lstStyle/>
+                    <a:p>
+                      <a:pPr algn="ctr" indent="0" marL="0">
+                        <a:buNone/>
+                      </a:pPr>
+                      <a:r>
+                        <a:rPr lang="en-US" sz="1150" dirty="0">
+                          <a:solidFill>
+                            <a:srgbClr val="1F3B57"/>
+                          </a:solidFill>
+                          <a:latin typeface="Arial" pitchFamily="34" charset="0"/>
+                          <a:ea typeface="Arial" pitchFamily="34" charset="-122"/>
+                          <a:cs typeface="Arial" pitchFamily="34" charset="-120"/>
+                        </a:rPr>
+                        <a:t>0.8690</a:t>
+                      </a:r>
+                      <a:endParaRPr lang="en-US" sz="1150" dirty="0">
+                        <a:latin typeface="Arial" charset="0"/>
+                        <a:ea typeface="Arial" charset="0"/>
+                        <a:cs typeface="Arial" charset="0"/>
+                      </a:endParaRPr>
+                    </a:p>
+                  </a:txBody>
+                  <a:tcPr marL="91440" marR="91440" marT="45720" marB="45720" anchor="ctr">
+                    <a:lnL w="9525" cap="flat" cmpd="sng" algn="ctr">
+                      <a:solidFill>
+                        <a:srgbClr val="E2E8F0"/>
+                      </a:solidFill>
+                      <a:prstDash val="solid"/>
+                      <a:round/>
+                      <a:headEnd type="none" w="med" len="med"/>
+                      <a:tailEnd type="none" w="med" len="med"/>
+                    </a:lnL>
+                    <a:lnR w="9525" cap="flat" cmpd="sng" algn="ctr">
+                      <a:solidFill>
+                        <a:srgbClr val="E2E8F0"/>
+                      </a:solidFill>
+                      <a:prstDash val="solid"/>
+                      <a:round/>
+                      <a:headEnd type="none" w="med" len="med"/>
+                      <a:tailEnd type="none" w="med" len="med"/>
+                    </a:lnR>
+                    <a:lnT w="9525" cap="flat" cmpd="sng" algn="ctr">
+                      <a:solidFill>
+                        <a:srgbClr val="E2E8F0"/>
+                      </a:solidFill>
+                      <a:prstDash val="solid"/>
+                      <a:round/>
+                      <a:headEnd type="none" w="med" len="med"/>
+                      <a:tailEnd type="none" w="med" len="med"/>
+                    </a:lnT>
+                    <a:lnB w="9525" cap="flat" cmpd="sng" algn="ctr">
+                      <a:solidFill>
+                        <a:srgbClr val="E2E8F0"/>
+                      </a:solidFill>
+                      <a:prstDash val="solid"/>
+                      <a:round/>
+                      <a:headEnd type="none" w="med" len="med"/>
+                      <a:tailEnd type="none" w="med" len="med"/>
+                    </a:lnB>
+                    <a:solidFill>
+                      <a:srgbClr val="FFFFFF"/>
+                    </a:solidFill>
+                  </a:tcPr>
+                </a:tc>
+                <a:tc>
+                  <a:txBody>
+                    <a:bodyPr/>
+                    <a:lstStyle/>
+                    <a:p>
+                      <a:pPr algn="ctr" indent="0" marL="0">
+                        <a:buNone/>
+                      </a:pPr>
+                      <a:r>
+                        <a:rPr lang="en-US" sz="1150" dirty="0">
+                          <a:solidFill>
+                            <a:srgbClr val="1F3B57"/>
+                          </a:solidFill>
+                          <a:latin typeface="Arial" pitchFamily="34" charset="0"/>
+                          <a:ea typeface="Arial" pitchFamily="34" charset="-122"/>
+                          <a:cs typeface="Arial" pitchFamily="34" charset="-120"/>
+                        </a:rPr>
+                        <a:t>0.8884  (+1.9%p)</a:t>
+                      </a:r>
+                      <a:endParaRPr lang="en-US" sz="1150" dirty="0">
+                        <a:latin typeface="Arial" charset="0"/>
+                        <a:ea typeface="Arial" charset="0"/>
+                        <a:cs typeface="Arial" charset="0"/>
+                      </a:endParaRPr>
+                    </a:p>
+                  </a:txBody>
+                  <a:tcPr marL="91440" marR="91440" marT="45720" marB="45720" anchor="ctr">
+                    <a:lnL w="9525" cap="flat" cmpd="sng" algn="ctr">
+                      <a:solidFill>
+                        <a:srgbClr val="E2E8F0"/>
+                      </a:solidFill>
+                      <a:prstDash val="solid"/>
+                      <a:round/>
+                      <a:headEnd type="none" w="med" len="med"/>
+                      <a:tailEnd type="none" w="med" len="med"/>
+                    </a:lnL>
+                    <a:lnR w="9525" cap="flat" cmpd="sng" algn="ctr">
+                      <a:solidFill>
+                        <a:srgbClr val="E2E8F0"/>
+                      </a:solidFill>
+                      <a:prstDash val="solid"/>
+                      <a:round/>
+                      <a:headEnd type="none" w="med" len="med"/>
+                      <a:tailEnd type="none" w="med" len="med"/>
+                    </a:lnR>
+                    <a:lnT w="9525" cap="flat" cmpd="sng" algn="ctr">
+                      <a:solidFill>
+                        <a:srgbClr val="E2E8F0"/>
+                      </a:solidFill>
+                      <a:prstDash val="solid"/>
+                      <a:round/>
+                      <a:headEnd type="none" w="med" len="med"/>
+                      <a:tailEnd type="none" w="med" len="med"/>
+                    </a:lnT>
+                    <a:lnB w="9525" cap="flat" cmpd="sng" algn="ctr">
+                      <a:solidFill>
+                        <a:srgbClr val="E2E8F0"/>
+                      </a:solidFill>
+                      <a:prstDash val="solid"/>
+                      <a:round/>
+                      <a:headEnd type="none" w="med" len="med"/>
+                      <a:tailEnd type="none" w="med" len="med"/>
+                    </a:lnB>
+                    <a:solidFill>
+                      <a:srgbClr val="FFFFFF"/>
+                    </a:solidFill>
+                  </a:tcPr>
+                </a:tc>
+              </a:tr>
+              <a:tr h="365760">
+                <a:tc>
+                  <a:txBody>
+                    <a:bodyPr/>
+                    <a:lstStyle/>
+                    <a:p>
+                      <a:pPr algn="ctr" indent="0" marL="0">
+                        <a:buNone/>
+                      </a:pPr>
+                      <a:endParaRPr lang="en-US" sz="1150" dirty="0">
+                        <a:latin typeface="Arial" charset="0"/>
+                        <a:ea typeface="Arial" charset="0"/>
+                        <a:cs typeface="Arial" charset="0"/>
+                      </a:endParaRPr>
+                    </a:p>
+                  </a:txBody>
+                  <a:tcPr marL="91440" marR="91440" marT="45720" marB="45720" anchor="ctr">
+                    <a:lnL w="9525" cap="flat" cmpd="sng" algn="ctr">
+                      <a:solidFill>
+                        <a:srgbClr val="E2E8F0"/>
+                      </a:solidFill>
+                      <a:prstDash val="solid"/>
+                      <a:round/>
+                      <a:headEnd type="none" w="med" len="med"/>
+                      <a:tailEnd type="none" w="med" len="med"/>
+                    </a:lnL>
+                    <a:lnR w="9525" cap="flat" cmpd="sng" algn="ctr">
+                      <a:solidFill>
+                        <a:srgbClr val="E2E8F0"/>
+                      </a:solidFill>
+                      <a:prstDash val="solid"/>
+                      <a:round/>
+                      <a:headEnd type="none" w="med" len="med"/>
+                      <a:tailEnd type="none" w="med" len="med"/>
+                    </a:lnR>
+                    <a:lnT w="9525" cap="flat" cmpd="sng" algn="ctr">
+                      <a:solidFill>
+                        <a:srgbClr val="E2E8F0"/>
+                      </a:solidFill>
+                      <a:prstDash val="solid"/>
+                      <a:round/>
+                      <a:headEnd type="none" w="med" len="med"/>
+                      <a:tailEnd type="none" w="med" len="med"/>
+                    </a:lnT>
+                    <a:lnB w="9525" cap="flat" cmpd="sng" algn="ctr">
+                      <a:solidFill>
+                        <a:srgbClr val="E2E8F0"/>
+                      </a:solidFill>
+                      <a:prstDash val="solid"/>
+                      <a:round/>
+                      <a:headEnd type="none" w="med" len="med"/>
+                      <a:tailEnd type="none" w="med" len="med"/>
+                    </a:lnB>
+                    <a:solidFill>
+                      <a:srgbClr val="FFFFFF"/>
+                    </a:solidFill>
+                  </a:tcPr>
+                </a:tc>
+                <a:tc>
+                  <a:txBody>
+                    <a:bodyPr/>
+                    <a:lstStyle/>
+                    <a:p>
+                      <a:pPr algn="ctr" indent="0" marL="0">
+                        <a:buNone/>
+                      </a:pPr>
+                      <a:r>
+                        <a:rPr lang="en-US" sz="1150" dirty="0">
+                          <a:solidFill>
+                            <a:srgbClr val="1F3B57"/>
+                          </a:solidFill>
+                          <a:latin typeface="Arial" pitchFamily="34" charset="0"/>
+                          <a:ea typeface="Arial" pitchFamily="34" charset="-122"/>
+                          <a:cs typeface="Arial" pitchFamily="34" charset="-120"/>
+                        </a:rPr>
+                        <a:t>3</a:t>
+                      </a:r>
+                      <a:endParaRPr lang="en-US" sz="1150" dirty="0">
+                        <a:latin typeface="Arial" charset="0"/>
+                        <a:ea typeface="Arial" charset="0"/>
+                        <a:cs typeface="Arial" charset="0"/>
+                      </a:endParaRPr>
+                    </a:p>
+                  </a:txBody>
+                  <a:tcPr marL="91440" marR="91440" marT="45720" marB="45720" anchor="ctr">
+                    <a:lnL w="9525" cap="flat" cmpd="sng" algn="ctr">
+                      <a:solidFill>
+                        <a:srgbClr val="E2E8F0"/>
+                      </a:solidFill>
+                      <a:prstDash val="solid"/>
+                      <a:round/>
+                      <a:headEnd type="none" w="med" len="med"/>
+                      <a:tailEnd type="none" w="med" len="med"/>
+                    </a:lnL>
+                    <a:lnR w="9525" cap="flat" cmpd="sng" algn="ctr">
+                      <a:solidFill>
+                        <a:srgbClr val="E2E8F0"/>
+                      </a:solidFill>
+                      <a:prstDash val="solid"/>
+                      <a:round/>
+                      <a:headEnd type="none" w="med" len="med"/>
+                      <a:tailEnd type="none" w="med" len="med"/>
+                    </a:lnR>
+                    <a:lnT w="9525" cap="flat" cmpd="sng" algn="ctr">
+                      <a:solidFill>
+                        <a:srgbClr val="E2E8F0"/>
+                      </a:solidFill>
+                      <a:prstDash val="solid"/>
+                      <a:round/>
+                      <a:headEnd type="none" w="med" len="med"/>
+                      <a:tailEnd type="none" w="med" len="med"/>
+                    </a:lnT>
+                    <a:lnB w="9525" cap="flat" cmpd="sng" algn="ctr">
+                      <a:solidFill>
+                        <a:srgbClr val="E2E8F0"/>
+                      </a:solidFill>
+                      <a:prstDash val="solid"/>
+                      <a:round/>
+                      <a:headEnd type="none" w="med" len="med"/>
+                      <a:tailEnd type="none" w="med" len="med"/>
+                    </a:lnB>
+                    <a:solidFill>
+                      <a:srgbClr val="FFFFFF"/>
+                    </a:solidFill>
+                  </a:tcPr>
+                </a:tc>
+                <a:tc>
+                  <a:txBody>
+                    <a:bodyPr/>
+                    <a:lstStyle/>
+                    <a:p>
+                      <a:pPr algn="ctr" indent="0" marL="0">
+                        <a:buNone/>
+                      </a:pPr>
+                      <a:r>
+                        <a:rPr lang="en-US" sz="1150" b="1" dirty="0">
+                          <a:solidFill>
+                            <a:srgbClr val="1F77B4"/>
+                          </a:solidFill>
+                          <a:latin typeface="Arial" pitchFamily="34" charset="0"/>
+                          <a:ea typeface="Arial" pitchFamily="34" charset="-122"/>
+                          <a:cs typeface="Arial" pitchFamily="34" charset="-120"/>
+                        </a:rPr>
+                        <a:t>0.937</a:t>
+                      </a:r>
+                      <a:endParaRPr lang="en-US" sz="1150" dirty="0">
+                        <a:latin typeface="Arial" charset="0"/>
+                        <a:ea typeface="Arial" charset="0"/>
+                        <a:cs typeface="Arial" charset="0"/>
+                      </a:endParaRPr>
+                    </a:p>
+                  </a:txBody>
+                  <a:tcPr marL="91440" marR="91440" marT="45720" marB="45720" anchor="ctr">
+                    <a:lnL w="9525" cap="flat" cmpd="sng" algn="ctr">
+                      <a:solidFill>
+                        <a:srgbClr val="E2E8F0"/>
+                      </a:solidFill>
+                      <a:prstDash val="solid"/>
+                      <a:round/>
+                      <a:headEnd type="none" w="med" len="med"/>
+                      <a:tailEnd type="none" w="med" len="med"/>
+                    </a:lnL>
+                    <a:lnR w="9525" cap="flat" cmpd="sng" algn="ctr">
+                      <a:solidFill>
+                        <a:srgbClr val="E2E8F0"/>
+                      </a:solidFill>
+                      <a:prstDash val="solid"/>
+                      <a:round/>
+                      <a:headEnd type="none" w="med" len="med"/>
+                      <a:tailEnd type="none" w="med" len="med"/>
+                    </a:lnR>
+                    <a:lnT w="9525" cap="flat" cmpd="sng" algn="ctr">
+                      <a:solidFill>
+                        <a:srgbClr val="E2E8F0"/>
+                      </a:solidFill>
+                      <a:prstDash val="solid"/>
+                      <a:round/>
+                      <a:headEnd type="none" w="med" len="med"/>
+                      <a:tailEnd type="none" w="med" len="med"/>
+                    </a:lnT>
+                    <a:lnB w="9525" cap="flat" cmpd="sng" algn="ctr">
+                      <a:solidFill>
+                        <a:srgbClr val="E2E8F0"/>
+                      </a:solidFill>
+                      <a:prstDash val="solid"/>
+                      <a:round/>
+                      <a:headEnd type="none" w="med" len="med"/>
+                      <a:tailEnd type="none" w="med" len="med"/>
+                    </a:lnB>
+                    <a:solidFill>
+                      <a:srgbClr val="FFFFFF"/>
+                    </a:solidFill>
+                  </a:tcPr>
+                </a:tc>
+                <a:tc>
+                  <a:txBody>
+                    <a:bodyPr/>
+                    <a:lstStyle/>
+                    <a:p>
+                      <a:pPr algn="ctr" indent="0" marL="0">
+                        <a:buNone/>
+                      </a:pPr>
+                      <a:r>
+                        <a:rPr lang="en-US" sz="1150" dirty="0">
+                          <a:solidFill>
+                            <a:srgbClr val="D62728"/>
+                          </a:solidFill>
+                          <a:latin typeface="Arial" pitchFamily="34" charset="0"/>
+                          <a:ea typeface="Arial" pitchFamily="34" charset="-122"/>
+                          <a:cs typeface="Arial" pitchFamily="34" charset="-120"/>
+                        </a:rPr>
+                        <a:t>0.975</a:t>
+                      </a:r>
+                      <a:endParaRPr lang="en-US" sz="1150" dirty="0">
+                        <a:latin typeface="Arial" charset="0"/>
+                        <a:ea typeface="Arial" charset="0"/>
+                        <a:cs typeface="Arial" charset="0"/>
+                      </a:endParaRPr>
+                    </a:p>
+                  </a:txBody>
+                  <a:tcPr marL="91440" marR="91440" marT="45720" marB="45720" anchor="ctr">
+                    <a:lnL w="9525" cap="flat" cmpd="sng" algn="ctr">
+                      <a:solidFill>
+                        <a:srgbClr val="E2E8F0"/>
+                      </a:solidFill>
+                      <a:prstDash val="solid"/>
+                      <a:round/>
+                      <a:headEnd type="none" w="med" len="med"/>
+                      <a:tailEnd type="none" w="med" len="med"/>
+                    </a:lnL>
+                    <a:lnR w="9525" cap="flat" cmpd="sng" algn="ctr">
+                      <a:solidFill>
+                        <a:srgbClr val="E2E8F0"/>
+                      </a:solidFill>
+                      <a:prstDash val="solid"/>
+                      <a:round/>
+                      <a:headEnd type="none" w="med" len="med"/>
+                      <a:tailEnd type="none" w="med" len="med"/>
+                    </a:lnR>
+                    <a:lnT w="9525" cap="flat" cmpd="sng" algn="ctr">
+                      <a:solidFill>
+                        <a:srgbClr val="E2E8F0"/>
+                      </a:solidFill>
+                      <a:prstDash val="solid"/>
+                      <a:round/>
+                      <a:headEnd type="none" w="med" len="med"/>
+                      <a:tailEnd type="none" w="med" len="med"/>
+                    </a:lnT>
+                    <a:lnB w="9525" cap="flat" cmpd="sng" algn="ctr">
+                      <a:solidFill>
+                        <a:srgbClr val="E2E8F0"/>
+                      </a:solidFill>
+                      <a:prstDash val="solid"/>
+                      <a:round/>
+                      <a:headEnd type="none" w="med" len="med"/>
+                      <a:tailEnd type="none" w="med" len="med"/>
+                    </a:lnB>
+                    <a:solidFill>
+                      <a:srgbClr val="FFFFFF"/>
+                    </a:solidFill>
+                  </a:tcPr>
+                </a:tc>
+                <a:tc>
+                  <a:txBody>
+                    <a:bodyPr/>
+                    <a:lstStyle/>
+                    <a:p>
+                      <a:pPr algn="ctr" indent="0" marL="0">
+                        <a:buNone/>
+                      </a:pPr>
+                      <a:r>
+                        <a:rPr lang="en-US" sz="1150" dirty="0">
+                          <a:solidFill>
+                            <a:srgbClr val="1F3B57"/>
+                          </a:solidFill>
+                          <a:latin typeface="Arial" pitchFamily="34" charset="0"/>
+                          <a:ea typeface="Arial" pitchFamily="34" charset="-122"/>
+                          <a:cs typeface="Arial" pitchFamily="34" charset="-120"/>
+                        </a:rPr>
+                        <a:t>0.8740</a:t>
+                      </a:r>
+                      <a:endParaRPr lang="en-US" sz="1150" dirty="0">
+                        <a:latin typeface="Arial" charset="0"/>
+                        <a:ea typeface="Arial" charset="0"/>
+                        <a:cs typeface="Arial" charset="0"/>
+                      </a:endParaRPr>
+                    </a:p>
+                  </a:txBody>
+                  <a:tcPr marL="91440" marR="91440" marT="45720" marB="45720" anchor="ctr">
+                    <a:lnL w="9525" cap="flat" cmpd="sng" algn="ctr">
+                      <a:solidFill>
+                        <a:srgbClr val="E2E8F0"/>
+                      </a:solidFill>
+                      <a:prstDash val="solid"/>
+                      <a:round/>
+                      <a:headEnd type="none" w="med" len="med"/>
+                      <a:tailEnd type="none" w="med" len="med"/>
+                    </a:lnL>
+                    <a:lnR w="9525" cap="flat" cmpd="sng" algn="ctr">
+                      <a:solidFill>
+                        <a:srgbClr val="E2E8F0"/>
+                      </a:solidFill>
+                      <a:prstDash val="solid"/>
+                      <a:round/>
+                      <a:headEnd type="none" w="med" len="med"/>
+                      <a:tailEnd type="none" w="med" len="med"/>
+                    </a:lnR>
+                    <a:lnT w="9525" cap="flat" cmpd="sng" algn="ctr">
+                      <a:solidFill>
+                        <a:srgbClr val="E2E8F0"/>
+                      </a:solidFill>
+                      <a:prstDash val="solid"/>
+                      <a:round/>
+                      <a:headEnd type="none" w="med" len="med"/>
+                      <a:tailEnd type="none" w="med" len="med"/>
+                    </a:lnT>
+                    <a:lnB w="9525" cap="flat" cmpd="sng" algn="ctr">
+                      <a:solidFill>
+                        <a:srgbClr val="E2E8F0"/>
+                      </a:solidFill>
+                      <a:prstDash val="solid"/>
+                      <a:round/>
+                      <a:headEnd type="none" w="med" len="med"/>
+                      <a:tailEnd type="none" w="med" len="med"/>
+                    </a:lnB>
+                    <a:solidFill>
+                      <a:srgbClr val="FFFFFF"/>
+                    </a:solidFill>
+                  </a:tcPr>
+                </a:tc>
+                <a:tc>
+                  <a:txBody>
+                    <a:bodyPr/>
+                    <a:lstStyle/>
+                    <a:p>
+                      <a:pPr algn="ctr" indent="0" marL="0">
+                        <a:buNone/>
+                      </a:pPr>
+                      <a:r>
+                        <a:rPr lang="en-US" sz="1150" dirty="0">
+                          <a:solidFill>
+                            <a:srgbClr val="1F3B57"/>
+                          </a:solidFill>
+                          <a:latin typeface="Arial" pitchFamily="34" charset="0"/>
+                          <a:ea typeface="Arial" pitchFamily="34" charset="-122"/>
+                          <a:cs typeface="Arial" pitchFamily="34" charset="-120"/>
+                        </a:rPr>
+                        <a:t>0.8928  (+1.9%p)</a:t>
+                      </a:r>
+                      <a:endParaRPr lang="en-US" sz="1150" dirty="0">
+                        <a:latin typeface="Arial" charset="0"/>
+                        <a:ea typeface="Arial" charset="0"/>
+                        <a:cs typeface="Arial" charset="0"/>
+                      </a:endParaRPr>
+                    </a:p>
+                  </a:txBody>
+                  <a:tcPr marL="91440" marR="91440" marT="45720" marB="45720" anchor="ctr">
+                    <a:lnL w="9525" cap="flat" cmpd="sng" algn="ctr">
+                      <a:solidFill>
+                        <a:srgbClr val="E2E8F0"/>
+                      </a:solidFill>
+                      <a:prstDash val="solid"/>
+                      <a:round/>
+                      <a:headEnd type="none" w="med" len="med"/>
+                      <a:tailEnd type="none" w="med" len="med"/>
+                    </a:lnL>
+                    <a:lnR w="9525" cap="flat" cmpd="sng" algn="ctr">
+                      <a:solidFill>
+                        <a:srgbClr val="E2E8F0"/>
+                      </a:solidFill>
+                      <a:prstDash val="solid"/>
+                      <a:round/>
+                      <a:headEnd type="none" w="med" len="med"/>
+                      <a:tailEnd type="none" w="med" len="med"/>
+                    </a:lnR>
+                    <a:lnT w="9525" cap="flat" cmpd="sng" algn="ctr">
+                      <a:solidFill>
+                        <a:srgbClr val="E2E8F0"/>
+                      </a:solidFill>
+                      <a:prstDash val="solid"/>
+                      <a:round/>
+                      <a:headEnd type="none" w="med" len="med"/>
+                      <a:tailEnd type="none" w="med" len="med"/>
+                    </a:lnT>
+                    <a:lnB w="9525" cap="flat" cmpd="sng" algn="ctr">
+                      <a:solidFill>
+                        <a:srgbClr val="E2E8F0"/>
+                      </a:solidFill>
+                      <a:prstDash val="solid"/>
+                      <a:round/>
+                      <a:headEnd type="none" w="med" len="med"/>
+                      <a:tailEnd type="none" w="med" len="med"/>
+                    </a:lnB>
+                    <a:solidFill>
+                      <a:srgbClr val="FFFFFF"/>
+                    </a:solidFill>
+                  </a:tcPr>
+                </a:tc>
+              </a:tr>
             </a:tbl>
           </a:graphicData>
         </a:graphic>
@@ -15924,8 +16700,8 @@
         </p:nvSpPr>
         <p:spPr>
           <a:xfrm>
-            <a:off x="502920" y="4526280"/>
-            <a:ext cx="11201400" cy="731520"/>
+            <a:off x="502920" y="4828032"/>
+            <a:ext cx="11201400" cy="777240"/>
           </a:xfrm>
           <a:prstGeom prst="rect">
             <a:avLst/>
@@ -15938,10 +16714,13 @@
           <a:lstStyle/>
           <a:p>
             <a:pPr indent="0" marL="0">
+              <a:spcAft>
+                <a:spcPts val="400"/>
+              </a:spcAft>
               <a:buNone/>
             </a:pPr>
             <a:r>
-              <a:rPr lang="en-US" sz="1250" b="1" dirty="0">
+              <a:rPr lang="en-US" sz="1200" b="1" dirty="0">
                 <a:solidFill>
                   <a:srgbClr val="1F3B57"/>
                 </a:solidFill>
@@ -15949,13 +16728,16 @@
                 <a:ea typeface="Arial" pitchFamily="34" charset="-122"/>
                 <a:cs typeface="Arial" pitchFamily="34" charset="-120"/>
               </a:rPr>
-              <a:t>두 곡선이 반대로 움직입니다.  </a:t>
+              <a:t>3B에서는 두 곡선이 반대로 움직여 N=2에서 교차합니다.  </a:t>
             </a:r>
             <a:pPr indent="0" marL="0">
+              <a:spcAft>
+                <a:spcPts val="400"/>
+              </a:spcAft>
               <a:buNone/>
             </a:pPr>
             <a:r>
-              <a:rPr lang="en-US" sz="1250" dirty="0">
+              <a:rPr lang="en-US" sz="1200" dirty="0">
                 <a:solidFill>
                   <a:srgbClr val="1F3B57"/>
                 </a:solidFill>
@@ -15963,9 +16745,29 @@
                 <a:ea typeface="Arial" pitchFamily="34" charset="-122"/>
                 <a:cs typeface="Arial" pitchFamily="34" charset="-120"/>
               </a:rPr>
-              <a:t>컨트롤러 정확도는 방해가 늘수록 올라가고(0.693 → 0.730), 손익분기는 내려갑니다(0.761 → 0.569). 손상이 클수록 오판 비용이 상대적으로 싸지고, 동시에 반사실 신호가 강해져 판정도 정확해지기 때문입니다.</a:t>
+              <a:t>컨트롤러는 방해가 늘수록 정확해지고(0.693 → 0.730), 손익분기는 내려갑니다(0.761 → 0.569).</a:t>
             </a:r>
-            <a:endParaRPr lang="en-US" sz="1250" dirty="0"/>
+            <a:endParaRPr lang="en-US" sz="1200" dirty="0"/>
+          </a:p>
+          <a:p>
+            <a:pPr indent="0" marL="0">
+              <a:spcAft>
+                <a:spcPts val="400"/>
+              </a:spcAft>
+              <a:buNone/>
+            </a:pPr>
+            <a:r>
+              <a:rPr lang="en-US" sz="1200" dirty="0">
+                <a:solidFill>
+                  <a:srgbClr val="1F3B57"/>
+                </a:solidFill>
+                <a:latin typeface="Arial" pitchFamily="34" charset="0"/>
+                <a:ea typeface="Arial" pitchFamily="34" charset="-122"/>
+                <a:cs typeface="Arial" pitchFamily="34" charset="-120"/>
+              </a:rPr>
+              <a:t>7B에서는 컨트롤러가 0.95로 훨씬 정확한데도 손익분기가 0.97이라 순이득이 남지 않습니다 — 고칠 손상 자체가 작기 때문입니다. 컨트롤러가 되는 곳에는 고칠 게 없고, 고칠 게 많은 곳에서 컨트롤러가 겨우 됩니다.</a:t>
+            </a:r>
+            <a:endParaRPr lang="en-US" sz="1200" dirty="0"/>
           </a:p>
         </p:txBody>
       </p:sp>
@@ -16002,7 +16804,7 @@
                 <a:ea typeface="Arial" pitchFamily="34" charset="-122"/>
                 <a:cs typeface="Arial" pitchFamily="34" charset="-120"/>
               </a:rPr>
-              <a:t>3B n=300. 컨트롤러 정확도와 손익분기는 정확한 값이며, '실현 성능'은 오판 시 조건을 근사한 낙관값 — 0.730 &gt; 0.569 판정은 근사에 의존하지 않음. forward N+1회 필요(정확도 트랙)</a:t>
+              <a:t>n=300/모델. 컨트롤러 정확도와 손익분기는 정확한 값이며, '실현 성능'은 오판 시 조건을 근사한 낙관값 — 0.730 &gt; 0.569 판정은 근사에 의존하지 않음. forward N+1회 필요(정확도 트랙)</a:t>
             </a:r>
             <a:endParaRPr lang="en-US" sz="1000" dirty="0"/>
           </a:p>
@@ -16063,7 +16865,7 @@
                 <a:ea typeface="Arial" pitchFamily="34" charset="-122"/>
                 <a:cs typeface="Arial" pitchFamily="34" charset="-120"/>
               </a:rPr>
-              <a:t>→ 무관 입력이 많을수록 방법이 더 잘 작동합니다. 방법이 필요한 상황이 곧 방법이 통하는 상황입니다</a:t>
+              <a:t>→ 이 방법의 가치는 소형 모델 + 다수 무관 입력 레짐에 있습니다. 7B 이상은 "되지만 고칠 게 없다"가 정직한 서술입니다</a:t>
             </a:r>
             <a:endParaRPr lang="en-US" sz="1250" dirty="0"/>
           </a:p>

--- a/meeting/_generated/deck_v5.pptx
+++ b/meeting/_generated/deck_v5.pptx
@@ -9675,7 +9675,7 @@
           </p:nvPr>
         </p:nvGraphicFramePr>
         <p:xfrm>
-          <a:off x="502920" y="1371600"/>
+          <a:off x="502920" y="1325880"/>
           <a:ext cx="11201400" cy="914400"/>
         </p:xfrm>
         <a:graphic>
@@ -9688,7 +9688,7 @@
                 <a:gridCol w="2800350"/>
                 <a:gridCol w="2800350"/>
               </a:tblGrid>
-              <a:tr h="457200">
+              <a:tr h="402336">
                 <a:tc>
                   <a:txBody>
                     <a:bodyPr/>
@@ -9962,7 +9962,7 @@
                   </a:tcPr>
                 </a:tc>
               </a:tr>
-              <a:tr h="566928">
+              <a:tr h="457200">
                 <a:tc>
                   <a:txBody>
                     <a:bodyPr/>
@@ -10108,7 +10108,7 @@
                         <a:buNone/>
                       </a:pPr>
                       <a:r>
-                        <a:rPr lang="en-US" sz="1150" dirty="0">
+                        <a:rPr lang="en-US" sz="1050" dirty="0">
                           <a:solidFill>
                             <a:srgbClr val="1F3B57"/>
                           </a:solidFill>
@@ -10116,9 +10116,9 @@
                           <a:ea typeface="Arial" pitchFamily="34" charset="-122"/>
                           <a:cs typeface="Arial" pitchFamily="34" charset="-120"/>
                         </a:rPr>
-                        <a:t>3B +0.0009 · 7B −0.0022  (CI가 0 포함)</a:t>
+                        <a:t>+0.0009 — 단 이 태스크는 AUC 0.99로 천장</a:t>
                       </a:r>
-                      <a:endParaRPr lang="en-US" sz="1150" dirty="0">
+                      <a:endParaRPr lang="en-US" sz="1050" dirty="0">
                         <a:latin typeface="Arial" charset="0"/>
                         <a:ea typeface="Arial" charset="0"/>
                         <a:cs typeface="Arial" charset="0"/>
@@ -10178,13 +10178,13 @@
                       <a:r>
                         <a:rPr lang="en-US" sz="1150" b="1" dirty="0">
                           <a:solidFill>
-                            <a:srgbClr val="2E8B57"/>
+                            <a:srgbClr val="6B7280"/>
                           </a:solidFill>
                           <a:latin typeface="Arial" pitchFamily="34" charset="0"/>
                           <a:ea typeface="Arial" pitchFamily="34" charset="-122"/>
                           <a:cs typeface="Arial" pitchFamily="34" charset="-120"/>
                         </a:rPr>
-                        <a:t>불필요</a:t>
+                        <a:t>판정 불가</a:t>
                       </a:r>
                       <a:endParaRPr lang="en-US" sz="1150" dirty="0">
                         <a:latin typeface="Arial" charset="0"/>
@@ -10236,7 +10236,281 @@
                   </a:tcPr>
                 </a:tc>
               </a:tr>
-              <a:tr h="566928">
+              <a:tr h="457200">
+                <a:tc>
+                  <a:txBody>
+                    <a:bodyPr/>
+                    <a:lstStyle/>
+                    <a:p>
+                      <a:pPr algn="ctr" indent="0" marL="0">
+                        <a:buNone/>
+                      </a:pPr>
+                      <a:r>
+                        <a:rPr lang="en-US" sz="1150" b="1" dirty="0">
+                          <a:solidFill>
+                            <a:srgbClr val="1F3B57"/>
+                          </a:solidFill>
+                          <a:latin typeface="Arial" pitchFamily="34" charset="0"/>
+                          <a:ea typeface="Arial" pitchFamily="34" charset="-122"/>
+                          <a:cs typeface="Arial" pitchFamily="34" charset="-120"/>
+                        </a:rPr>
+                        <a:t>존재 확인 (all)</a:t>
+                      </a:r>
+                      <a:endParaRPr lang="en-US" sz="1150" dirty="0">
+                        <a:latin typeface="Arial" charset="0"/>
+                        <a:ea typeface="Arial" charset="0"/>
+                        <a:cs typeface="Arial" charset="0"/>
+                      </a:endParaRPr>
+                    </a:p>
+                  </a:txBody>
+                  <a:tcPr marL="91440" marR="91440" marT="45720" marB="45720" anchor="ctr">
+                    <a:lnL w="9525" cap="flat" cmpd="sng" algn="ctr">
+                      <a:solidFill>
+                        <a:srgbClr val="E2E8F0"/>
+                      </a:solidFill>
+                      <a:prstDash val="solid"/>
+                      <a:round/>
+                      <a:headEnd type="none" w="med" len="med"/>
+                      <a:tailEnd type="none" w="med" len="med"/>
+                    </a:lnL>
+                    <a:lnR w="9525" cap="flat" cmpd="sng" algn="ctr">
+                      <a:solidFill>
+                        <a:srgbClr val="E2E8F0"/>
+                      </a:solidFill>
+                      <a:prstDash val="solid"/>
+                      <a:round/>
+                      <a:headEnd type="none" w="med" len="med"/>
+                      <a:tailEnd type="none" w="med" len="med"/>
+                    </a:lnR>
+                    <a:lnT w="9525" cap="flat" cmpd="sng" algn="ctr">
+                      <a:solidFill>
+                        <a:srgbClr val="E2E8F0"/>
+                      </a:solidFill>
+                      <a:prstDash val="solid"/>
+                      <a:round/>
+                      <a:headEnd type="none" w="med" len="med"/>
+                      <a:tailEnd type="none" w="med" len="med"/>
+                    </a:lnT>
+                    <a:lnB w="9525" cap="flat" cmpd="sng" algn="ctr">
+                      <a:solidFill>
+                        <a:srgbClr val="E2E8F0"/>
+                      </a:solidFill>
+                      <a:prstDash val="solid"/>
+                      <a:round/>
+                      <a:headEnd type="none" w="med" len="med"/>
+                      <a:tailEnd type="none" w="med" len="med"/>
+                    </a:lnB>
+                    <a:solidFill>
+                      <a:srgbClr val="FFFFFF"/>
+                    </a:solidFill>
+                  </a:tcPr>
+                </a:tc>
+                <a:tc>
+                  <a:txBody>
+                    <a:bodyPr/>
+                    <a:lstStyle/>
+                    <a:p>
+                      <a:pPr algn="ctr" indent="0" marL="0">
+                        <a:buNone/>
+                      </a:pPr>
+                      <a:r>
+                        <a:rPr lang="en-US" sz="1100" dirty="0">
+                          <a:solidFill>
+                            <a:srgbClr val="1F3B57"/>
+                          </a:solidFill>
+                          <a:latin typeface="Arial" pitchFamily="34" charset="0"/>
+                          <a:ea typeface="Arial" pitchFamily="34" charset="-122"/>
+                          <a:cs typeface="Arial" pitchFamily="34" charset="-120"/>
+                        </a:rPr>
+                        <a:t>"모두 X를 담고 있나?"</a:t>
+                      </a:r>
+                      <a:endParaRPr lang="en-US" sz="1100" dirty="0">
+                        <a:latin typeface="Arial" charset="0"/>
+                        <a:ea typeface="Arial" charset="0"/>
+                        <a:cs typeface="Arial" charset="0"/>
+                      </a:endParaRPr>
+                    </a:p>
+                  </a:txBody>
+                  <a:tcPr marL="91440" marR="91440" marT="45720" marB="45720" anchor="ctr">
+                    <a:lnL w="9525" cap="flat" cmpd="sng" algn="ctr">
+                      <a:solidFill>
+                        <a:srgbClr val="E2E8F0"/>
+                      </a:solidFill>
+                      <a:prstDash val="solid"/>
+                      <a:round/>
+                      <a:headEnd type="none" w="med" len="med"/>
+                      <a:tailEnd type="none" w="med" len="med"/>
+                    </a:lnL>
+                    <a:lnR w="9525" cap="flat" cmpd="sng" algn="ctr">
+                      <a:solidFill>
+                        <a:srgbClr val="E2E8F0"/>
+                      </a:solidFill>
+                      <a:prstDash val="solid"/>
+                      <a:round/>
+                      <a:headEnd type="none" w="med" len="med"/>
+                      <a:tailEnd type="none" w="med" len="med"/>
+                    </a:lnR>
+                    <a:lnT w="9525" cap="flat" cmpd="sng" algn="ctr">
+                      <a:solidFill>
+                        <a:srgbClr val="E2E8F0"/>
+                      </a:solidFill>
+                      <a:prstDash val="solid"/>
+                      <a:round/>
+                      <a:headEnd type="none" w="med" len="med"/>
+                      <a:tailEnd type="none" w="med" len="med"/>
+                    </a:lnT>
+                    <a:lnB w="9525" cap="flat" cmpd="sng" algn="ctr">
+                      <a:solidFill>
+                        <a:srgbClr val="E2E8F0"/>
+                      </a:solidFill>
+                      <a:prstDash val="solid"/>
+                      <a:round/>
+                      <a:headEnd type="none" w="med" len="med"/>
+                      <a:tailEnd type="none" w="med" len="med"/>
+                    </a:lnB>
+                    <a:solidFill>
+                      <a:srgbClr val="FFFFFF"/>
+                    </a:solidFill>
+                  </a:tcPr>
+                </a:tc>
+                <a:tc>
+                  <a:txBody>
+                    <a:bodyPr/>
+                    <a:lstStyle/>
+                    <a:p>
+                      <a:pPr algn="ctr" indent="0" marL="0">
+                        <a:buNone/>
+                      </a:pPr>
+                      <a:r>
+                        <a:rPr lang="en-US" sz="1050" dirty="0">
+                          <a:solidFill>
+                            <a:srgbClr val="1F3B57"/>
+                          </a:solidFill>
+                          <a:latin typeface="Arial" pitchFamily="34" charset="0"/>
+                          <a:ea typeface="Arial" pitchFamily="34" charset="-122"/>
+                          <a:cs typeface="Arial" pitchFamily="34" charset="-120"/>
+                        </a:rPr>
+                        <a:t>−0.0250  CI [−0.057, +0.009] — 0과 구분 안 됨 (AUC 0.65)</a:t>
+                      </a:r>
+                      <a:endParaRPr lang="en-US" sz="1050" dirty="0">
+                        <a:latin typeface="Arial" charset="0"/>
+                        <a:ea typeface="Arial" charset="0"/>
+                        <a:cs typeface="Arial" charset="0"/>
+                      </a:endParaRPr>
+                    </a:p>
+                  </a:txBody>
+                  <a:tcPr marL="91440" marR="91440" marT="45720" marB="45720" anchor="ctr">
+                    <a:lnL w="9525" cap="flat" cmpd="sng" algn="ctr">
+                      <a:solidFill>
+                        <a:srgbClr val="E2E8F0"/>
+                      </a:solidFill>
+                      <a:prstDash val="solid"/>
+                      <a:round/>
+                      <a:headEnd type="none" w="med" len="med"/>
+                      <a:tailEnd type="none" w="med" len="med"/>
+                    </a:lnL>
+                    <a:lnR w="9525" cap="flat" cmpd="sng" algn="ctr">
+                      <a:solidFill>
+                        <a:srgbClr val="E2E8F0"/>
+                      </a:solidFill>
+                      <a:prstDash val="solid"/>
+                      <a:round/>
+                      <a:headEnd type="none" w="med" len="med"/>
+                      <a:tailEnd type="none" w="med" len="med"/>
+                    </a:lnR>
+                    <a:lnT w="9525" cap="flat" cmpd="sng" algn="ctr">
+                      <a:solidFill>
+                        <a:srgbClr val="E2E8F0"/>
+                      </a:solidFill>
+                      <a:prstDash val="solid"/>
+                      <a:round/>
+                      <a:headEnd type="none" w="med" len="med"/>
+                      <a:tailEnd type="none" w="med" len="med"/>
+                    </a:lnT>
+                    <a:lnB w="9525" cap="flat" cmpd="sng" algn="ctr">
+                      <a:solidFill>
+                        <a:srgbClr val="E2E8F0"/>
+                      </a:solidFill>
+                      <a:prstDash val="solid"/>
+                      <a:round/>
+                      <a:headEnd type="none" w="med" len="med"/>
+                      <a:tailEnd type="none" w="med" len="med"/>
+                    </a:lnB>
+                    <a:solidFill>
+                      <a:srgbClr val="FFFFFF"/>
+                    </a:solidFill>
+                  </a:tcPr>
+                </a:tc>
+                <a:tc>
+                  <a:txBody>
+                    <a:bodyPr/>
+                    <a:lstStyle/>
+                    <a:p>
+                      <a:pPr algn="ctr" indent="0" marL="0">
+                        <a:buNone/>
+                      </a:pPr>
+                      <a:r>
+                        <a:rPr lang="en-US" sz="1150" b="1" dirty="0">
+                          <a:solidFill>
+                            <a:srgbClr val="E8890C"/>
+                          </a:solidFill>
+                          <a:latin typeface="Arial" pitchFamily="34" charset="0"/>
+                          <a:ea typeface="Arial" pitchFamily="34" charset="-122"/>
+                          <a:cs typeface="Arial" pitchFamily="34" charset="-120"/>
+                        </a:rPr>
+                        <a:t>작은 비용</a:t>
+                      </a:r>
+                      <a:endParaRPr lang="en-US" sz="1150" dirty="0">
+                        <a:latin typeface="Arial" charset="0"/>
+                        <a:ea typeface="Arial" charset="0"/>
+                        <a:cs typeface="Arial" charset="0"/>
+                      </a:endParaRPr>
+                    </a:p>
+                  </a:txBody>
+                  <a:tcPr marL="91440" marR="91440" marT="45720" marB="45720" anchor="ctr">
+                    <a:lnL w="9525" cap="flat" cmpd="sng" algn="ctr">
+                      <a:solidFill>
+                        <a:srgbClr val="E2E8F0"/>
+                      </a:solidFill>
+                      <a:prstDash val="solid"/>
+                      <a:round/>
+                      <a:headEnd type="none" w="med" len="med"/>
+                      <a:tailEnd type="none" w="med" len="med"/>
+                    </a:lnL>
+                    <a:lnR w="9525" cap="flat" cmpd="sng" algn="ctr">
+                      <a:solidFill>
+                        <a:srgbClr val="E2E8F0"/>
+                      </a:solidFill>
+                      <a:prstDash val="solid"/>
+                      <a:round/>
+                      <a:headEnd type="none" w="med" len="med"/>
+                      <a:tailEnd type="none" w="med" len="med"/>
+                    </a:lnR>
+                    <a:lnT w="9525" cap="flat" cmpd="sng" algn="ctr">
+                      <a:solidFill>
+                        <a:srgbClr val="E2E8F0"/>
+                      </a:solidFill>
+                      <a:prstDash val="solid"/>
+                      <a:round/>
+                      <a:headEnd type="none" w="med" len="med"/>
+                      <a:tailEnd type="none" w="med" len="med"/>
+                    </a:lnT>
+                    <a:lnB w="9525" cap="flat" cmpd="sng" algn="ctr">
+                      <a:solidFill>
+                        <a:srgbClr val="E2E8F0"/>
+                      </a:solidFill>
+                      <a:prstDash val="solid"/>
+                      <a:round/>
+                      <a:headEnd type="none" w="med" len="med"/>
+                      <a:tailEnd type="none" w="med" len="med"/>
+                    </a:lnB>
+                    <a:solidFill>
+                      <a:srgbClr val="FFFFFF"/>
+                    </a:solidFill>
+                  </a:tcPr>
+                </a:tc>
+              </a:tr>
+              <a:tr h="457200">
                 <a:tc>
                   <a:txBody>
                     <a:bodyPr/>
@@ -10382,7 +10656,7 @@
                         <a:buNone/>
                       </a:pPr>
                       <a:r>
-                        <a:rPr lang="en-US" sz="1150" dirty="0">
+                        <a:rPr lang="en-US" sz="1050" dirty="0">
                           <a:solidFill>
                             <a:srgbClr val="1F3B57"/>
                           </a:solidFill>
@@ -10392,7 +10666,7 @@
                         </a:rPr>
                         <a:t>3B R1 −12.0%p · 7B R1 −9.0%p · RB −16.0%p</a:t>
                       </a:r>
-                      <a:endParaRPr lang="en-US" sz="1150" dirty="0">
+                      <a:endParaRPr lang="en-US" sz="1050" dirty="0">
                         <a:latin typeface="Arial" charset="0"/>
                         <a:ea typeface="Arial" charset="0"/>
                         <a:cs typeface="Arial" charset="0"/>
@@ -10522,7 +10796,7 @@
         </p:nvSpPr>
         <p:spPr>
           <a:xfrm>
-            <a:off x="502920" y="3108960"/>
+            <a:off x="502920" y="3145536"/>
             <a:ext cx="11201400" cy="1572768"/>
           </a:xfrm>
           <a:prstGeom prst="roundRect">
@@ -10549,7 +10823,7 @@
         </p:nvSpPr>
         <p:spPr>
           <a:xfrm>
-            <a:off x="777240" y="3255264"/>
+            <a:off x="777240" y="3291840"/>
             <a:ext cx="10698480" cy="292608"/>
           </a:xfrm>
           <a:prstGeom prst="rect">
@@ -10588,7 +10862,7 @@
         </p:nvSpPr>
         <p:spPr>
           <a:xfrm>
-            <a:off x="777240" y="3621024"/>
+            <a:off x="777240" y="3657600"/>
             <a:ext cx="10698480" cy="1005840"/>
           </a:xfrm>
           <a:prstGeom prst="rect">
@@ -10616,7 +10890,7 @@
                 <a:ea typeface="Arial" pitchFamily="34" charset="-122"/>
                 <a:cs typeface="Arial" pitchFamily="34" charset="-120"/>
               </a:rPr>
-              <a:t>앞단 selector는 이미지 단위로 all-or-nothing 결정을 내립니다. 그런데 최적 정책은 질문 유형에 따라 갈립니다 — 존재 확인에서는 무관 이미지의 읽기를 막아야 하고, 비교에서는 이미지 간 attention을 살려둬야 합니다.</a:t>
+              <a:t>앞단 selector는 이미지 단위로 all-or-nothing 결정을 내립니다. 그런데 최적 정책은 질문 유형에 따라 갈립니다 — 존재 확인에서는 무관 이미지의 읽기를 막아야 하고, 비교에서는 이미지 간 attention을 살려둬야 합니다. all-of-3처럼 모든 이미지가 정답에 관여하는 질문에서는 애초에 버릴 대상이 없습니다.</a:t>
             </a:r>
             <a:endParaRPr lang="en-US" sz="1150" dirty="0"/>
           </a:p>
@@ -10675,7 +10949,7 @@
                 <a:ea typeface="Arial" pitchFamily="34" charset="-122"/>
                 <a:cs typeface="Arial" pitchFamily="34" charset="-120"/>
               </a:rPr>
-              <a:t>any 태스크는 AUC 0.99로 천장에 가까워 증거력이 제한적 — 더 어려운 need-all 셋(all-of-3)을 현재 측정 중</a:t>
+              <a:t>all-of-3에서는 어떤 이미지도 버릴 수 없다는 것이 설계상 자명하며, 이는 고립 비용과 무관하게 성립합니다</a:t>
             </a:r>
             <a:endParaRPr lang="en-US" sz="1000" dirty="0"/>
           </a:p>
@@ -16989,7 +17263,7 @@
           </p:nvPr>
         </p:nvGraphicFramePr>
         <p:xfrm>
-          <a:off x="502920" y="1325880"/>
+          <a:off x="502920" y="1298448"/>
           <a:ext cx="11201400" cy="914400"/>
         </p:xfrm>
         <a:graphic>
@@ -17003,7 +17277,7 @@
                 <a:gridCol w="2240280"/>
                 <a:gridCol w="2240280"/>
               </a:tblGrid>
-              <a:tr h="438912">
+              <a:tr h="402336">
                 <a:tc>
                   <a:txBody>
                     <a:bodyPr/>
@@ -17345,7 +17619,7 @@
                   </a:tcPr>
                 </a:tc>
               </a:tr>
-              <a:tr h="384048">
+              <a:tr h="347472">
                 <a:tc>
                   <a:txBody>
                     <a:bodyPr/>
@@ -17687,7 +17961,7 @@
                   </a:tcPr>
                 </a:tc>
               </a:tr>
-              <a:tr h="384048">
+              <a:tr h="347472">
                 <a:tc>
                   <a:txBody>
                     <a:bodyPr/>
@@ -18029,7 +18303,7 @@
                   </a:tcPr>
                 </a:tc>
               </a:tr>
-              <a:tr h="420624">
+              <a:tr h="384048">
                 <a:tc>
                   <a:txBody>
                     <a:bodyPr/>
@@ -18371,7 +18645,7 @@
                   </a:tcPr>
                 </a:tc>
               </a:tr>
-              <a:tr h="420624">
+              <a:tr h="384048">
                 <a:tc>
                   <a:txBody>
                     <a:bodyPr/>
@@ -18713,7 +18987,7 @@
                   </a:tcPr>
                 </a:tc>
               </a:tr>
-              <a:tr h="384048">
+              <a:tr h="347472">
                 <a:tc>
                   <a:txBody>
                     <a:bodyPr/>
@@ -19061,18 +19335,1087 @@
       </p:graphicFrame>
       <p:sp>
         <p:nvSpPr>
-          <p:cNvPr id="5" name="Shape 2"/>
+          <p:cNvPr id="5" name="Text 2"/>
           <p:cNvSpPr/>
           <p:nvPr/>
         </p:nvSpPr>
         <p:spPr>
           <a:xfrm>
-            <a:off x="502920" y="3840480"/>
-            <a:ext cx="11201400" cy="1691640"/>
+            <a:off x="502920" y="3602736"/>
+            <a:ext cx="11201400" cy="256032"/>
+          </a:xfrm>
+          <a:prstGeom prst="rect">
+            <a:avLst/>
+          </a:prstGeom>
+          <a:noFill/>
+          <a:ln/>
+        </p:spPr>
+        <p:txBody>
+          <a:bodyPr wrap="square" lIns="0" tIns="0" rIns="0" bIns="0" rtlCol="0" anchor="ctr"/>
+          <a:lstStyle/>
+          <a:p>
+            <a:pPr indent="0" marL="0">
+              <a:buNone/>
+            </a:pPr>
+            <a:r>
+              <a:rPr lang="en-US" sz="1150" b="1" dirty="0">
+                <a:solidFill>
+                  <a:srgbClr val="1F3B57"/>
+                </a:solidFill>
+                <a:latin typeface="Arial" pitchFamily="34" charset="0"/>
+                <a:ea typeface="Arial" pitchFamily="34" charset="-122"/>
+                <a:cs typeface="Arial" pitchFamily="34" charset="-120"/>
+              </a:rPr>
+              <a:t>개입 강도는 연속입니다 — 앞단 selector에는 없는 축 (방해 1장, 3B, n=300)</a:t>
+            </a:r>
+            <a:endParaRPr lang="en-US" sz="1150" dirty="0"/>
+          </a:p>
+        </p:txBody>
+      </p:sp>
+      <p:graphicFrame>
+        <p:nvGraphicFramePr>
+          <p:cNvPr id="17" name="Table 1"/>
+          <p:cNvGraphicFramePr>
+            <a:graphicFrameLocks noGrp="1"/>
+          </p:cNvGraphicFramePr>
+          <p:nvPr>
+            <p:extLst>
+              <p:ext uri="{D42A27DB-BD31-4B8C-83A1-F6EECF244321}">
+                <p14:modId xmlns:p14="http://schemas.microsoft.com/office/powerpoint/2010/main" val="1579011935"/>
+              </p:ext>
+            </p:extLst>
+          </p:nvPr>
+        </p:nvGraphicFramePr>
+        <p:xfrm>
+          <a:off x="502920" y="3913632"/>
+          <a:ext cx="11201400" cy="914400"/>
+        </p:xfrm>
+        <a:graphic>
+          <a:graphicData uri="http://schemas.openxmlformats.org/drawingml/2006/table">
+            <a:tbl>
+              <a:tblPr/>
+              <a:tblGrid>
+                <a:gridCol w="1600200"/>
+                <a:gridCol w="1600200"/>
+                <a:gridCol w="1600200"/>
+                <a:gridCol w="1600200"/>
+                <a:gridCol w="1600200"/>
+                <a:gridCol w="1600200"/>
+                <a:gridCol w="1600200"/>
+              </a:tblGrid>
+              <a:tr h="365760">
+                <a:tc>
+                  <a:txBody>
+                    <a:bodyPr/>
+                    <a:lstStyle/>
+                    <a:p>
+                      <a:pPr algn="ctr" indent="0" marL="0">
+                        <a:buNone/>
+                      </a:pPr>
+                      <a:r>
+                        <a:rPr lang="en-US" sz="1150" b="1" dirty="0">
+                          <a:solidFill>
+                            <a:srgbClr val="FFFFFF"/>
+                          </a:solidFill>
+                          <a:latin typeface="Arial" pitchFamily="34" charset="0"/>
+                          <a:ea typeface="Arial" pitchFamily="34" charset="-122"/>
+                          <a:cs typeface="Arial" pitchFamily="34" charset="-120"/>
+                        </a:rPr>
+                        <a:t>λ (억제 강도)</a:t>
+                      </a:r>
+                      <a:endParaRPr lang="en-US" sz="1150" dirty="0">
+                        <a:latin typeface="Arial" charset="0"/>
+                        <a:ea typeface="Arial" charset="0"/>
+                        <a:cs typeface="Arial" charset="0"/>
+                      </a:endParaRPr>
+                    </a:p>
+                  </a:txBody>
+                  <a:tcPr marL="91440" marR="91440" marT="45720" marB="45720" anchor="ctr">
+                    <a:lnL w="9525" cap="flat" cmpd="sng" algn="ctr">
+                      <a:solidFill>
+                        <a:srgbClr val="E2E8F0"/>
+                      </a:solidFill>
+                      <a:prstDash val="solid"/>
+                      <a:round/>
+                      <a:headEnd type="none" w="med" len="med"/>
+                      <a:tailEnd type="none" w="med" len="med"/>
+                    </a:lnL>
+                    <a:lnR w="9525" cap="flat" cmpd="sng" algn="ctr">
+                      <a:solidFill>
+                        <a:srgbClr val="E2E8F0"/>
+                      </a:solidFill>
+                      <a:prstDash val="solid"/>
+                      <a:round/>
+                      <a:headEnd type="none" w="med" len="med"/>
+                      <a:tailEnd type="none" w="med" len="med"/>
+                    </a:lnR>
+                    <a:lnT w="9525" cap="flat" cmpd="sng" algn="ctr">
+                      <a:solidFill>
+                        <a:srgbClr val="E2E8F0"/>
+                      </a:solidFill>
+                      <a:prstDash val="solid"/>
+                      <a:round/>
+                      <a:headEnd type="none" w="med" len="med"/>
+                      <a:tailEnd type="none" w="med" len="med"/>
+                    </a:lnT>
+                    <a:lnB w="9525" cap="flat" cmpd="sng" algn="ctr">
+                      <a:solidFill>
+                        <a:srgbClr val="E2E8F0"/>
+                      </a:solidFill>
+                      <a:prstDash val="solid"/>
+                      <a:round/>
+                      <a:headEnd type="none" w="med" len="med"/>
+                      <a:tailEnd type="none" w="med" len="med"/>
+                    </a:lnB>
+                    <a:solidFill>
+                      <a:srgbClr val="1F3B57"/>
+                    </a:solidFill>
+                  </a:tcPr>
+                </a:tc>
+                <a:tc>
+                  <a:txBody>
+                    <a:bodyPr/>
+                    <a:lstStyle/>
+                    <a:p>
+                      <a:pPr algn="ctr" indent="0" marL="0">
+                        <a:buNone/>
+                      </a:pPr>
+                      <a:r>
+                        <a:rPr lang="en-US" sz="1150" b="1" dirty="0">
+                          <a:solidFill>
+                            <a:srgbClr val="FFFFFF"/>
+                          </a:solidFill>
+                          <a:latin typeface="Arial" pitchFamily="34" charset="0"/>
+                          <a:ea typeface="Arial" pitchFamily="34" charset="-122"/>
+                          <a:cs typeface="Arial" pitchFamily="34" charset="-120"/>
+                        </a:rPr>
+                        <a:t>0 무개입</a:t>
+                      </a:r>
+                      <a:endParaRPr lang="en-US" sz="1150" dirty="0">
+                        <a:latin typeface="Arial" charset="0"/>
+                        <a:ea typeface="Arial" charset="0"/>
+                        <a:cs typeface="Arial" charset="0"/>
+                      </a:endParaRPr>
+                    </a:p>
+                  </a:txBody>
+                  <a:tcPr marL="91440" marR="91440" marT="45720" marB="45720" anchor="ctr">
+                    <a:lnL w="9525" cap="flat" cmpd="sng" algn="ctr">
+                      <a:solidFill>
+                        <a:srgbClr val="E2E8F0"/>
+                      </a:solidFill>
+                      <a:prstDash val="solid"/>
+                      <a:round/>
+                      <a:headEnd type="none" w="med" len="med"/>
+                      <a:tailEnd type="none" w="med" len="med"/>
+                    </a:lnL>
+                    <a:lnR w="9525" cap="flat" cmpd="sng" algn="ctr">
+                      <a:solidFill>
+                        <a:srgbClr val="E2E8F0"/>
+                      </a:solidFill>
+                      <a:prstDash val="solid"/>
+                      <a:round/>
+                      <a:headEnd type="none" w="med" len="med"/>
+                      <a:tailEnd type="none" w="med" len="med"/>
+                    </a:lnR>
+                    <a:lnT w="9525" cap="flat" cmpd="sng" algn="ctr">
+                      <a:solidFill>
+                        <a:srgbClr val="E2E8F0"/>
+                      </a:solidFill>
+                      <a:prstDash val="solid"/>
+                      <a:round/>
+                      <a:headEnd type="none" w="med" len="med"/>
+                      <a:tailEnd type="none" w="med" len="med"/>
+                    </a:lnT>
+                    <a:lnB w="9525" cap="flat" cmpd="sng" algn="ctr">
+                      <a:solidFill>
+                        <a:srgbClr val="E2E8F0"/>
+                      </a:solidFill>
+                      <a:prstDash val="solid"/>
+                      <a:round/>
+                      <a:headEnd type="none" w="med" len="med"/>
+                      <a:tailEnd type="none" w="med" len="med"/>
+                    </a:lnB>
+                    <a:solidFill>
+                      <a:srgbClr val="1F3B57"/>
+                    </a:solidFill>
+                  </a:tcPr>
+                </a:tc>
+                <a:tc>
+                  <a:txBody>
+                    <a:bodyPr/>
+                    <a:lstStyle/>
+                    <a:p>
+                      <a:pPr algn="ctr" indent="0" marL="0">
+                        <a:buNone/>
+                      </a:pPr>
+                      <a:r>
+                        <a:rPr lang="en-US" sz="1150" b="1" dirty="0">
+                          <a:solidFill>
+                            <a:srgbClr val="FFFFFF"/>
+                          </a:solidFill>
+                          <a:latin typeface="Arial" pitchFamily="34" charset="0"/>
+                          <a:ea typeface="Arial" pitchFamily="34" charset="-122"/>
+                          <a:cs typeface="Arial" pitchFamily="34" charset="-120"/>
+                        </a:rPr>
+                        <a:t>1</a:t>
+                      </a:r>
+                      <a:endParaRPr lang="en-US" sz="1150" dirty="0">
+                        <a:latin typeface="Arial" charset="0"/>
+                        <a:ea typeface="Arial" charset="0"/>
+                        <a:cs typeface="Arial" charset="0"/>
+                      </a:endParaRPr>
+                    </a:p>
+                  </a:txBody>
+                  <a:tcPr marL="91440" marR="91440" marT="45720" marB="45720" anchor="ctr">
+                    <a:lnL w="9525" cap="flat" cmpd="sng" algn="ctr">
+                      <a:solidFill>
+                        <a:srgbClr val="E2E8F0"/>
+                      </a:solidFill>
+                      <a:prstDash val="solid"/>
+                      <a:round/>
+                      <a:headEnd type="none" w="med" len="med"/>
+                      <a:tailEnd type="none" w="med" len="med"/>
+                    </a:lnL>
+                    <a:lnR w="9525" cap="flat" cmpd="sng" algn="ctr">
+                      <a:solidFill>
+                        <a:srgbClr val="E2E8F0"/>
+                      </a:solidFill>
+                      <a:prstDash val="solid"/>
+                      <a:round/>
+                      <a:headEnd type="none" w="med" len="med"/>
+                      <a:tailEnd type="none" w="med" len="med"/>
+                    </a:lnR>
+                    <a:lnT w="9525" cap="flat" cmpd="sng" algn="ctr">
+                      <a:solidFill>
+                        <a:srgbClr val="E2E8F0"/>
+                      </a:solidFill>
+                      <a:prstDash val="solid"/>
+                      <a:round/>
+                      <a:headEnd type="none" w="med" len="med"/>
+                      <a:tailEnd type="none" w="med" len="med"/>
+                    </a:lnT>
+                    <a:lnB w="9525" cap="flat" cmpd="sng" algn="ctr">
+                      <a:solidFill>
+                        <a:srgbClr val="E2E8F0"/>
+                      </a:solidFill>
+                      <a:prstDash val="solid"/>
+                      <a:round/>
+                      <a:headEnd type="none" w="med" len="med"/>
+                      <a:tailEnd type="none" w="med" len="med"/>
+                    </a:lnB>
+                    <a:solidFill>
+                      <a:srgbClr val="1F3B57"/>
+                    </a:solidFill>
+                  </a:tcPr>
+                </a:tc>
+                <a:tc>
+                  <a:txBody>
+                    <a:bodyPr/>
+                    <a:lstStyle/>
+                    <a:p>
+                      <a:pPr algn="ctr" indent="0" marL="0">
+                        <a:buNone/>
+                      </a:pPr>
+                      <a:r>
+                        <a:rPr lang="en-US" sz="1150" b="1" dirty="0">
+                          <a:solidFill>
+                            <a:srgbClr val="FFFFFF"/>
+                          </a:solidFill>
+                          <a:latin typeface="Arial" pitchFamily="34" charset="0"/>
+                          <a:ea typeface="Arial" pitchFamily="34" charset="-122"/>
+                          <a:cs typeface="Arial" pitchFamily="34" charset="-120"/>
+                        </a:rPr>
+                        <a:t>2</a:t>
+                      </a:r>
+                      <a:endParaRPr lang="en-US" sz="1150" dirty="0">
+                        <a:latin typeface="Arial" charset="0"/>
+                        <a:ea typeface="Arial" charset="0"/>
+                        <a:cs typeface="Arial" charset="0"/>
+                      </a:endParaRPr>
+                    </a:p>
+                  </a:txBody>
+                  <a:tcPr marL="91440" marR="91440" marT="45720" marB="45720" anchor="ctr">
+                    <a:lnL w="9525" cap="flat" cmpd="sng" algn="ctr">
+                      <a:solidFill>
+                        <a:srgbClr val="E2E8F0"/>
+                      </a:solidFill>
+                      <a:prstDash val="solid"/>
+                      <a:round/>
+                      <a:headEnd type="none" w="med" len="med"/>
+                      <a:tailEnd type="none" w="med" len="med"/>
+                    </a:lnL>
+                    <a:lnR w="9525" cap="flat" cmpd="sng" algn="ctr">
+                      <a:solidFill>
+                        <a:srgbClr val="E2E8F0"/>
+                      </a:solidFill>
+                      <a:prstDash val="solid"/>
+                      <a:round/>
+                      <a:headEnd type="none" w="med" len="med"/>
+                      <a:tailEnd type="none" w="med" len="med"/>
+                    </a:lnR>
+                    <a:lnT w="9525" cap="flat" cmpd="sng" algn="ctr">
+                      <a:solidFill>
+                        <a:srgbClr val="E2E8F0"/>
+                      </a:solidFill>
+                      <a:prstDash val="solid"/>
+                      <a:round/>
+                      <a:headEnd type="none" w="med" len="med"/>
+                      <a:tailEnd type="none" w="med" len="med"/>
+                    </a:lnT>
+                    <a:lnB w="9525" cap="flat" cmpd="sng" algn="ctr">
+                      <a:solidFill>
+                        <a:srgbClr val="E2E8F0"/>
+                      </a:solidFill>
+                      <a:prstDash val="solid"/>
+                      <a:round/>
+                      <a:headEnd type="none" w="med" len="med"/>
+                      <a:tailEnd type="none" w="med" len="med"/>
+                    </a:lnB>
+                    <a:solidFill>
+                      <a:srgbClr val="1F3B57"/>
+                    </a:solidFill>
+                  </a:tcPr>
+                </a:tc>
+                <a:tc>
+                  <a:txBody>
+                    <a:bodyPr/>
+                    <a:lstStyle/>
+                    <a:p>
+                      <a:pPr algn="ctr" indent="0" marL="0">
+                        <a:buNone/>
+                      </a:pPr>
+                      <a:r>
+                        <a:rPr lang="en-US" sz="1150" b="1" dirty="0">
+                          <a:solidFill>
+                            <a:srgbClr val="FFFFFF"/>
+                          </a:solidFill>
+                          <a:latin typeface="Arial" pitchFamily="34" charset="0"/>
+                          <a:ea typeface="Arial" pitchFamily="34" charset="-122"/>
+                          <a:cs typeface="Arial" pitchFamily="34" charset="-120"/>
+                        </a:rPr>
+                        <a:t>4</a:t>
+                      </a:r>
+                      <a:endParaRPr lang="en-US" sz="1150" dirty="0">
+                        <a:latin typeface="Arial" charset="0"/>
+                        <a:ea typeface="Arial" charset="0"/>
+                        <a:cs typeface="Arial" charset="0"/>
+                      </a:endParaRPr>
+                    </a:p>
+                  </a:txBody>
+                  <a:tcPr marL="91440" marR="91440" marT="45720" marB="45720" anchor="ctr">
+                    <a:lnL w="9525" cap="flat" cmpd="sng" algn="ctr">
+                      <a:solidFill>
+                        <a:srgbClr val="E2E8F0"/>
+                      </a:solidFill>
+                      <a:prstDash val="solid"/>
+                      <a:round/>
+                      <a:headEnd type="none" w="med" len="med"/>
+                      <a:tailEnd type="none" w="med" len="med"/>
+                    </a:lnL>
+                    <a:lnR w="9525" cap="flat" cmpd="sng" algn="ctr">
+                      <a:solidFill>
+                        <a:srgbClr val="E2E8F0"/>
+                      </a:solidFill>
+                      <a:prstDash val="solid"/>
+                      <a:round/>
+                      <a:headEnd type="none" w="med" len="med"/>
+                      <a:tailEnd type="none" w="med" len="med"/>
+                    </a:lnR>
+                    <a:lnT w="9525" cap="flat" cmpd="sng" algn="ctr">
+                      <a:solidFill>
+                        <a:srgbClr val="E2E8F0"/>
+                      </a:solidFill>
+                      <a:prstDash val="solid"/>
+                      <a:round/>
+                      <a:headEnd type="none" w="med" len="med"/>
+                      <a:tailEnd type="none" w="med" len="med"/>
+                    </a:lnT>
+                    <a:lnB w="9525" cap="flat" cmpd="sng" algn="ctr">
+                      <a:solidFill>
+                        <a:srgbClr val="E2E8F0"/>
+                      </a:solidFill>
+                      <a:prstDash val="solid"/>
+                      <a:round/>
+                      <a:headEnd type="none" w="med" len="med"/>
+                      <a:tailEnd type="none" w="med" len="med"/>
+                    </a:lnB>
+                    <a:solidFill>
+                      <a:srgbClr val="1F3B57"/>
+                    </a:solidFill>
+                  </a:tcPr>
+                </a:tc>
+                <a:tc>
+                  <a:txBody>
+                    <a:bodyPr/>
+                    <a:lstStyle/>
+                    <a:p>
+                      <a:pPr algn="ctr" indent="0" marL="0">
+                        <a:buNone/>
+                      </a:pPr>
+                      <a:r>
+                        <a:rPr lang="en-US" sz="1150" b="1" dirty="0">
+                          <a:solidFill>
+                            <a:srgbClr val="FFFFFF"/>
+                          </a:solidFill>
+                          <a:latin typeface="Arial" pitchFamily="34" charset="0"/>
+                          <a:ea typeface="Arial" pitchFamily="34" charset="-122"/>
+                          <a:cs typeface="Arial" pitchFamily="34" charset="-120"/>
+                        </a:rPr>
+                        <a:t>8</a:t>
+                      </a:r>
+                      <a:endParaRPr lang="en-US" sz="1150" dirty="0">
+                        <a:latin typeface="Arial" charset="0"/>
+                        <a:ea typeface="Arial" charset="0"/>
+                        <a:cs typeface="Arial" charset="0"/>
+                      </a:endParaRPr>
+                    </a:p>
+                  </a:txBody>
+                  <a:tcPr marL="91440" marR="91440" marT="45720" marB="45720" anchor="ctr">
+                    <a:lnL w="9525" cap="flat" cmpd="sng" algn="ctr">
+                      <a:solidFill>
+                        <a:srgbClr val="E2E8F0"/>
+                      </a:solidFill>
+                      <a:prstDash val="solid"/>
+                      <a:round/>
+                      <a:headEnd type="none" w="med" len="med"/>
+                      <a:tailEnd type="none" w="med" len="med"/>
+                    </a:lnL>
+                    <a:lnR w="9525" cap="flat" cmpd="sng" algn="ctr">
+                      <a:solidFill>
+                        <a:srgbClr val="E2E8F0"/>
+                      </a:solidFill>
+                      <a:prstDash val="solid"/>
+                      <a:round/>
+                      <a:headEnd type="none" w="med" len="med"/>
+                      <a:tailEnd type="none" w="med" len="med"/>
+                    </a:lnR>
+                    <a:lnT w="9525" cap="flat" cmpd="sng" algn="ctr">
+                      <a:solidFill>
+                        <a:srgbClr val="E2E8F0"/>
+                      </a:solidFill>
+                      <a:prstDash val="solid"/>
+                      <a:round/>
+                      <a:headEnd type="none" w="med" len="med"/>
+                      <a:tailEnd type="none" w="med" len="med"/>
+                    </a:lnT>
+                    <a:lnB w="9525" cap="flat" cmpd="sng" algn="ctr">
+                      <a:solidFill>
+                        <a:srgbClr val="E2E8F0"/>
+                      </a:solidFill>
+                      <a:prstDash val="solid"/>
+                      <a:round/>
+                      <a:headEnd type="none" w="med" len="med"/>
+                      <a:tailEnd type="none" w="med" len="med"/>
+                    </a:lnB>
+                    <a:solidFill>
+                      <a:srgbClr val="1F3B57"/>
+                    </a:solidFill>
+                  </a:tcPr>
+                </a:tc>
+                <a:tc>
+                  <a:txBody>
+                    <a:bodyPr/>
+                    <a:lstStyle/>
+                    <a:p>
+                      <a:pPr algn="ctr" indent="0" marL="0">
+                        <a:buNone/>
+                      </a:pPr>
+                      <a:r>
+                        <a:rPr lang="en-US" sz="1150" b="1" dirty="0">
+                          <a:solidFill>
+                            <a:srgbClr val="FFFFFF"/>
+                          </a:solidFill>
+                          <a:latin typeface="Arial" pitchFamily="34" charset="0"/>
+                          <a:ea typeface="Arial" pitchFamily="34" charset="-122"/>
+                          <a:cs typeface="Arial" pitchFamily="34" charset="-120"/>
+                        </a:rPr>
+                        <a:t>∞ 하드</a:t>
+                      </a:r>
+                      <a:endParaRPr lang="en-US" sz="1150" dirty="0">
+                        <a:latin typeface="Arial" charset="0"/>
+                        <a:ea typeface="Arial" charset="0"/>
+                        <a:cs typeface="Arial" charset="0"/>
+                      </a:endParaRPr>
+                    </a:p>
+                  </a:txBody>
+                  <a:tcPr marL="91440" marR="91440" marT="45720" marB="45720" anchor="ctr">
+                    <a:lnL w="9525" cap="flat" cmpd="sng" algn="ctr">
+                      <a:solidFill>
+                        <a:srgbClr val="E2E8F0"/>
+                      </a:solidFill>
+                      <a:prstDash val="solid"/>
+                      <a:round/>
+                      <a:headEnd type="none" w="med" len="med"/>
+                      <a:tailEnd type="none" w="med" len="med"/>
+                    </a:lnL>
+                    <a:lnR w="9525" cap="flat" cmpd="sng" algn="ctr">
+                      <a:solidFill>
+                        <a:srgbClr val="E2E8F0"/>
+                      </a:solidFill>
+                      <a:prstDash val="solid"/>
+                      <a:round/>
+                      <a:headEnd type="none" w="med" len="med"/>
+                      <a:tailEnd type="none" w="med" len="med"/>
+                    </a:lnR>
+                    <a:lnT w="9525" cap="flat" cmpd="sng" algn="ctr">
+                      <a:solidFill>
+                        <a:srgbClr val="E2E8F0"/>
+                      </a:solidFill>
+                      <a:prstDash val="solid"/>
+                      <a:round/>
+                      <a:headEnd type="none" w="med" len="med"/>
+                      <a:tailEnd type="none" w="med" len="med"/>
+                    </a:lnT>
+                    <a:lnB w="9525" cap="flat" cmpd="sng" algn="ctr">
+                      <a:solidFill>
+                        <a:srgbClr val="E2E8F0"/>
+                      </a:solidFill>
+                      <a:prstDash val="solid"/>
+                      <a:round/>
+                      <a:headEnd type="none" w="med" len="med"/>
+                      <a:tailEnd type="none" w="med" len="med"/>
+                    </a:lnB>
+                    <a:solidFill>
+                      <a:srgbClr val="1F3B57"/>
+                    </a:solidFill>
+                  </a:tcPr>
+                </a:tc>
+              </a:tr>
+              <a:tr h="365760">
+                <a:tc>
+                  <a:txBody>
+                    <a:bodyPr/>
+                    <a:lstStyle/>
+                    <a:p>
+                      <a:pPr algn="ctr" indent="0" marL="0">
+                        <a:buNone/>
+                      </a:pPr>
+                      <a:r>
+                        <a:rPr lang="en-US" sz="1150" b="1" dirty="0">
+                          <a:solidFill>
+                            <a:srgbClr val="1F3B57"/>
+                          </a:solidFill>
+                          <a:latin typeface="Arial" pitchFamily="34" charset="0"/>
+                          <a:ea typeface="Arial" pitchFamily="34" charset="-122"/>
+                          <a:cs typeface="Arial" pitchFamily="34" charset="-120"/>
+                        </a:rPr>
+                        <a:t>AUC</a:t>
+                      </a:r>
+                      <a:endParaRPr lang="en-US" sz="1150" dirty="0">
+                        <a:latin typeface="Arial" charset="0"/>
+                        <a:ea typeface="Arial" charset="0"/>
+                        <a:cs typeface="Arial" charset="0"/>
+                      </a:endParaRPr>
+                    </a:p>
+                  </a:txBody>
+                  <a:tcPr marL="91440" marR="91440" marT="45720" marB="45720" anchor="ctr">
+                    <a:lnL w="9525" cap="flat" cmpd="sng" algn="ctr">
+                      <a:solidFill>
+                        <a:srgbClr val="E2E8F0"/>
+                      </a:solidFill>
+                      <a:prstDash val="solid"/>
+                      <a:round/>
+                      <a:headEnd type="none" w="med" len="med"/>
+                      <a:tailEnd type="none" w="med" len="med"/>
+                    </a:lnL>
+                    <a:lnR w="9525" cap="flat" cmpd="sng" algn="ctr">
+                      <a:solidFill>
+                        <a:srgbClr val="E2E8F0"/>
+                      </a:solidFill>
+                      <a:prstDash val="solid"/>
+                      <a:round/>
+                      <a:headEnd type="none" w="med" len="med"/>
+                      <a:tailEnd type="none" w="med" len="med"/>
+                    </a:lnR>
+                    <a:lnT w="9525" cap="flat" cmpd="sng" algn="ctr">
+                      <a:solidFill>
+                        <a:srgbClr val="E2E8F0"/>
+                      </a:solidFill>
+                      <a:prstDash val="solid"/>
+                      <a:round/>
+                      <a:headEnd type="none" w="med" len="med"/>
+                      <a:tailEnd type="none" w="med" len="med"/>
+                    </a:lnT>
+                    <a:lnB w="9525" cap="flat" cmpd="sng" algn="ctr">
+                      <a:solidFill>
+                        <a:srgbClr val="E2E8F0"/>
+                      </a:solidFill>
+                      <a:prstDash val="solid"/>
+                      <a:round/>
+                      <a:headEnd type="none" w="med" len="med"/>
+                      <a:tailEnd type="none" w="med" len="med"/>
+                    </a:lnB>
+                    <a:solidFill>
+                      <a:srgbClr val="FFFFFF"/>
+                    </a:solidFill>
+                  </a:tcPr>
+                </a:tc>
+                <a:tc>
+                  <a:txBody>
+                    <a:bodyPr/>
+                    <a:lstStyle/>
+                    <a:p>
+                      <a:pPr algn="ctr" indent="0" marL="0">
+                        <a:buNone/>
+                      </a:pPr>
+                      <a:r>
+                        <a:rPr lang="en-US" sz="1150" dirty="0">
+                          <a:solidFill>
+                            <a:srgbClr val="1F3B57"/>
+                          </a:solidFill>
+                          <a:latin typeface="Arial" pitchFamily="34" charset="0"/>
+                          <a:ea typeface="Arial" pitchFamily="34" charset="-122"/>
+                          <a:cs typeface="Arial" pitchFamily="34" charset="-120"/>
+                        </a:rPr>
+                        <a:t>0.6978</a:t>
+                      </a:r>
+                      <a:endParaRPr lang="en-US" sz="1150" dirty="0">
+                        <a:latin typeface="Arial" charset="0"/>
+                        <a:ea typeface="Arial" charset="0"/>
+                        <a:cs typeface="Arial" charset="0"/>
+                      </a:endParaRPr>
+                    </a:p>
+                  </a:txBody>
+                  <a:tcPr marL="91440" marR="91440" marT="45720" marB="45720" anchor="ctr">
+                    <a:lnL w="9525" cap="flat" cmpd="sng" algn="ctr">
+                      <a:solidFill>
+                        <a:srgbClr val="E2E8F0"/>
+                      </a:solidFill>
+                      <a:prstDash val="solid"/>
+                      <a:round/>
+                      <a:headEnd type="none" w="med" len="med"/>
+                      <a:tailEnd type="none" w="med" len="med"/>
+                    </a:lnL>
+                    <a:lnR w="9525" cap="flat" cmpd="sng" algn="ctr">
+                      <a:solidFill>
+                        <a:srgbClr val="E2E8F0"/>
+                      </a:solidFill>
+                      <a:prstDash val="solid"/>
+                      <a:round/>
+                      <a:headEnd type="none" w="med" len="med"/>
+                      <a:tailEnd type="none" w="med" len="med"/>
+                    </a:lnR>
+                    <a:lnT w="9525" cap="flat" cmpd="sng" algn="ctr">
+                      <a:solidFill>
+                        <a:srgbClr val="E2E8F0"/>
+                      </a:solidFill>
+                      <a:prstDash val="solid"/>
+                      <a:round/>
+                      <a:headEnd type="none" w="med" len="med"/>
+                      <a:tailEnd type="none" w="med" len="med"/>
+                    </a:lnT>
+                    <a:lnB w="9525" cap="flat" cmpd="sng" algn="ctr">
+                      <a:solidFill>
+                        <a:srgbClr val="E2E8F0"/>
+                      </a:solidFill>
+                      <a:prstDash val="solid"/>
+                      <a:round/>
+                      <a:headEnd type="none" w="med" len="med"/>
+                      <a:tailEnd type="none" w="med" len="med"/>
+                    </a:lnB>
+                    <a:solidFill>
+                      <a:srgbClr val="FFFFFF"/>
+                    </a:solidFill>
+                  </a:tcPr>
+                </a:tc>
+                <a:tc>
+                  <a:txBody>
+                    <a:bodyPr/>
+                    <a:lstStyle/>
+                    <a:p>
+                      <a:pPr algn="ctr" indent="0" marL="0">
+                        <a:buNone/>
+                      </a:pPr>
+                      <a:r>
+                        <a:rPr lang="en-US" sz="1150" dirty="0">
+                          <a:solidFill>
+                            <a:srgbClr val="1F3B57"/>
+                          </a:solidFill>
+                          <a:latin typeface="Arial" pitchFamily="34" charset="0"/>
+                          <a:ea typeface="Arial" pitchFamily="34" charset="-122"/>
+                          <a:cs typeface="Arial" pitchFamily="34" charset="-120"/>
+                        </a:rPr>
+                        <a:t>0.7729</a:t>
+                      </a:r>
+                      <a:endParaRPr lang="en-US" sz="1150" dirty="0">
+                        <a:latin typeface="Arial" charset="0"/>
+                        <a:ea typeface="Arial" charset="0"/>
+                        <a:cs typeface="Arial" charset="0"/>
+                      </a:endParaRPr>
+                    </a:p>
+                  </a:txBody>
+                  <a:tcPr marL="91440" marR="91440" marT="45720" marB="45720" anchor="ctr">
+                    <a:lnL w="9525" cap="flat" cmpd="sng" algn="ctr">
+                      <a:solidFill>
+                        <a:srgbClr val="E2E8F0"/>
+                      </a:solidFill>
+                      <a:prstDash val="solid"/>
+                      <a:round/>
+                      <a:headEnd type="none" w="med" len="med"/>
+                      <a:tailEnd type="none" w="med" len="med"/>
+                    </a:lnL>
+                    <a:lnR w="9525" cap="flat" cmpd="sng" algn="ctr">
+                      <a:solidFill>
+                        <a:srgbClr val="E2E8F0"/>
+                      </a:solidFill>
+                      <a:prstDash val="solid"/>
+                      <a:round/>
+                      <a:headEnd type="none" w="med" len="med"/>
+                      <a:tailEnd type="none" w="med" len="med"/>
+                    </a:lnR>
+                    <a:lnT w="9525" cap="flat" cmpd="sng" algn="ctr">
+                      <a:solidFill>
+                        <a:srgbClr val="E2E8F0"/>
+                      </a:solidFill>
+                      <a:prstDash val="solid"/>
+                      <a:round/>
+                      <a:headEnd type="none" w="med" len="med"/>
+                      <a:tailEnd type="none" w="med" len="med"/>
+                    </a:lnT>
+                    <a:lnB w="9525" cap="flat" cmpd="sng" algn="ctr">
+                      <a:solidFill>
+                        <a:srgbClr val="E2E8F0"/>
+                      </a:solidFill>
+                      <a:prstDash val="solid"/>
+                      <a:round/>
+                      <a:headEnd type="none" w="med" len="med"/>
+                      <a:tailEnd type="none" w="med" len="med"/>
+                    </a:lnB>
+                    <a:solidFill>
+                      <a:srgbClr val="FFFFFF"/>
+                    </a:solidFill>
+                  </a:tcPr>
+                </a:tc>
+                <a:tc>
+                  <a:txBody>
+                    <a:bodyPr/>
+                    <a:lstStyle/>
+                    <a:p>
+                      <a:pPr algn="ctr" indent="0" marL="0">
+                        <a:buNone/>
+                      </a:pPr>
+                      <a:r>
+                        <a:rPr lang="en-US" sz="1150" dirty="0">
+                          <a:solidFill>
+                            <a:srgbClr val="1F3B57"/>
+                          </a:solidFill>
+                          <a:latin typeface="Arial" pitchFamily="34" charset="0"/>
+                          <a:ea typeface="Arial" pitchFamily="34" charset="-122"/>
+                          <a:cs typeface="Arial" pitchFamily="34" charset="-120"/>
+                        </a:rPr>
+                        <a:t>0.8092</a:t>
+                      </a:r>
+                      <a:endParaRPr lang="en-US" sz="1150" dirty="0">
+                        <a:latin typeface="Arial" charset="0"/>
+                        <a:ea typeface="Arial" charset="0"/>
+                        <a:cs typeface="Arial" charset="0"/>
+                      </a:endParaRPr>
+                    </a:p>
+                  </a:txBody>
+                  <a:tcPr marL="91440" marR="91440" marT="45720" marB="45720" anchor="ctr">
+                    <a:lnL w="9525" cap="flat" cmpd="sng" algn="ctr">
+                      <a:solidFill>
+                        <a:srgbClr val="E2E8F0"/>
+                      </a:solidFill>
+                      <a:prstDash val="solid"/>
+                      <a:round/>
+                      <a:headEnd type="none" w="med" len="med"/>
+                      <a:tailEnd type="none" w="med" len="med"/>
+                    </a:lnL>
+                    <a:lnR w="9525" cap="flat" cmpd="sng" algn="ctr">
+                      <a:solidFill>
+                        <a:srgbClr val="E2E8F0"/>
+                      </a:solidFill>
+                      <a:prstDash val="solid"/>
+                      <a:round/>
+                      <a:headEnd type="none" w="med" len="med"/>
+                      <a:tailEnd type="none" w="med" len="med"/>
+                    </a:lnR>
+                    <a:lnT w="9525" cap="flat" cmpd="sng" algn="ctr">
+                      <a:solidFill>
+                        <a:srgbClr val="E2E8F0"/>
+                      </a:solidFill>
+                      <a:prstDash val="solid"/>
+                      <a:round/>
+                      <a:headEnd type="none" w="med" len="med"/>
+                      <a:tailEnd type="none" w="med" len="med"/>
+                    </a:lnT>
+                    <a:lnB w="9525" cap="flat" cmpd="sng" algn="ctr">
+                      <a:solidFill>
+                        <a:srgbClr val="E2E8F0"/>
+                      </a:solidFill>
+                      <a:prstDash val="solid"/>
+                      <a:round/>
+                      <a:headEnd type="none" w="med" len="med"/>
+                      <a:tailEnd type="none" w="med" len="med"/>
+                    </a:lnB>
+                    <a:solidFill>
+                      <a:srgbClr val="FFFFFF"/>
+                    </a:solidFill>
+                  </a:tcPr>
+                </a:tc>
+                <a:tc>
+                  <a:txBody>
+                    <a:bodyPr/>
+                    <a:lstStyle/>
+                    <a:p>
+                      <a:pPr algn="ctr" indent="0" marL="0">
+                        <a:buNone/>
+                      </a:pPr>
+                      <a:r>
+                        <a:rPr lang="en-US" sz="1150" dirty="0">
+                          <a:solidFill>
+                            <a:srgbClr val="1F3B57"/>
+                          </a:solidFill>
+                          <a:latin typeface="Arial" pitchFamily="34" charset="0"/>
+                          <a:ea typeface="Arial" pitchFamily="34" charset="-122"/>
+                          <a:cs typeface="Arial" pitchFamily="34" charset="-120"/>
+                        </a:rPr>
+                        <a:t>0.8513</a:t>
+                      </a:r>
+                      <a:endParaRPr lang="en-US" sz="1150" dirty="0">
+                        <a:latin typeface="Arial" charset="0"/>
+                        <a:ea typeface="Arial" charset="0"/>
+                        <a:cs typeface="Arial" charset="0"/>
+                      </a:endParaRPr>
+                    </a:p>
+                  </a:txBody>
+                  <a:tcPr marL="91440" marR="91440" marT="45720" marB="45720" anchor="ctr">
+                    <a:lnL w="9525" cap="flat" cmpd="sng" algn="ctr">
+                      <a:solidFill>
+                        <a:srgbClr val="E2E8F0"/>
+                      </a:solidFill>
+                      <a:prstDash val="solid"/>
+                      <a:round/>
+                      <a:headEnd type="none" w="med" len="med"/>
+                      <a:tailEnd type="none" w="med" len="med"/>
+                    </a:lnL>
+                    <a:lnR w="9525" cap="flat" cmpd="sng" algn="ctr">
+                      <a:solidFill>
+                        <a:srgbClr val="E2E8F0"/>
+                      </a:solidFill>
+                      <a:prstDash val="solid"/>
+                      <a:round/>
+                      <a:headEnd type="none" w="med" len="med"/>
+                      <a:tailEnd type="none" w="med" len="med"/>
+                    </a:lnR>
+                    <a:lnT w="9525" cap="flat" cmpd="sng" algn="ctr">
+                      <a:solidFill>
+                        <a:srgbClr val="E2E8F0"/>
+                      </a:solidFill>
+                      <a:prstDash val="solid"/>
+                      <a:round/>
+                      <a:headEnd type="none" w="med" len="med"/>
+                      <a:tailEnd type="none" w="med" len="med"/>
+                    </a:lnT>
+                    <a:lnB w="9525" cap="flat" cmpd="sng" algn="ctr">
+                      <a:solidFill>
+                        <a:srgbClr val="E2E8F0"/>
+                      </a:solidFill>
+                      <a:prstDash val="solid"/>
+                      <a:round/>
+                      <a:headEnd type="none" w="med" len="med"/>
+                      <a:tailEnd type="none" w="med" len="med"/>
+                    </a:lnB>
+                    <a:solidFill>
+                      <a:srgbClr val="FFFFFF"/>
+                    </a:solidFill>
+                  </a:tcPr>
+                </a:tc>
+                <a:tc>
+                  <a:txBody>
+                    <a:bodyPr/>
+                    <a:lstStyle/>
+                    <a:p>
+                      <a:pPr algn="ctr" indent="0" marL="0">
+                        <a:buNone/>
+                      </a:pPr>
+                      <a:r>
+                        <a:rPr lang="en-US" sz="1150" dirty="0">
+                          <a:solidFill>
+                            <a:srgbClr val="1F3B57"/>
+                          </a:solidFill>
+                          <a:latin typeface="Arial" pitchFamily="34" charset="0"/>
+                          <a:ea typeface="Arial" pitchFamily="34" charset="-122"/>
+                          <a:cs typeface="Arial" pitchFamily="34" charset="-120"/>
+                        </a:rPr>
+                        <a:t>0.9036</a:t>
+                      </a:r>
+                      <a:endParaRPr lang="en-US" sz="1150" dirty="0">
+                        <a:latin typeface="Arial" charset="0"/>
+                        <a:ea typeface="Arial" charset="0"/>
+                        <a:cs typeface="Arial" charset="0"/>
+                      </a:endParaRPr>
+                    </a:p>
+                  </a:txBody>
+                  <a:tcPr marL="91440" marR="91440" marT="45720" marB="45720" anchor="ctr">
+                    <a:lnL w="9525" cap="flat" cmpd="sng" algn="ctr">
+                      <a:solidFill>
+                        <a:srgbClr val="E2E8F0"/>
+                      </a:solidFill>
+                      <a:prstDash val="solid"/>
+                      <a:round/>
+                      <a:headEnd type="none" w="med" len="med"/>
+                      <a:tailEnd type="none" w="med" len="med"/>
+                    </a:lnL>
+                    <a:lnR w="9525" cap="flat" cmpd="sng" algn="ctr">
+                      <a:solidFill>
+                        <a:srgbClr val="E2E8F0"/>
+                      </a:solidFill>
+                      <a:prstDash val="solid"/>
+                      <a:round/>
+                      <a:headEnd type="none" w="med" len="med"/>
+                      <a:tailEnd type="none" w="med" len="med"/>
+                    </a:lnR>
+                    <a:lnT w="9525" cap="flat" cmpd="sng" algn="ctr">
+                      <a:solidFill>
+                        <a:srgbClr val="E2E8F0"/>
+                      </a:solidFill>
+                      <a:prstDash val="solid"/>
+                      <a:round/>
+                      <a:headEnd type="none" w="med" len="med"/>
+                      <a:tailEnd type="none" w="med" len="med"/>
+                    </a:lnT>
+                    <a:lnB w="9525" cap="flat" cmpd="sng" algn="ctr">
+                      <a:solidFill>
+                        <a:srgbClr val="E2E8F0"/>
+                      </a:solidFill>
+                      <a:prstDash val="solid"/>
+                      <a:round/>
+                      <a:headEnd type="none" w="med" len="med"/>
+                      <a:tailEnd type="none" w="med" len="med"/>
+                    </a:lnB>
+                    <a:solidFill>
+                      <a:srgbClr val="FFFFFF"/>
+                    </a:solidFill>
+                  </a:tcPr>
+                </a:tc>
+                <a:tc>
+                  <a:txBody>
+                    <a:bodyPr/>
+                    <a:lstStyle/>
+                    <a:p>
+                      <a:pPr algn="ctr" indent="0" marL="0">
+                        <a:buNone/>
+                      </a:pPr>
+                      <a:r>
+                        <a:rPr lang="en-US" sz="1150" b="1" dirty="0">
+                          <a:solidFill>
+                            <a:srgbClr val="1F3B57"/>
+                          </a:solidFill>
+                          <a:latin typeface="Arial" pitchFamily="34" charset="0"/>
+                          <a:ea typeface="Arial" pitchFamily="34" charset="-122"/>
+                          <a:cs typeface="Arial" pitchFamily="34" charset="-120"/>
+                        </a:rPr>
+                        <a:t>0.9058</a:t>
+                      </a:r>
+                      <a:endParaRPr lang="en-US" sz="1150" dirty="0">
+                        <a:latin typeface="Arial" charset="0"/>
+                        <a:ea typeface="Arial" charset="0"/>
+                        <a:cs typeface="Arial" charset="0"/>
+                      </a:endParaRPr>
+                    </a:p>
+                  </a:txBody>
+                  <a:tcPr marL="91440" marR="91440" marT="45720" marB="45720" anchor="ctr">
+                    <a:lnL w="9525" cap="flat" cmpd="sng" algn="ctr">
+                      <a:solidFill>
+                        <a:srgbClr val="E2E8F0"/>
+                      </a:solidFill>
+                      <a:prstDash val="solid"/>
+                      <a:round/>
+                      <a:headEnd type="none" w="med" len="med"/>
+                      <a:tailEnd type="none" w="med" len="med"/>
+                    </a:lnL>
+                    <a:lnR w="9525" cap="flat" cmpd="sng" algn="ctr">
+                      <a:solidFill>
+                        <a:srgbClr val="E2E8F0"/>
+                      </a:solidFill>
+                      <a:prstDash val="solid"/>
+                      <a:round/>
+                      <a:headEnd type="none" w="med" len="med"/>
+                      <a:tailEnd type="none" w="med" len="med"/>
+                    </a:lnR>
+                    <a:lnT w="9525" cap="flat" cmpd="sng" algn="ctr">
+                      <a:solidFill>
+                        <a:srgbClr val="E2E8F0"/>
+                      </a:solidFill>
+                      <a:prstDash val="solid"/>
+                      <a:round/>
+                      <a:headEnd type="none" w="med" len="med"/>
+                      <a:tailEnd type="none" w="med" len="med"/>
+                    </a:lnT>
+                    <a:lnB w="9525" cap="flat" cmpd="sng" algn="ctr">
+                      <a:solidFill>
+                        <a:srgbClr val="E2E8F0"/>
+                      </a:solidFill>
+                      <a:prstDash val="solid"/>
+                      <a:round/>
+                      <a:headEnd type="none" w="med" len="med"/>
+                      <a:tailEnd type="none" w="med" len="med"/>
+                    </a:lnB>
+                    <a:solidFill>
+                      <a:srgbClr val="FFFFFF"/>
+                    </a:solidFill>
+                  </a:tcPr>
+                </a:tc>
+              </a:tr>
+            </a:tbl>
+          </a:graphicData>
+        </a:graphic>
+      </p:graphicFrame>
+      <p:sp>
+        <p:nvSpPr>
+          <p:cNvPr id="7" name="Text 3"/>
+          <p:cNvSpPr/>
+          <p:nvPr/>
+        </p:nvSpPr>
+        <p:spPr>
+          <a:xfrm>
+            <a:off x="502920" y="4718304"/>
+            <a:ext cx="11201400" cy="274320"/>
+          </a:xfrm>
+          <a:prstGeom prst="rect">
+            <a:avLst/>
+          </a:prstGeom>
+          <a:noFill/>
+          <a:ln/>
+        </p:spPr>
+        <p:txBody>
+          <a:bodyPr wrap="square" lIns="0" tIns="0" rIns="0" bIns="0" rtlCol="0" anchor="ctr"/>
+          <a:lstStyle/>
+          <a:p>
+            <a:pPr indent="0" marL="0">
+              <a:buNone/>
+            </a:pPr>
+            <a:r>
+              <a:rPr lang="en-US" sz="1100" dirty="0">
+                <a:solidFill>
+                  <a:srgbClr val="6B7280"/>
+                </a:solidFill>
+                <a:latin typeface="Arial" pitchFamily="34" charset="0"/>
+                <a:ea typeface="Arial" pitchFamily="34" charset="-122"/>
+                <a:cs typeface="Arial" pitchFamily="34" charset="-120"/>
+              </a:rPr>
+              <a:t>λ=4만 줘도 손상의 74%를 회수합니다. selector의 오판은 AUC 0.015~0.043으로 복구 불가지만, 개입은 강도를 낮춰 비용을 비례적으로 줄일 수 있습니다.</a:t>
+            </a:r>
+            <a:endParaRPr lang="en-US" sz="1100" dirty="0"/>
+          </a:p>
+        </p:txBody>
+      </p:sp>
+      <p:sp>
+        <p:nvSpPr>
+          <p:cNvPr id="8" name="Shape 4"/>
+          <p:cNvSpPr/>
+          <p:nvPr/>
+        </p:nvSpPr>
+        <p:spPr>
+          <a:xfrm>
+            <a:off x="502920" y="5047488"/>
+            <a:ext cx="11201400" cy="914400"/>
           </a:xfrm>
           <a:prstGeom prst="roundRect">
             <a:avLst>
-              <a:gd name="adj" fmla="val 4865"/>
+              <a:gd name="adj" fmla="val 9000"/>
             </a:avLst>
           </a:prstGeom>
           <a:solidFill>
@@ -19088,13 +20431,13 @@
       </p:sp>
       <p:sp>
         <p:nvSpPr>
-          <p:cNvPr id="6" name="Text 3"/>
+          <p:cNvPr id="9" name="Text 5"/>
           <p:cNvSpPr/>
           <p:nvPr/>
         </p:nvSpPr>
         <p:spPr>
           <a:xfrm>
-            <a:off x="777240" y="3986784"/>
+            <a:off x="777240" y="5138928"/>
             <a:ext cx="10698480" cy="274320"/>
           </a:xfrm>
           <a:prstGeom prst="rect">
@@ -19127,14 +20470,14 @@
       </p:sp>
       <p:sp>
         <p:nvSpPr>
-          <p:cNvPr id="7" name="Text 4"/>
+          <p:cNvPr id="10" name="Text 6"/>
           <p:cNvSpPr/>
           <p:nvPr/>
         </p:nvSpPr>
         <p:spPr>
           <a:xfrm>
-            <a:off x="777240" y="4334256"/>
-            <a:ext cx="10698480" cy="1097280"/>
+            <a:off x="777240" y="5449824"/>
+            <a:ext cx="10698480" cy="420624"/>
           </a:xfrm>
           <a:prstGeom prst="rect">
             <a:avLst/>
@@ -19147,13 +20490,10 @@
           <a:lstStyle/>
           <a:p>
             <a:pPr indent="0" marL="0">
-              <a:spcAft>
-                <a:spcPts val="600"/>
-              </a:spcAft>
               <a:buNone/>
             </a:pPr>
             <a:r>
-              <a:rPr lang="en-US" sz="1150" dirty="0">
+              <a:rPr lang="en-US" sz="1100" dirty="0">
                 <a:solidFill>
                   <a:srgbClr val="1F3B57"/>
                 </a:solidFill>
@@ -19161,35 +20501,15 @@
                 <a:ea typeface="Arial" pitchFamily="34" charset="-122"/>
                 <a:cs typeface="Arial" pitchFamily="34" charset="-120"/>
               </a:rPr>
-              <a:t>margin_CD = (1+β)·margin(차단) − β·margin(무개입).  두 끝점을 빼기만 한 '차이 신호'도 단독으로 AUC 0.9370입니다 — 차단본(0.9041)보다도 높습니다.</a:t>
+              <a:t>두 끝점을 빼기만 한 '차이 신호'도 단독으로 AUC 0.9370 — 차단본(0.9041)보다 높습니다. 방해가 답을 많이 밀어낸 문항이 곧 틀릴 뻔한 문항이기 때문입니다.</a:t>
             </a:r>
-            <a:endParaRPr lang="en-US" sz="1150" dirty="0"/>
-          </a:p>
-          <a:p>
-            <a:pPr indent="0" marL="0">
-              <a:spcAft>
-                <a:spcPts val="600"/>
-              </a:spcAft>
-              <a:buNone/>
-            </a:pPr>
-            <a:r>
-              <a:rPr lang="en-US" sz="1150" dirty="0">
-                <a:solidFill>
-                  <a:srgbClr val="1F3B57"/>
-                </a:solidFill>
-                <a:latin typeface="Arial" pitchFamily="34" charset="0"/>
-                <a:ea typeface="Arial" pitchFamily="34" charset="-122"/>
-                <a:cs typeface="Arial" pitchFamily="34" charset="-120"/>
-              </a:rPr>
-              <a:t>방해 이미지가 답을 많이 밀어낸 문항이 곧 틀릴 뻔한 문항이기 때문입니다. 제거는 오염을 없애고, 대조는 오염의 크기를 정보로 씁니다. 7B에서는 지울 오염이 적어 β를 키우면 오히려 손해입니다 (β=2에서 0.828).</a:t>
-            </a:r>
-            <a:endParaRPr lang="en-US" sz="1150" dirty="0"/>
+            <a:endParaRPr lang="en-US" sz="1100" dirty="0"/>
           </a:p>
         </p:txBody>
       </p:sp>
       <p:sp>
         <p:nvSpPr>
-          <p:cNvPr id="8" name="Shape 5"/>
+          <p:cNvPr id="11" name="Shape 7"/>
           <p:cNvSpPr/>
           <p:nvPr/>
         </p:nvSpPr>
@@ -19211,7 +20531,7 @@
       </p:sp>
       <p:sp>
         <p:nvSpPr>
-          <p:cNvPr id="9" name="Text 6"/>
+          <p:cNvPr id="12" name="Text 8"/>
           <p:cNvSpPr/>
           <p:nvPr/>
         </p:nvSpPr>

--- a/meeting/_generated/deck_v5.pptx
+++ b/meeting/_generated/deck_v5.pptx
@@ -10390,7 +10390,7 @@
                           <a:ea typeface="Arial" pitchFamily="34" charset="-122"/>
                           <a:cs typeface="Arial" pitchFamily="34" charset="-120"/>
                         </a:rPr>
-                        <a:t>−0.0250  CI [−0.057, +0.009] — 0과 구분 안 됨 (AUC 0.65)</a:t>
+                        <a:t>0층부터 고립 −0.055 (유의)   ·   16층부터 고립 −0.005 (거의 0)</a:t>
                       </a:r>
                       <a:endParaRPr lang="en-US" sz="1050" dirty="0">
                         <a:latin typeface="Arial" charset="0"/>
@@ -10452,13 +10452,13 @@
                       <a:r>
                         <a:rPr lang="en-US" sz="1150" b="1" dirty="0">
                           <a:solidFill>
-                            <a:srgbClr val="E8890C"/>
+                            <a:srgbClr val="1F77B4"/>
                           </a:solidFill>
                           <a:latin typeface="Arial" pitchFamily="34" charset="0"/>
                           <a:ea typeface="Arial" pitchFamily="34" charset="-122"/>
                           <a:cs typeface="Arial" pitchFamily="34" charset="-120"/>
                         </a:rPr>
-                        <a:t>작은 비용</a:t>
+                        <a:t>초반만 필요</a:t>
                       </a:r>
                       <a:endParaRPr lang="en-US" sz="1150" dirty="0">
                         <a:latin typeface="Arial" charset="0"/>
@@ -10797,11 +10797,11 @@
         <p:spPr>
           <a:xfrm>
             <a:off x="502920" y="3145536"/>
-            <a:ext cx="11201400" cy="1572768"/>
+            <a:ext cx="11201400" cy="1920240"/>
           </a:xfrm>
           <a:prstGeom prst="roundRect">
             <a:avLst>
-              <a:gd name="adj" fmla="val 5233"/>
+              <a:gd name="adj" fmla="val 4286"/>
             </a:avLst>
           </a:prstGeom>
           <a:solidFill>
@@ -10824,6 +10824,45 @@
         <p:spPr>
           <a:xfrm>
             <a:off x="777240" y="3291840"/>
+            <a:ext cx="10698480" cy="274320"/>
+          </a:xfrm>
+          <a:prstGeom prst="rect">
+            <a:avLst/>
+          </a:prstGeom>
+          <a:noFill/>
+          <a:ln/>
+        </p:spPr>
+        <p:txBody>
+          <a:bodyPr wrap="square" lIns="0" tIns="0" rIns="0" bIns="0" rtlCol="0" anchor="ctr"/>
+          <a:lstStyle/>
+          <a:p>
+            <a:pPr indent="0" marL="0">
+              <a:buNone/>
+            </a:pPr>
+            <a:r>
+              <a:rPr lang="en-US" sz="1250" b="1" dirty="0">
+                <a:solidFill>
+                  <a:srgbClr val="1F77B4"/>
+                </a:solidFill>
+                <a:latin typeface="Arial" pitchFamily="34" charset="0"/>
+                <a:ea typeface="Arial" pitchFamily="34" charset="-122"/>
+                <a:cs typeface="Arial" pitchFamily="34" charset="-120"/>
+              </a:rPr>
+              <a:t>통합은 앞쪽 16층에서 끝납니다 — 설계 가설('뒤쪽에서 통합')과 반대이고, 이것이 효율 트랙의 근거가 됩니다</a:t>
+            </a:r>
+            <a:endParaRPr lang="en-US" sz="1250" dirty="0"/>
+          </a:p>
+        </p:txBody>
+      </p:sp>
+      <p:sp>
+        <p:nvSpPr>
+          <p:cNvPr id="7" name="Text 4"/>
+          <p:cNvSpPr/>
+          <p:nvPr/>
+        </p:nvSpPr>
+        <p:spPr>
+          <a:xfrm>
+            <a:off x="777240" y="3621024"/>
             <a:ext cx="10698480" cy="292608"/>
           </a:xfrm>
           <a:prstGeom prst="rect">
@@ -10856,14 +10895,14 @@
       </p:sp>
       <p:sp>
         <p:nvSpPr>
-          <p:cNvPr id="7" name="Text 4"/>
+          <p:cNvPr id="8" name="Text 5"/>
           <p:cNvSpPr/>
           <p:nvPr/>
         </p:nvSpPr>
         <p:spPr>
           <a:xfrm>
-            <a:off x="777240" y="3657600"/>
-            <a:ext cx="10698480" cy="1005840"/>
+            <a:off x="777240" y="3968496"/>
+            <a:ext cx="10698480" cy="914400"/>
           </a:xfrm>
           <a:prstGeom prst="rect">
             <a:avLst/>
@@ -10877,7 +10916,7 @@
           <a:p>
             <a:pPr indent="0" marL="0">
               <a:spcAft>
-                <a:spcPts val="600"/>
+                <a:spcPts val="500"/>
               </a:spcAft>
               <a:buNone/>
             </a:pPr>
@@ -10897,7 +10936,7 @@
           <a:p>
             <a:pPr indent="0" marL="0">
               <a:spcAft>
-                <a:spcPts val="600"/>
+                <a:spcPts val="500"/>
               </a:spcAft>
               <a:buNone/>
             </a:pPr>
@@ -10918,7 +10957,7 @@
       </p:sp>
       <p:sp>
         <p:nvSpPr>
-          <p:cNvPr id="8" name="Text 5"/>
+          <p:cNvPr id="9" name="Text 6"/>
           <p:cNvSpPr/>
           <p:nvPr/>
         </p:nvSpPr>
@@ -10957,7 +10996,7 @@
       </p:sp>
       <p:sp>
         <p:nvSpPr>
-          <p:cNvPr id="9" name="Shape 6"/>
+          <p:cNvPr id="10" name="Shape 7"/>
           <p:cNvSpPr/>
           <p:nvPr/>
         </p:nvSpPr>
@@ -10979,7 +11018,7 @@
       </p:sp>
       <p:sp>
         <p:nvSpPr>
-          <p:cNvPr id="10" name="Text 7"/>
+          <p:cNvPr id="11" name="Text 8"/>
           <p:cNvSpPr/>
           <p:nvPr/>
         </p:nvSpPr>
@@ -11010,7 +11049,7 @@
                 <a:ea typeface="Arial" pitchFamily="34" charset="-122"/>
                 <a:cs typeface="Arial" pitchFamily="34" charset="-120"/>
               </a:rPr>
-              <a:t>→ 무엇을 언제 막을지는 질문이 정합니다. 이미지만 보고 미리 거를 수 있는 문제가 아닙니다</a:t>
+              <a:t>→ 무엇을·언제 막을지는 질문 유형과 층이 함께 정합니다. 이미지만 보고 미리 거를 수 있는 문제가 아닙니다</a:t>
             </a:r>
             <a:endParaRPr lang="en-US" sz="1250" dirty="0"/>
           </a:p>

--- a/meeting/_generated/deck_v5.pptx
+++ b/meeting/_generated/deck_v5.pptx
@@ -10949,7 +10949,7 @@
                 <a:ea typeface="Arial" pitchFamily="34" charset="-122"/>
                 <a:cs typeface="Arial" pitchFamily="34" charset="-120"/>
               </a:rPr>
-              <a:t>게다가 selector가 틀려서 관련 이미지를 버리면 AUC가 0.015~0.043으로 붕괴합니다 — 복구 불가능한 오류입니다. 모델 내부 개입은 층·경로·강도를 연속적으로 조절할 수 있습니다.</a:t>
+              <a:t>실제로 CLIP selector는 우연 수준입니다 (N=1·2·3에서 0.51 / 0.39 / 0.33, 무작위 0.50 / 0.33 / 0.25). 방해 이미지가 질의 객체를 담고 있으면 의미 유사도는 오히려 방해 쪽을 고릅니다 — 오염이 일어나는 바로 그 상황에서 틀립니다. 같은 문항에서 반사실 컨트롤러는 0.69 / 0.71 / 0.73입니다.</a:t>
             </a:r>
             <a:endParaRPr lang="en-US" sz="1150" dirty="0"/>
           </a:p>
@@ -10988,7 +10988,7 @@
                 <a:ea typeface="Arial" pitchFamily="34" charset="-122"/>
                 <a:cs typeface="Arial" pitchFamily="34" charset="-120"/>
               </a:rPr>
-              <a:t>all-of-3에서는 어떤 이미지도 버릴 수 없다는 것이 설계상 자명하며, 이는 고립 비용과 무관하게 성립합니다</a:t>
+              <a:t>단, 현 벤치마크는 관련도를 위치로 정의하므로 텍스트를 파싱하는 selector는 100%입니다 — 이 비교는 '의미 유사도로는 안 된다'까지만 보입니다 (슬라이드 9 한계①)</a:t>
             </a:r>
             <a:endParaRPr lang="en-US" sz="1000" dirty="0"/>
           </a:p>

--- a/meeting/_generated/deck_v5.pptx
+++ b/meeting/_generated/deck_v5.pptx
@@ -15,9 +15,10 @@
     <p:sldId id="263" r:id="rId9"/>
     <p:sldId id="264" r:id="rId10"/>
     <p:sldId id="265" r:id="rId11"/>
+    <p:sldId id="266" r:id="rId12"/>
   </p:sldIdLst>
   <p:notesMasterIdLst>
-    <p:notesMasterId r:id="rId12"/>
+    <p:notesMasterId r:id="rId13"/>
   </p:notesMasterIdLst>
   <p:sldSz cx="12192000" cy="6858000"/>
   <p:notesSz cx="6858000" cy="12192000"/>
@@ -599,6 +600,94 @@
           <a:p>
             <a:r>
               <a:rPr lang="en-US" dirty="0"/>
+              <a:t>불리한 것을 먼저 말씀드립니다. 가장 큰 문제는 벤치마크입니다. 지금 질문이 첫 번째 이미지라고 위치를 지목하기 때문에 앞단 모듈이 텍스트만 읽어도 됩니다. 이건 설계 결함이고 바꿔야 합니다.</a:t>
+            </a:r>
+            <a:endParaRPr lang="en-US" dirty="0"/>
+          </a:p>
+        </p:txBody>
+      </p:sp>
+      <p:sp>
+        <p:nvSpPr>
+          <p:cNvPr id="4" name="Slide Number Placeholder 3"/>
+          <p:cNvSpPr>
+            <a:spLocks noGrp="1"/>
+          </p:cNvSpPr>
+          <p:nvPr>
+            <p:ph type="sldNum" sz="quarter" idx="10"/>
+          </p:nvPr>
+        </p:nvSpPr>
+        <p:spPr/>
+        <p:txBody>
+          <a:bodyPr/>
+          <a:lstStyle/>
+          <a:p>
+            <a:fld id="{F7021451-1387-4CA6-816F-3879F97B5CBC}" type="slidenum">
+              <a:rPr lang="en-US"/>
+              <a:t>10</a:t>
+            </a:fld>
+            <a:endParaRPr lang="en-US"/>
+          </a:p>
+        </p:txBody>
+      </p:sp>
+    </p:spTree>
+    <p:extLst>
+      <p:ext uri="{BB962C8B-B14F-4D97-AF65-F5344CB8AC3E}">
+        <p14:creationId xmlns:p14="http://schemas.microsoft.com/office/powerpoint/2010/main" val="1024086991"/>
+      </p:ext>
+    </p:extLst>
+  </p:cSld>
+  <p:clrMapOvr>
+    <a:masterClrMapping/>
+  </p:clrMapOvr>
+</p:notes>
+</file>
+
+<file path=ppt/notesSlides/notesSlide11.xml><?xml version="1.0" encoding="utf-8"?>
+<p:notes xmlns:a="http://schemas.openxmlformats.org/drawingml/2006/main" xmlns:r="http://schemas.openxmlformats.org/officeDocument/2006/relationships" xmlns:p="http://schemas.openxmlformats.org/presentationml/2006/main">
+  <p:cSld>
+    <p:spTree>
+      <p:nvGrpSpPr>
+        <p:cNvPr id="1" name=""/>
+        <p:cNvGrpSpPr/>
+        <p:nvPr/>
+      </p:nvGrpSpPr>
+      <p:grpSpPr>
+        <a:xfrm>
+          <a:off x="0" y="0"/>
+          <a:ext cx="0" cy="0"/>
+          <a:chOff x="0" y="0"/>
+          <a:chExt cx="0" cy="0"/>
+        </a:xfrm>
+      </p:grpSpPr>
+      <p:sp>
+        <p:nvSpPr>
+          <p:cNvPr id="2" name="Slide Image Placeholder 1"/>
+          <p:cNvSpPr>
+            <a:spLocks noGrp="1" noRot="1" noChangeAspect="1"/>
+          </p:cNvSpPr>
+          <p:nvPr>
+            <p:ph type="sldImg"/>
+          </p:nvPr>
+        </p:nvSpPr>
+        <p:spPr/>
+      </p:sp>
+      <p:sp>
+        <p:nvSpPr>
+          <p:cNvPr id="3" name="Notes Placeholder 2"/>
+          <p:cNvSpPr>
+            <a:spLocks noGrp="1"/>
+          </p:cNvSpPr>
+          <p:nvPr>
+            <p:ph type="body" idx="1"/>
+          </p:nvPr>
+        </p:nvSpPr>
+        <p:spPr/>
+        <p:txBody>
+          <a:bodyPr/>
+          <a:lstStyle/>
+          <a:p>
+            <a:r>
+              <a:rPr lang="en-US" dirty="0"/>
               <a:t>4주 계획입니다. 가장 중요한 건 2주차입니다. 공개 벤치마크에서 재현되지 않으면 접겠습니다. 지금까지 사전 등록을 네 번 했고 그중 두 번은 실패로 기록했습니다. 이번에도 같은 방식으로 하겠습니다.</a:t>
             </a:r>
             <a:endParaRPr lang="en-US" dirty="0"/>
@@ -622,7 +711,7 @@
           <a:p>
             <a:fld id="{F7021451-1387-4CA6-816F-3879F97B5CBC}" type="slidenum">
               <a:rPr lang="en-US"/>
-              <a:t>10</a:t>
+              <a:t>11</a:t>
             </a:fld>
             <a:endParaRPr lang="en-US"/>
           </a:p>
@@ -687,7 +776,7 @@
           <a:p>
             <a:r>
               <a:rPr lang="en-US" dirty="0"/>
-              <a:t>설계의 핵심은 두 가지입니다. 첫째, 오염 압력이 양방향입니다 — 한쪽 방향만 보면 7B에서 현상을 놓칩니다. 실제로 저희가 처음에 그 실수를 했습니다. 둘째, 지표를 AUC로 잡았습니다. 정확도만 보면 예/아니오 비율이 이동한 것을 판별력 개선으로 착각합니다.</a:t>
+              <a:t>이 슬라이드가 판단용입니다. 기존 연구가 정반대 처방을 냈는데 양쪽 다 개선을 보고했습니다. 아무도 그 이유를 설명하지 못했고, 저희가 경로를 나눠서 재니 둘 다 맞았다는 게 나왔습니다. 기여는 다섯 가지이고 전부 측정된 숫자입니다. 특히 C2가 새롭습니다 — 무관한 이미지를 지우는 것보다 질문의 읽기만 끊는 게 낫다는 건 기존 어느 진영과도 다른 처방입니다.</a:t>
             </a:r>
             <a:endParaRPr lang="en-US" dirty="0"/>
           </a:p>
@@ -775,7 +864,7 @@
           <a:p>
             <a:r>
               <a:rPr lang="en-US" dirty="0"/>
-              <a:t>왼쪽 표를 보시면 방해 이미지가 늘수록 판별력이 단조 감소합니다. 3장이면 0.521, 사실상 우연입니다. 그런데 차단하면 어느 경우든 0.904로 돌아옵니다. 회복률이 방해 수와 무관하게 99%라는 게 중요합니다 — 정보가 손상된 게 아니라 가려져 있었다는 뜻입니다.</a:t>
+              <a:t>설계의 핵심은 두 가지입니다. 첫째, 오염 압력이 양방향입니다 — 한쪽 방향만 보면 7B에서 현상을 놓칩니다. 실제로 저희가 처음에 그 실수를 했습니다. 둘째, 지표를 AUC로 잡았습니다. 정확도만 보면 예/아니오 비율이 이동한 것을 판별력 개선으로 착각합니다.</a:t>
             </a:r>
             <a:endParaRPr lang="en-US" dirty="0"/>
           </a:p>
@@ -863,7 +952,7 @@
           <a:p>
             <a:r>
               <a:rPr lang="en-US" dirty="0"/>
-              <a:t>이 슬라이드가 핵심입니다. 두 배치에서 각각 쟀습니다. 뒤집은 배치에서는 관련 이미지가 방해 이미지를 볼 수 있으므로 표현 오염 경로가 실제로 존재합니다. 그런데 그 경로를 끊으면 파국적으로 나빠집니다. 즉 이미지끼리 정보를 주고받는 것은 오염원이 아니라 보호막입니다. 그리고 더 중요한 건 오른쪽입니다. 질문의 읽기 경로만 끊는 것이 무관 이미지를 통째로 지우는 것보다 낫습니다. 지우면 유익한 맥락화까지 잃기 때문입니다. 사전에 적어둔 예측 두 개가 모두 틀렸는데, 틀린 방향이 저희 결론을 오히려 강하게 만들었습니다.</a:t>
+              <a:t>왼쪽 표를 보시면 방해 이미지가 늘수록 판별력이 단조 감소합니다. 3장이면 0.521, 사실상 우연입니다. 그런데 차단하면 어느 경우든 0.904로 돌아옵니다. 회복률이 방해 수와 무관하게 99%라는 게 중요합니다 — 정보가 손상된 게 아니라 가려져 있었다는 뜻입니다.</a:t>
             </a:r>
             <a:endParaRPr lang="en-US" dirty="0"/>
           </a:p>
@@ -951,7 +1040,7 @@
           <a:p>
             <a:r>
               <a:rPr lang="en-US" dirty="0"/>
-              <a:t>교수님께서 물어보실 만한 것을 미리 답해두었습니다. CLIP 같은 작은 모듈로 앞에서 걸러내면 되지 않느냐는 질문인데, 두 가지로 답합니다. 첫째, 최적 정책이 질문 유형에 따라 다릅니다. 둘째, 앞단 selector의 오판은 복구가 안 됩니다.</a:t>
+              <a:t>이 슬라이드가 핵심입니다. 두 배치에서 각각 쟀습니다. 뒤집은 배치에서는 관련 이미지가 방해 이미지를 볼 수 있으므로 표현 오염 경로가 실제로 존재합니다. 그런데 그 경로를 끊으면 파국적으로 나빠집니다. 즉 이미지끼리 정보를 주고받는 것은 오염원이 아니라 보호막입니다. 그리고 더 중요한 건 오른쪽입니다. 질문의 읽기 경로만 끊는 것이 무관 이미지를 통째로 지우는 것보다 낫습니다. 지우면 유익한 맥락화까지 잃기 때문입니다. 사전에 적어둔 예측 두 개가 모두 틀렸는데, 틀린 방향이 저희 결론을 오히려 강하게 만들었습니다.</a:t>
             </a:r>
             <a:endParaRPr lang="en-US" dirty="0"/>
           </a:p>
@@ -1039,7 +1128,7 @@
           <a:p>
             <a:r>
               <a:rPr lang="en-US" dirty="0"/>
-              <a:t>선행연구를 네 축으로 조사했고 고위협 논문 다섯 편은 원문까지 확인했습니다. 그 결과 처음에 novelty로 생각했던 세 가지는 쓸 수 없다는 걸 알았습니다. 대신 더 좁고 확실한 자리가 열렸습니다. 특히 CAPL과 SoFA는 attention을 여는 방향, MIMIC은 막는 방향으로 정반대 처방을 냈는데, 저희 경로 분해가 이 모순을 설명합니다.</a:t>
+              <a:t>교수님께서 물어보실 만한 것을 미리 답해두었습니다. CLIP 같은 작은 모듈로 앞에서 걸러내면 되지 않느냐는 질문인데, 두 가지로 답합니다. 첫째, 최적 정책이 질문 유형에 따라 다릅니다. 둘째, 앞단 selector의 오판은 복구가 안 됩니다.</a:t>
             </a:r>
             <a:endParaRPr lang="en-US" dirty="0"/>
           </a:p>
@@ -1127,7 +1216,7 @@
           <a:p>
             <a:r>
               <a:rPr lang="en-US" dirty="0"/>
-              <a:t>여기가 그동안 막혀 있던 부분입니다. attention으로 관련 이미지를 판정하려는 시도는 계속 실패했습니다. 위치 편향 때문이었고, 선행연구가 제시한 RoPE 제거 처방을 적용해도 안 됐습니다. 그래서 신호를 완전히 바꿨습니다. 이미지를 하나씩 빼보고 답이 가장 크게 움직이는 것을 관련 이미지로 봅니다. 위치를 아예 참조하지 않으니 위치 편향이 원천적으로 불가능합니다.</a:t>
+              <a:t>선행연구를 네 축으로 조사했고 고위협 논문 다섯 편은 원문까지 확인했습니다. 그 결과 처음에 novelty로 생각했던 세 가지는 쓸 수 없다는 걸 알았습니다. 대신 더 좁고 확실한 자리가 열렸습니다. 특히 CAPL과 SoFA는 attention을 여는 방향, MIMIC은 막는 방향으로 정반대 처방을 냈는데, 저희 경로 분해가 이 모순을 설명합니다.</a:t>
             </a:r>
             <a:endParaRPr lang="en-US" dirty="0"/>
           </a:p>
@@ -1215,7 +1304,7 @@
           <a:p>
             <a:r>
               <a:rPr lang="en-US" dirty="0"/>
-              <a:t>방법은 여러 개를 시험했고 트레이드오프가 분명합니다. 하드 차단은 계산을 줄이지만 오라클이 필요합니다. 대조 디코딩은 정확도가 가장 좋지만 forward가 두 번입니다. 반사실 컨트롤러는 오라클이 필요 없지만 N+1번입니다. 그리고 처음에 생각했던 negative attention은 폐기합니다. 조사해보니 GPAM 계열은 전부 아키텍처 변경과 학습이 필요하고, 학습 없이 할 수 있는 건 결국 저희 마스크의 연속판이었습니다.</a:t>
+              <a:t>여기가 그동안 막혀 있던 부분입니다. attention으로 관련 이미지를 판정하려는 시도는 계속 실패했습니다. 위치 편향 때문이었고, 선행연구가 제시한 RoPE 제거 처방을 적용해도 안 됐습니다. 그래서 신호를 완전히 바꿨습니다. 이미지를 하나씩 빼보고 답이 가장 크게 움직이는 것을 관련 이미지로 봅니다. 위치를 아예 참조하지 않으니 위치 편향이 원천적으로 불가능합니다.</a:t>
             </a:r>
             <a:endParaRPr lang="en-US" dirty="0"/>
           </a:p>
@@ -1303,7 +1392,7 @@
           <a:p>
             <a:r>
               <a:rPr lang="en-US" dirty="0"/>
-              <a:t>불리한 것을 먼저 말씀드립니다. 가장 큰 문제는 벤치마크입니다. 지금 질문이 첫 번째 이미지라고 위치를 지목하기 때문에 앞단 모듈이 텍스트만 읽어도 됩니다. 이건 설계 결함이고 바꿔야 합니다.</a:t>
+              <a:t>방법은 여러 개를 시험했고 트레이드오프가 분명합니다. 하드 차단은 계산을 줄이지만 오라클이 필요합니다. 대조 디코딩은 정확도가 가장 좋지만 forward가 두 번입니다. 반사실 컨트롤러는 오라클이 필요 없지만 N+1번입니다. 그리고 처음에 생각했던 negative attention은 폐기합니다. 조사해보니 GPAM 계열은 전부 아키텍처 변경과 학습이 필요하고, 학습 없이 할 수 있는 건 결국 저희 마스크의 연속판이었습니다.</a:t>
             </a:r>
             <a:endParaRPr lang="en-US" dirty="0"/>
           </a:p>
@@ -2388,6 +2477,848 @@
 <file path=ppt/slides/slide10.xml><?xml version="1.0" encoding="utf-8"?>
 <p:sld xmlns:a="http://schemas.openxmlformats.org/drawingml/2006/main" xmlns:r="http://schemas.openxmlformats.org/officeDocument/2006/relationships" xmlns:p="http://schemas.openxmlformats.org/presentationml/2006/main">
   <p:cSld name="Slide 10">
+    <p:spTree>
+      <p:nvGrpSpPr>
+        <p:cNvPr id="1" name=""/>
+        <p:cNvGrpSpPr/>
+        <p:nvPr/>
+      </p:nvGrpSpPr>
+      <p:grpSpPr>
+        <a:xfrm>
+          <a:off x="0" y="0"/>
+          <a:ext cx="0" cy="0"/>
+          <a:chOff x="0" y="0"/>
+          <a:chExt cx="0" cy="0"/>
+        </a:xfrm>
+      </p:grpSpPr>
+      <p:sp>
+        <p:nvSpPr>
+          <p:cNvPr id="2" name="Text 0"/>
+          <p:cNvSpPr/>
+          <p:nvPr/>
+        </p:nvSpPr>
+        <p:spPr>
+          <a:xfrm>
+            <a:off x="502920" y="237744"/>
+            <a:ext cx="10515600" cy="274320"/>
+          </a:xfrm>
+          <a:prstGeom prst="rect">
+            <a:avLst/>
+          </a:prstGeom>
+          <a:noFill/>
+          <a:ln/>
+        </p:spPr>
+        <p:txBody>
+          <a:bodyPr wrap="square" lIns="0" tIns="0" rIns="0" bIns="0" rtlCol="0" anchor="ctr"/>
+          <a:lstStyle/>
+          <a:p>
+            <a:pPr indent="0" marL="0">
+              <a:buNone/>
+            </a:pPr>
+            <a:r>
+              <a:rPr lang="en-US" sz="1100" b="1" dirty="0">
+                <a:solidFill>
+                  <a:srgbClr val="1F77B4"/>
+                </a:solidFill>
+                <a:latin typeface="Arial" pitchFamily="34" charset="0"/>
+                <a:ea typeface="Arial" pitchFamily="34" charset="-122"/>
+                <a:cs typeface="Arial" pitchFamily="34" charset="-120"/>
+              </a:rPr>
+              <a:t>정직한 한계</a:t>
+            </a:r>
+            <a:endParaRPr lang="en-US" sz="1100" dirty="0"/>
+          </a:p>
+        </p:txBody>
+      </p:sp>
+      <p:sp>
+        <p:nvSpPr>
+          <p:cNvPr id="3" name="Text 1"/>
+          <p:cNvSpPr/>
+          <p:nvPr/>
+        </p:nvSpPr>
+        <p:spPr>
+          <a:xfrm>
+            <a:off x="502920" y="493776"/>
+            <a:ext cx="11155680" cy="658368"/>
+          </a:xfrm>
+          <a:prstGeom prst="rect">
+            <a:avLst/>
+          </a:prstGeom>
+          <a:noFill/>
+          <a:ln/>
+        </p:spPr>
+        <p:txBody>
+          <a:bodyPr wrap="square" lIns="0" tIns="0" rIns="0" bIns="0" rtlCol="0" anchor="ctr"/>
+          <a:lstStyle/>
+          <a:p>
+            <a:pPr indent="0" marL="0">
+              <a:buNone/>
+            </a:pPr>
+            <a:r>
+              <a:rPr lang="en-US" sz="2100" b="1" dirty="0">
+                <a:solidFill>
+                  <a:srgbClr val="1F3B57"/>
+                </a:solidFill>
+                <a:latin typeface="Arial" pitchFamily="34" charset="0"/>
+                <a:ea typeface="Arial" pitchFamily="34" charset="-122"/>
+                <a:cs typeface="Arial" pitchFamily="34" charset="-120"/>
+              </a:rPr>
+              <a:t>지금 이 연구를 무너뜨릴 수 있는 것 세 가지</a:t>
+            </a:r>
+            <a:endParaRPr lang="en-US" sz="2100" dirty="0"/>
+          </a:p>
+        </p:txBody>
+      </p:sp>
+      <p:sp>
+        <p:nvSpPr>
+          <p:cNvPr id="4" name="Shape 2"/>
+          <p:cNvSpPr/>
+          <p:nvPr/>
+        </p:nvSpPr>
+        <p:spPr>
+          <a:xfrm>
+            <a:off x="502920" y="1298448"/>
+            <a:ext cx="11201400" cy="1408176"/>
+          </a:xfrm>
+          <a:prstGeom prst="roundRect">
+            <a:avLst>
+              <a:gd name="adj" fmla="val 5195"/>
+            </a:avLst>
+          </a:prstGeom>
+          <a:solidFill>
+            <a:srgbClr val="FBEAEA"/>
+          </a:solidFill>
+          <a:ln w="12700">
+            <a:solidFill>
+              <a:srgbClr val="D62728"/>
+            </a:solidFill>
+            <a:prstDash val="solid"/>
+          </a:ln>
+        </p:spPr>
+      </p:sp>
+      <p:sp>
+        <p:nvSpPr>
+          <p:cNvPr id="5" name="Shape 3"/>
+          <p:cNvSpPr/>
+          <p:nvPr/>
+        </p:nvSpPr>
+        <p:spPr>
+          <a:xfrm>
+            <a:off x="749808" y="1463040"/>
+            <a:ext cx="402336" cy="402336"/>
+          </a:xfrm>
+          <a:prstGeom prst="ellipse">
+            <a:avLst/>
+          </a:prstGeom>
+          <a:solidFill>
+            <a:srgbClr val="D62728"/>
+          </a:solidFill>
+          <a:ln/>
+        </p:spPr>
+      </p:sp>
+      <p:sp>
+        <p:nvSpPr>
+          <p:cNvPr id="6" name="Text 4"/>
+          <p:cNvSpPr/>
+          <p:nvPr/>
+        </p:nvSpPr>
+        <p:spPr>
+          <a:xfrm>
+            <a:off x="749808" y="1463040"/>
+            <a:ext cx="402336" cy="402336"/>
+          </a:xfrm>
+          <a:prstGeom prst="rect">
+            <a:avLst/>
+          </a:prstGeom>
+          <a:noFill/>
+          <a:ln/>
+        </p:spPr>
+        <p:txBody>
+          <a:bodyPr wrap="square" lIns="0" tIns="0" rIns="0" bIns="0" rtlCol="0" anchor="ctr"/>
+          <a:lstStyle/>
+          <a:p>
+            <a:pPr algn="ctr" indent="0" marL="0">
+              <a:buNone/>
+            </a:pPr>
+            <a:r>
+              <a:rPr lang="en-US" sz="1300" b="1" dirty="0">
+                <a:solidFill>
+                  <a:srgbClr val="FFFFFF"/>
+                </a:solidFill>
+                <a:latin typeface="Arial" pitchFamily="34" charset="0"/>
+                <a:ea typeface="Arial" pitchFamily="34" charset="-122"/>
+                <a:cs typeface="Arial" pitchFamily="34" charset="-120"/>
+              </a:rPr>
+              <a:t>1</a:t>
+            </a:r>
+            <a:endParaRPr lang="en-US" sz="1300" dirty="0"/>
+          </a:p>
+        </p:txBody>
+      </p:sp>
+      <p:sp>
+        <p:nvSpPr>
+          <p:cNvPr id="7" name="Text 5"/>
+          <p:cNvSpPr/>
+          <p:nvPr/>
+        </p:nvSpPr>
+        <p:spPr>
+          <a:xfrm>
+            <a:off x="1316736" y="1444752"/>
+            <a:ext cx="10149840" cy="274320"/>
+          </a:xfrm>
+          <a:prstGeom prst="rect">
+            <a:avLst/>
+          </a:prstGeom>
+          <a:noFill/>
+          <a:ln/>
+        </p:spPr>
+        <p:txBody>
+          <a:bodyPr wrap="square" lIns="0" tIns="0" rIns="0" bIns="0" rtlCol="0" anchor="ctr"/>
+          <a:lstStyle/>
+          <a:p>
+            <a:pPr indent="0" marL="0">
+              <a:buNone/>
+            </a:pPr>
+            <a:r>
+              <a:rPr lang="en-US" sz="1300" b="1" dirty="0">
+                <a:solidFill>
+                  <a:srgbClr val="1F3B57"/>
+                </a:solidFill>
+                <a:latin typeface="Arial" pitchFamily="34" charset="0"/>
+                <a:ea typeface="Arial" pitchFamily="34" charset="-122"/>
+                <a:cs typeface="Arial" pitchFamily="34" charset="-120"/>
+              </a:rPr>
+              <a:t>벤치마크가 위치로 대상을 지목한다</a:t>
+            </a:r>
+            <a:endParaRPr lang="en-US" sz="1300" dirty="0"/>
+          </a:p>
+        </p:txBody>
+      </p:sp>
+      <p:sp>
+        <p:nvSpPr>
+          <p:cNvPr id="8" name="Text 6"/>
+          <p:cNvSpPr/>
+          <p:nvPr/>
+        </p:nvSpPr>
+        <p:spPr>
+          <a:xfrm>
+            <a:off x="1316736" y="1755648"/>
+            <a:ext cx="10149840" cy="548640"/>
+          </a:xfrm>
+          <a:prstGeom prst="rect">
+            <a:avLst/>
+          </a:prstGeom>
+          <a:noFill/>
+          <a:ln/>
+        </p:spPr>
+        <p:txBody>
+          <a:bodyPr wrap="square" lIns="0" tIns="0" rIns="0" bIns="0" rtlCol="0" anchor="ctr"/>
+          <a:lstStyle/>
+          <a:p>
+            <a:pPr indent="0" marL="0">
+              <a:lnSpc>
+                <a:spcPct val="115000"/>
+              </a:lnSpc>
+              <a:buNone/>
+            </a:pPr>
+            <a:r>
+              <a:rPr lang="en-US" sz="1100" dirty="0">
+                <a:solidFill>
+                  <a:srgbClr val="1F3B57"/>
+                </a:solidFill>
+                <a:latin typeface="Arial" pitchFamily="34" charset="0"/>
+                <a:ea typeface="Arial" pitchFamily="34" charset="-122"/>
+                <a:cs typeface="Arial" pitchFamily="34" charset="-120"/>
+              </a:rPr>
+              <a:t>질문이 "첫 번째 이미지에"로 시작하므로, 앞단 모듈이 텍스트만 파싱해도 100% 맞힙니다.</a:t>
+            </a:r>
+            <a:endParaRPr lang="en-US" sz="1100" dirty="0"/>
+          </a:p>
+          <a:p>
+            <a:pPr indent="0" marL="0">
+              <a:lnSpc>
+                <a:spcPct val="115000"/>
+              </a:lnSpc>
+              <a:buNone/>
+            </a:pPr>
+            <a:r>
+              <a:rPr lang="en-US" sz="1100" dirty="0">
+                <a:solidFill>
+                  <a:srgbClr val="1F3B57"/>
+                </a:solidFill>
+                <a:latin typeface="Arial" pitchFamily="34" charset="0"/>
+                <a:ea typeface="Arial" pitchFamily="34" charset="-122"/>
+                <a:cs typeface="Arial" pitchFamily="34" charset="-120"/>
+              </a:rPr>
+              <a:t>현 벤치마크로는 '내부 개입이어야 하는 이유'를 증명할 수 없습니다.</a:t>
+            </a:r>
+            <a:endParaRPr lang="en-US" sz="1100" dirty="0"/>
+          </a:p>
+        </p:txBody>
+      </p:sp>
+      <p:sp>
+        <p:nvSpPr>
+          <p:cNvPr id="9" name="Text 7"/>
+          <p:cNvSpPr/>
+          <p:nvPr/>
+        </p:nvSpPr>
+        <p:spPr>
+          <a:xfrm>
+            <a:off x="1316736" y="2340864"/>
+            <a:ext cx="10149840" cy="274320"/>
+          </a:xfrm>
+          <a:prstGeom prst="rect">
+            <a:avLst/>
+          </a:prstGeom>
+          <a:noFill/>
+          <a:ln/>
+        </p:spPr>
+        <p:txBody>
+          <a:bodyPr wrap="square" lIns="0" tIns="0" rIns="0" bIns="0" rtlCol="0" anchor="ctr"/>
+          <a:lstStyle/>
+          <a:p>
+            <a:pPr indent="0" marL="0">
+              <a:buNone/>
+            </a:pPr>
+            <a:r>
+              <a:rPr lang="en-US" sz="1100" b="1" dirty="0">
+                <a:solidFill>
+                  <a:srgbClr val="2E8B57"/>
+                </a:solidFill>
+                <a:latin typeface="Arial" pitchFamily="34" charset="0"/>
+                <a:ea typeface="Arial" pitchFamily="34" charset="-122"/>
+                <a:cs typeface="Arial" pitchFamily="34" charset="-120"/>
+              </a:rPr>
+              <a:t>대응: all-of-3 세트를 만들어 측정 완료 (AUC 0.99 → 0.65로 천장 제거). 다음은 관련도가 추론의 결과인 질문</a:t>
+            </a:r>
+            <a:endParaRPr lang="en-US" sz="1100" dirty="0"/>
+          </a:p>
+        </p:txBody>
+      </p:sp>
+      <p:sp>
+        <p:nvSpPr>
+          <p:cNvPr id="10" name="Shape 8"/>
+          <p:cNvSpPr/>
+          <p:nvPr/>
+        </p:nvSpPr>
+        <p:spPr>
+          <a:xfrm>
+            <a:off x="502920" y="2834640"/>
+            <a:ext cx="11201400" cy="1408176"/>
+          </a:xfrm>
+          <a:prstGeom prst="roundRect">
+            <a:avLst>
+              <a:gd name="adj" fmla="val 5195"/>
+            </a:avLst>
+          </a:prstGeom>
+          <a:solidFill>
+            <a:srgbClr val="FBEAEA"/>
+          </a:solidFill>
+          <a:ln w="12700">
+            <a:solidFill>
+              <a:srgbClr val="D62728"/>
+            </a:solidFill>
+            <a:prstDash val="solid"/>
+          </a:ln>
+        </p:spPr>
+      </p:sp>
+      <p:sp>
+        <p:nvSpPr>
+          <p:cNvPr id="11" name="Shape 9"/>
+          <p:cNvSpPr/>
+          <p:nvPr/>
+        </p:nvSpPr>
+        <p:spPr>
+          <a:xfrm>
+            <a:off x="749808" y="2999232"/>
+            <a:ext cx="402336" cy="402336"/>
+          </a:xfrm>
+          <a:prstGeom prst="ellipse">
+            <a:avLst/>
+          </a:prstGeom>
+          <a:solidFill>
+            <a:srgbClr val="D62728"/>
+          </a:solidFill>
+          <a:ln/>
+        </p:spPr>
+      </p:sp>
+      <p:sp>
+        <p:nvSpPr>
+          <p:cNvPr id="12" name="Text 10"/>
+          <p:cNvSpPr/>
+          <p:nvPr/>
+        </p:nvSpPr>
+        <p:spPr>
+          <a:xfrm>
+            <a:off x="749808" y="2999232"/>
+            <a:ext cx="402336" cy="402336"/>
+          </a:xfrm>
+          <a:prstGeom prst="rect">
+            <a:avLst/>
+          </a:prstGeom>
+          <a:noFill/>
+          <a:ln/>
+        </p:spPr>
+        <p:txBody>
+          <a:bodyPr wrap="square" lIns="0" tIns="0" rIns="0" bIns="0" rtlCol="0" anchor="ctr"/>
+          <a:lstStyle/>
+          <a:p>
+            <a:pPr algn="ctr" indent="0" marL="0">
+              <a:buNone/>
+            </a:pPr>
+            <a:r>
+              <a:rPr lang="en-US" sz="1300" b="1" dirty="0">
+                <a:solidFill>
+                  <a:srgbClr val="FFFFFF"/>
+                </a:solidFill>
+                <a:latin typeface="Arial" pitchFamily="34" charset="0"/>
+                <a:ea typeface="Arial" pitchFamily="34" charset="-122"/>
+                <a:cs typeface="Arial" pitchFamily="34" charset="-120"/>
+              </a:rPr>
+              <a:t>2</a:t>
+            </a:r>
+            <a:endParaRPr lang="en-US" sz="1300" dirty="0"/>
+          </a:p>
+        </p:txBody>
+      </p:sp>
+      <p:sp>
+        <p:nvSpPr>
+          <p:cNvPr id="13" name="Text 11"/>
+          <p:cNvSpPr/>
+          <p:nvPr/>
+        </p:nvSpPr>
+        <p:spPr>
+          <a:xfrm>
+            <a:off x="1316736" y="2980944"/>
+            <a:ext cx="10149840" cy="274320"/>
+          </a:xfrm>
+          <a:prstGeom prst="rect">
+            <a:avLst/>
+          </a:prstGeom>
+          <a:noFill/>
+          <a:ln/>
+        </p:spPr>
+        <p:txBody>
+          <a:bodyPr wrap="square" lIns="0" tIns="0" rIns="0" bIns="0" rtlCol="0" anchor="ctr"/>
+          <a:lstStyle/>
+          <a:p>
+            <a:pPr indent="0" marL="0">
+              <a:buNone/>
+            </a:pPr>
+            <a:r>
+              <a:rPr lang="en-US" sz="1300" b="1" dirty="0">
+                <a:solidFill>
+                  <a:srgbClr val="1F3B57"/>
+                </a:solidFill>
+                <a:latin typeface="Arial" pitchFamily="34" charset="0"/>
+                <a:ea typeface="Arial" pitchFamily="34" charset="-122"/>
+                <a:cs typeface="Arial" pitchFamily="34" charset="-120"/>
+              </a:rPr>
+              <a:t>실현 성능이 아직 오라클 상한에 크게 못 미친다</a:t>
+            </a:r>
+            <a:endParaRPr lang="en-US" sz="1300" dirty="0"/>
+          </a:p>
+        </p:txBody>
+      </p:sp>
+      <p:sp>
+        <p:nvSpPr>
+          <p:cNvPr id="14" name="Text 12"/>
+          <p:cNvSpPr/>
+          <p:nvPr/>
+        </p:nvSpPr>
+        <p:spPr>
+          <a:xfrm>
+            <a:off x="1316736" y="3291840"/>
+            <a:ext cx="10149840" cy="548640"/>
+          </a:xfrm>
+          <a:prstGeom prst="rect">
+            <a:avLst/>
+          </a:prstGeom>
+          <a:noFill/>
+          <a:ln/>
+        </p:spPr>
+        <p:txBody>
+          <a:bodyPr wrap="square" lIns="0" tIns="0" rIns="0" bIns="0" rtlCol="0" anchor="ctr"/>
+          <a:lstStyle/>
+          <a:p>
+            <a:pPr indent="0" marL="0">
+              <a:lnSpc>
+                <a:spcPct val="115000"/>
+              </a:lnSpc>
+              <a:buNone/>
+            </a:pPr>
+            <a:r>
+              <a:rPr lang="en-US" sz="1100" dirty="0">
+                <a:solidFill>
+                  <a:srgbClr val="1F3B57"/>
+                </a:solidFill>
+                <a:latin typeface="Arial" pitchFamily="34" charset="0"/>
+                <a:ea typeface="Arial" pitchFamily="34" charset="-122"/>
+                <a:cs typeface="Arial" pitchFamily="34" charset="-120"/>
+              </a:rPr>
+              <a:t>N=3에서 오라클 0.904 vs 실현 0.703. 손상의 절반만 회수합니다.</a:t>
+            </a:r>
+            <a:endParaRPr lang="en-US" sz="1100" dirty="0"/>
+          </a:p>
+          <a:p>
+            <a:pPr indent="0" marL="0">
+              <a:lnSpc>
+                <a:spcPct val="115000"/>
+              </a:lnSpc>
+              <a:buNone/>
+            </a:pPr>
+            <a:r>
+              <a:rPr lang="en-US" sz="1100" dirty="0">
+                <a:solidFill>
+                  <a:srgbClr val="1F3B57"/>
+                </a:solidFill>
+                <a:latin typeface="Arial" pitchFamily="34" charset="0"/>
+                <a:ea typeface="Arial" pitchFamily="34" charset="-122"/>
+                <a:cs typeface="Arial" pitchFamily="34" charset="-120"/>
+              </a:rPr>
+              <a:t>그리고 forward N+1회라 효율 이득이 없습니다.</a:t>
+            </a:r>
+            <a:endParaRPr lang="en-US" sz="1100" dirty="0"/>
+          </a:p>
+        </p:txBody>
+      </p:sp>
+      <p:sp>
+        <p:nvSpPr>
+          <p:cNvPr id="15" name="Text 13"/>
+          <p:cNvSpPr/>
+          <p:nvPr/>
+        </p:nvSpPr>
+        <p:spPr>
+          <a:xfrm>
+            <a:off x="1316736" y="3877056"/>
+            <a:ext cx="10149840" cy="274320"/>
+          </a:xfrm>
+          <a:prstGeom prst="rect">
+            <a:avLst/>
+          </a:prstGeom>
+          <a:noFill/>
+          <a:ln/>
+        </p:spPr>
+        <p:txBody>
+          <a:bodyPr wrap="square" lIns="0" tIns="0" rIns="0" bIns="0" rtlCol="0" anchor="ctr"/>
+          <a:lstStyle/>
+          <a:p>
+            <a:pPr indent="0" marL="0">
+              <a:buNone/>
+            </a:pPr>
+            <a:r>
+              <a:rPr lang="en-US" sz="1100" b="1" dirty="0">
+                <a:solidFill>
+                  <a:srgbClr val="2E8B57"/>
+                </a:solidFill>
+                <a:latin typeface="Arial" pitchFamily="34" charset="0"/>
+                <a:ea typeface="Arial" pitchFamily="34" charset="-122"/>
+                <a:cs typeface="Arial" pitchFamily="34" charset="-120"/>
+              </a:rPr>
+              <a:t>대응: λ 스윕 측정 완료 — λ=4에서 손상의 74% 회수. 컨트롤러 신호 개선이 다음</a:t>
+            </a:r>
+            <a:endParaRPr lang="en-US" sz="1100" dirty="0"/>
+          </a:p>
+        </p:txBody>
+      </p:sp>
+      <p:sp>
+        <p:nvSpPr>
+          <p:cNvPr id="16" name="Shape 14"/>
+          <p:cNvSpPr/>
+          <p:nvPr/>
+        </p:nvSpPr>
+        <p:spPr>
+          <a:xfrm>
+            <a:off x="502920" y="4370832"/>
+            <a:ext cx="11201400" cy="1408176"/>
+          </a:xfrm>
+          <a:prstGeom prst="roundRect">
+            <a:avLst>
+              <a:gd name="adj" fmla="val 5195"/>
+            </a:avLst>
+          </a:prstGeom>
+          <a:solidFill>
+            <a:srgbClr val="FBEAEA"/>
+          </a:solidFill>
+          <a:ln w="12700">
+            <a:solidFill>
+              <a:srgbClr val="D62728"/>
+            </a:solidFill>
+            <a:prstDash val="solid"/>
+          </a:ln>
+        </p:spPr>
+      </p:sp>
+      <p:sp>
+        <p:nvSpPr>
+          <p:cNvPr id="17" name="Shape 15"/>
+          <p:cNvSpPr/>
+          <p:nvPr/>
+        </p:nvSpPr>
+        <p:spPr>
+          <a:xfrm>
+            <a:off x="749808" y="4535424"/>
+            <a:ext cx="402336" cy="402336"/>
+          </a:xfrm>
+          <a:prstGeom prst="ellipse">
+            <a:avLst/>
+          </a:prstGeom>
+          <a:solidFill>
+            <a:srgbClr val="D62728"/>
+          </a:solidFill>
+          <a:ln/>
+        </p:spPr>
+      </p:sp>
+      <p:sp>
+        <p:nvSpPr>
+          <p:cNvPr id="18" name="Text 16"/>
+          <p:cNvSpPr/>
+          <p:nvPr/>
+        </p:nvSpPr>
+        <p:spPr>
+          <a:xfrm>
+            <a:off x="749808" y="4535424"/>
+            <a:ext cx="402336" cy="402336"/>
+          </a:xfrm>
+          <a:prstGeom prst="rect">
+            <a:avLst/>
+          </a:prstGeom>
+          <a:noFill/>
+          <a:ln/>
+        </p:spPr>
+        <p:txBody>
+          <a:bodyPr wrap="square" lIns="0" tIns="0" rIns="0" bIns="0" rtlCol="0" anchor="ctr"/>
+          <a:lstStyle/>
+          <a:p>
+            <a:pPr algn="ctr" indent="0" marL="0">
+              <a:buNone/>
+            </a:pPr>
+            <a:r>
+              <a:rPr lang="en-US" sz="1300" b="1" dirty="0">
+                <a:solidFill>
+                  <a:srgbClr val="FFFFFF"/>
+                </a:solidFill>
+                <a:latin typeface="Arial" pitchFamily="34" charset="0"/>
+                <a:ea typeface="Arial" pitchFamily="34" charset="-122"/>
+                <a:cs typeface="Arial" pitchFamily="34" charset="-120"/>
+              </a:rPr>
+              <a:t>3</a:t>
+            </a:r>
+            <a:endParaRPr lang="en-US" sz="1300" dirty="0"/>
+          </a:p>
+        </p:txBody>
+      </p:sp>
+      <p:sp>
+        <p:nvSpPr>
+          <p:cNvPr id="19" name="Text 17"/>
+          <p:cNvSpPr/>
+          <p:nvPr/>
+        </p:nvSpPr>
+        <p:spPr>
+          <a:xfrm>
+            <a:off x="1316736" y="4517136"/>
+            <a:ext cx="10149840" cy="274320"/>
+          </a:xfrm>
+          <a:prstGeom prst="rect">
+            <a:avLst/>
+          </a:prstGeom>
+          <a:noFill/>
+          <a:ln/>
+        </p:spPr>
+        <p:txBody>
+          <a:bodyPr wrap="square" lIns="0" tIns="0" rIns="0" bIns="0" rtlCol="0" anchor="ctr"/>
+          <a:lstStyle/>
+          <a:p>
+            <a:pPr indent="0" marL="0">
+              <a:buNone/>
+            </a:pPr>
+            <a:r>
+              <a:rPr lang="en-US" sz="1300" b="1" dirty="0">
+                <a:solidFill>
+                  <a:srgbClr val="1F3B57"/>
+                </a:solidFill>
+                <a:latin typeface="Arial" pitchFamily="34" charset="0"/>
+                <a:ea typeface="Arial" pitchFamily="34" charset="-122"/>
+                <a:cs typeface="Arial" pitchFamily="34" charset="-120"/>
+              </a:rPr>
+              <a:t>표준 벤치마크에서 아직 보이지 않았다</a:t>
+            </a:r>
+            <a:endParaRPr lang="en-US" sz="1300" dirty="0"/>
+          </a:p>
+        </p:txBody>
+      </p:sp>
+      <p:sp>
+        <p:nvSpPr>
+          <p:cNvPr id="20" name="Text 18"/>
+          <p:cNvSpPr/>
+          <p:nvPr/>
+        </p:nvSpPr>
+        <p:spPr>
+          <a:xfrm>
+            <a:off x="1316736" y="4828032"/>
+            <a:ext cx="10149840" cy="548640"/>
+          </a:xfrm>
+          <a:prstGeom prst="rect">
+            <a:avLst/>
+          </a:prstGeom>
+          <a:noFill/>
+          <a:ln/>
+        </p:spPr>
+        <p:txBody>
+          <a:bodyPr wrap="square" lIns="0" tIns="0" rIns="0" bIns="0" rtlCol="0" anchor="ctr"/>
+          <a:lstStyle/>
+          <a:p>
+            <a:pPr indent="0" marL="0">
+              <a:lnSpc>
+                <a:spcPct val="115000"/>
+              </a:lnSpc>
+              <a:buNone/>
+            </a:pPr>
+            <a:r>
+              <a:rPr lang="en-US" sz="1100" dirty="0">
+                <a:solidFill>
+                  <a:srgbClr val="1F3B57"/>
+                </a:solidFill>
+                <a:latin typeface="Arial" pitchFamily="34" charset="0"/>
+                <a:ea typeface="Arial" pitchFamily="34" charset="-122"/>
+                <a:cs typeface="Arial" pitchFamily="34" charset="-120"/>
+              </a:rPr>
+              <a:t>CAPL은 "추론시 attention 수정만으로는 일시적 개선"이라고 선점 반론을 폈습니다.</a:t>
+            </a:r>
+            <a:endParaRPr lang="en-US" sz="1100" dirty="0"/>
+          </a:p>
+          <a:p>
+            <a:pPr indent="0" marL="0">
+              <a:lnSpc>
+                <a:spcPct val="115000"/>
+              </a:lnSpc>
+              <a:buNone/>
+            </a:pPr>
+            <a:r>
+              <a:rPr lang="en-US" sz="1100" dirty="0">
+                <a:solidFill>
+                  <a:srgbClr val="1F3B57"/>
+                </a:solidFill>
+                <a:latin typeface="Arial" pitchFamily="34" charset="0"/>
+                <a:ea typeface="Arial" pitchFamily="34" charset="-122"/>
+                <a:cs typeface="Arial" pitchFamily="34" charset="-120"/>
+              </a:rPr>
+              <a:t>BLINK·MUIRBench 같은 공개 벤치에서 재현해야 이 반론을 막습니다.</a:t>
+            </a:r>
+            <a:endParaRPr lang="en-US" sz="1100" dirty="0"/>
+          </a:p>
+        </p:txBody>
+      </p:sp>
+      <p:sp>
+        <p:nvSpPr>
+          <p:cNvPr id="21" name="Text 19"/>
+          <p:cNvSpPr/>
+          <p:nvPr/>
+        </p:nvSpPr>
+        <p:spPr>
+          <a:xfrm>
+            <a:off x="1316736" y="5413248"/>
+            <a:ext cx="10149840" cy="274320"/>
+          </a:xfrm>
+          <a:prstGeom prst="rect">
+            <a:avLst/>
+          </a:prstGeom>
+          <a:noFill/>
+          <a:ln/>
+        </p:spPr>
+        <p:txBody>
+          <a:bodyPr wrap="square" lIns="0" tIns="0" rIns="0" bIns="0" rtlCol="0" anchor="ctr"/>
+          <a:lstStyle/>
+          <a:p>
+            <a:pPr indent="0" marL="0">
+              <a:buNone/>
+            </a:pPr>
+            <a:r>
+              <a:rPr lang="en-US" sz="1100" b="1" dirty="0">
+                <a:solidFill>
+                  <a:srgbClr val="2E8B57"/>
+                </a:solidFill>
+                <a:latin typeface="Arial" pitchFamily="34" charset="0"/>
+                <a:ea typeface="Arial" pitchFamily="34" charset="-122"/>
+                <a:cs typeface="Arial" pitchFamily="34" charset="-120"/>
+              </a:rPr>
+              <a:t>대응: 다음 단계 1순위</a:t>
+            </a:r>
+            <a:endParaRPr lang="en-US" sz="1100" dirty="0"/>
+          </a:p>
+        </p:txBody>
+      </p:sp>
+      <p:sp>
+        <p:nvSpPr>
+          <p:cNvPr id="22" name="Shape 20"/>
+          <p:cNvSpPr/>
+          <p:nvPr/>
+        </p:nvSpPr>
+        <p:spPr>
+          <a:xfrm>
+            <a:off x="502920" y="6053328"/>
+            <a:ext cx="11201400" cy="548640"/>
+          </a:xfrm>
+          <a:prstGeom prst="roundRect">
+            <a:avLst>
+              <a:gd name="adj" fmla="val 13333"/>
+            </a:avLst>
+          </a:prstGeom>
+          <a:solidFill>
+            <a:srgbClr val="1F3B57"/>
+          </a:solidFill>
+          <a:ln/>
+        </p:spPr>
+      </p:sp>
+      <p:sp>
+        <p:nvSpPr>
+          <p:cNvPr id="23" name="Text 21"/>
+          <p:cNvSpPr/>
+          <p:nvPr/>
+        </p:nvSpPr>
+        <p:spPr>
+          <a:xfrm>
+            <a:off x="777240" y="6053328"/>
+            <a:ext cx="10744200" cy="548640"/>
+          </a:xfrm>
+          <a:prstGeom prst="rect">
+            <a:avLst/>
+          </a:prstGeom>
+          <a:noFill/>
+          <a:ln/>
+        </p:spPr>
+        <p:txBody>
+          <a:bodyPr wrap="square" lIns="0" tIns="0" rIns="0" bIns="0" rtlCol="0" anchor="ctr"/>
+          <a:lstStyle/>
+          <a:p>
+            <a:pPr indent="0" marL="0">
+              <a:buNone/>
+            </a:pPr>
+            <a:r>
+              <a:rPr lang="en-US" sz="1250" b="1" dirty="0">
+                <a:solidFill>
+                  <a:srgbClr val="FFFFFF"/>
+                </a:solidFill>
+                <a:latin typeface="Arial" pitchFamily="34" charset="0"/>
+                <a:ea typeface="Arial" pitchFamily="34" charset="-122"/>
+                <a:cs typeface="Arial" pitchFamily="34" charset="-120"/>
+              </a:rPr>
+              <a:t>→ 셋 다 알고 있고, 셋 다 측정으로 답할 수 있습니다</a:t>
+            </a:r>
+            <a:endParaRPr lang="en-US" sz="1250" dirty="0"/>
+          </a:p>
+        </p:txBody>
+      </p:sp>
+    </p:spTree>
+  </p:cSld>
+  <p:clrMapOvr>
+    <a:masterClrMapping/>
+  </p:clrMapOvr>
+</p:sld>
+</file>
+
+<file path=ppt/slides/slide11.xml><?xml version="1.0" encoding="utf-8"?>
+<p:sld xmlns:a="http://schemas.openxmlformats.org/drawingml/2006/main" xmlns:r="http://schemas.openxmlformats.org/officeDocument/2006/relationships" xmlns:p="http://schemas.openxmlformats.org/presentationml/2006/main">
+  <p:cSld name="Slide 11">
     <p:bg>
       <p:bgPr>
         <a:solidFill>
@@ -3394,7 +4325,7 @@
                 <a:ea typeface="Arial" pitchFamily="34" charset="-122"/>
                 <a:cs typeface="Arial" pitchFamily="34" charset="-120"/>
               </a:rPr>
-              <a:t>자원: GPU 1장 · 기존 코드·데이터 전부 재사용 · 지금까지 사전 등록 4건, 그중 2건은 실패로 기록했습니다</a:t>
+              <a:t>자원: GPU 1장 · 기존 코드·데이터 전부 재사용  ·  지금까지 사전 등록 5건, 그중 주 종점 실패 3건을 그대로 기록했습니다</a:t>
             </a:r>
             <a:endParaRPr lang="en-US" sz="1250" dirty="0"/>
           </a:p>
@@ -3411,6 +4342,1514 @@
 <file path=ppt/slides/slide2.xml><?xml version="1.0" encoding="utf-8"?>
 <p:sld xmlns:a="http://schemas.openxmlformats.org/drawingml/2006/main" xmlns:r="http://schemas.openxmlformats.org/officeDocument/2006/relationships" xmlns:p="http://schemas.openxmlformats.org/presentationml/2006/main">
   <p:cSld name="Slide 2">
+    <p:spTree>
+      <p:nvGrpSpPr>
+        <p:cNvPr id="1" name=""/>
+        <p:cNvGrpSpPr/>
+        <p:nvPr/>
+      </p:nvGrpSpPr>
+      <p:grpSpPr>
+        <a:xfrm>
+          <a:off x="0" y="0"/>
+          <a:ext cx="0" cy="0"/>
+          <a:chOff x="0" y="0"/>
+          <a:chExt cx="0" cy="0"/>
+        </a:xfrm>
+      </p:grpSpPr>
+      <p:sp>
+        <p:nvSpPr>
+          <p:cNvPr id="2" name="Text 0"/>
+          <p:cNvSpPr/>
+          <p:nvPr/>
+        </p:nvSpPr>
+        <p:spPr>
+          <a:xfrm>
+            <a:off x="502920" y="237744"/>
+            <a:ext cx="10515600" cy="274320"/>
+          </a:xfrm>
+          <a:prstGeom prst="rect">
+            <a:avLst/>
+          </a:prstGeom>
+          <a:noFill/>
+          <a:ln/>
+        </p:spPr>
+        <p:txBody>
+          <a:bodyPr wrap="square" lIns="0" tIns="0" rIns="0" bIns="0" rtlCol="0" anchor="ctr"/>
+          <a:lstStyle/>
+          <a:p>
+            <a:pPr indent="0" marL="0">
+              <a:buNone/>
+            </a:pPr>
+            <a:r>
+              <a:rPr lang="en-US" sz="1100" b="1" dirty="0">
+                <a:solidFill>
+                  <a:srgbClr val="1F77B4"/>
+                </a:solidFill>
+                <a:latin typeface="Arial" pitchFamily="34" charset="0"/>
+                <a:ea typeface="Arial" pitchFamily="34" charset="-122"/>
+                <a:cs typeface="Arial" pitchFamily="34" charset="-120"/>
+              </a:rPr>
+              <a:t>이 연구를 계속할 가치가 있는가</a:t>
+            </a:r>
+            <a:endParaRPr lang="en-US" sz="1100" dirty="0"/>
+          </a:p>
+        </p:txBody>
+      </p:sp>
+      <p:sp>
+        <p:nvSpPr>
+          <p:cNvPr id="3" name="Text 1"/>
+          <p:cNvSpPr/>
+          <p:nvPr/>
+        </p:nvSpPr>
+        <p:spPr>
+          <a:xfrm>
+            <a:off x="502920" y="493776"/>
+            <a:ext cx="11155680" cy="658368"/>
+          </a:xfrm>
+          <a:prstGeom prst="rect">
+            <a:avLst/>
+          </a:prstGeom>
+          <a:noFill/>
+          <a:ln/>
+        </p:spPr>
+        <p:txBody>
+          <a:bodyPr wrap="square" lIns="0" tIns="0" rIns="0" bIns="0" rtlCol="0" anchor="ctr"/>
+          <a:lstStyle/>
+          <a:p>
+            <a:pPr indent="0" marL="0">
+              <a:buNone/>
+            </a:pPr>
+            <a:r>
+              <a:rPr lang="en-US" sz="2100" b="1" dirty="0">
+                <a:solidFill>
+                  <a:srgbClr val="1F3B57"/>
+                </a:solidFill>
+                <a:latin typeface="Arial" pitchFamily="34" charset="0"/>
+                <a:ea typeface="Arial" pitchFamily="34" charset="-122"/>
+                <a:cs typeface="Arial" pitchFamily="34" charset="-120"/>
+              </a:rPr>
+              <a:t>기존 연구가 정반대 처방을 내놓은 지점 — 그 모순을 우리가 풀었습니다</a:t>
+            </a:r>
+            <a:endParaRPr lang="en-US" sz="2100" dirty="0"/>
+          </a:p>
+        </p:txBody>
+      </p:sp>
+      <p:sp>
+        <p:nvSpPr>
+          <p:cNvPr id="4" name="Shape 2"/>
+          <p:cNvSpPr/>
+          <p:nvPr/>
+        </p:nvSpPr>
+        <p:spPr>
+          <a:xfrm>
+            <a:off x="502920" y="1207008"/>
+            <a:ext cx="11201400" cy="932688"/>
+          </a:xfrm>
+          <a:prstGeom prst="roundRect">
+            <a:avLst>
+              <a:gd name="adj" fmla="val 7843"/>
+            </a:avLst>
+          </a:prstGeom>
+          <a:solidFill>
+            <a:srgbClr val="1F3B57"/>
+          </a:solidFill>
+          <a:ln/>
+        </p:spPr>
+      </p:sp>
+      <p:sp>
+        <p:nvSpPr>
+          <p:cNvPr id="5" name="Text 3"/>
+          <p:cNvSpPr/>
+          <p:nvPr/>
+        </p:nvSpPr>
+        <p:spPr>
+          <a:xfrm>
+            <a:off x="822960" y="1298448"/>
+            <a:ext cx="10607040" cy="777240"/>
+          </a:xfrm>
+          <a:prstGeom prst="rect">
+            <a:avLst/>
+          </a:prstGeom>
+          <a:noFill/>
+          <a:ln/>
+        </p:spPr>
+        <p:txBody>
+          <a:bodyPr wrap="square" lIns="0" tIns="0" rIns="0" bIns="0" rtlCol="0" anchor="ctr"/>
+          <a:lstStyle/>
+          <a:p>
+            <a:pPr indent="0" marL="0">
+              <a:spcAft>
+                <a:spcPts val="200"/>
+              </a:spcAft>
+              <a:buNone/>
+            </a:pPr>
+            <a:r>
+              <a:rPr lang="en-US" sz="1100" b="1" dirty="0">
+                <a:solidFill>
+                  <a:srgbClr val="9FB8CE"/>
+                </a:solidFill>
+                <a:latin typeface="Arial" pitchFamily="34" charset="0"/>
+                <a:ea typeface="Arial" pitchFamily="34" charset="-122"/>
+                <a:cs typeface="Arial" pitchFamily="34" charset="-120"/>
+              </a:rPr>
+              <a:t>연구 질문   </a:t>
+            </a:r>
+            <a:pPr indent="0" marL="0">
+              <a:spcAft>
+                <a:spcPts val="200"/>
+              </a:spcAft>
+              <a:buNone/>
+            </a:pPr>
+            <a:r>
+              <a:rPr lang="en-US" sz="1400" b="1" dirty="0">
+                <a:solidFill>
+                  <a:srgbClr val="FFFFFF"/>
+                </a:solidFill>
+                <a:latin typeface="Arial" pitchFamily="34" charset="0"/>
+                <a:ea typeface="Arial" pitchFamily="34" charset="-122"/>
+                <a:cs typeface="Arial" pitchFamily="34" charset="-120"/>
+              </a:rPr>
+              <a:t>멀티이미지 입력에서 무관한 이미지가 모델을 망칠 때,</a:t>
+            </a:r>
+            <a:endParaRPr lang="en-US" sz="1100" dirty="0"/>
+          </a:p>
+          <a:p>
+            <a:pPr indent="0" marL="0">
+              <a:spcAft>
+                <a:spcPts val="200"/>
+              </a:spcAft>
+              <a:buNone/>
+            </a:pPr>
+            <a:r>
+              <a:rPr lang="en-US" sz="1400" b="1" dirty="0">
+                <a:solidFill>
+                  <a:srgbClr val="FFFFFF"/>
+                </a:solidFill>
+                <a:latin typeface="Arial" pitchFamily="34" charset="0"/>
+                <a:ea typeface="Arial" pitchFamily="34" charset="-122"/>
+                <a:cs typeface="Arial" pitchFamily="34" charset="-120"/>
+              </a:rPr>
+              <a:t>그 해악은 어느 attention 경로로 흐르며, 어디를 끊어야 회복되는가?</a:t>
+            </a:r>
+            <a:endParaRPr lang="en-US" sz="1100" dirty="0"/>
+          </a:p>
+        </p:txBody>
+      </p:sp>
+      <p:sp>
+        <p:nvSpPr>
+          <p:cNvPr id="6" name="Shape 4"/>
+          <p:cNvSpPr/>
+          <p:nvPr/>
+        </p:nvSpPr>
+        <p:spPr>
+          <a:xfrm>
+            <a:off x="502920" y="2286000"/>
+            <a:ext cx="5532120" cy="1481328"/>
+          </a:xfrm>
+          <a:prstGeom prst="roundRect">
+            <a:avLst>
+              <a:gd name="adj" fmla="val 4938"/>
+            </a:avLst>
+          </a:prstGeom>
+          <a:solidFill>
+            <a:srgbClr val="FBEAEA"/>
+          </a:solidFill>
+          <a:ln w="15875">
+            <a:solidFill>
+              <a:srgbClr val="D62728"/>
+            </a:solidFill>
+            <a:prstDash val="solid"/>
+          </a:ln>
+        </p:spPr>
+      </p:sp>
+      <p:sp>
+        <p:nvSpPr>
+          <p:cNvPr id="7" name="Text 5"/>
+          <p:cNvSpPr/>
+          <p:nvPr/>
+        </p:nvSpPr>
+        <p:spPr>
+          <a:xfrm>
+            <a:off x="713232" y="2395728"/>
+            <a:ext cx="5120640" cy="256032"/>
+          </a:xfrm>
+          <a:prstGeom prst="rect">
+            <a:avLst/>
+          </a:prstGeom>
+          <a:noFill/>
+          <a:ln/>
+        </p:spPr>
+        <p:txBody>
+          <a:bodyPr wrap="square" lIns="0" tIns="0" rIns="0" bIns="0" rtlCol="0" anchor="ctr"/>
+          <a:lstStyle/>
+          <a:p>
+            <a:pPr indent="0" marL="0">
+              <a:buNone/>
+            </a:pPr>
+            <a:r>
+              <a:rPr lang="en-US" sz="1250" b="1" dirty="0">
+                <a:solidFill>
+                  <a:srgbClr val="D62728"/>
+                </a:solidFill>
+                <a:latin typeface="Arial" pitchFamily="34" charset="0"/>
+                <a:ea typeface="Arial" pitchFamily="34" charset="-122"/>
+                <a:cs typeface="Arial" pitchFamily="34" charset="-120"/>
+              </a:rPr>
+              <a:t>문제 상황 — 문헌이 갈려 있다</a:t>
+            </a:r>
+            <a:endParaRPr lang="en-US" sz="1250" dirty="0"/>
+          </a:p>
+        </p:txBody>
+      </p:sp>
+      <p:sp>
+        <p:nvSpPr>
+          <p:cNvPr id="8" name="Text 6"/>
+          <p:cNvSpPr/>
+          <p:nvPr/>
+        </p:nvSpPr>
+        <p:spPr>
+          <a:xfrm>
+            <a:off x="713232" y="2688336"/>
+            <a:ext cx="5120640" cy="1005840"/>
+          </a:xfrm>
+          <a:prstGeom prst="rect">
+            <a:avLst/>
+          </a:prstGeom>
+          <a:noFill/>
+          <a:ln/>
+        </p:spPr>
+        <p:txBody>
+          <a:bodyPr wrap="square" lIns="0" tIns="0" rIns="0" bIns="0" rtlCol="0" anchor="ctr"/>
+          <a:lstStyle/>
+          <a:p>
+            <a:pPr indent="0" marL="0">
+              <a:lnSpc>
+                <a:spcPct val="115000"/>
+              </a:lnSpc>
+              <a:buNone/>
+            </a:pPr>
+            <a:r>
+              <a:rPr lang="en-US" sz="1050" dirty="0">
+                <a:solidFill>
+                  <a:srgbClr val="1F3B57"/>
+                </a:solidFill>
+                <a:latin typeface="Arial" pitchFamily="34" charset="0"/>
+                <a:ea typeface="Arial" pitchFamily="34" charset="-122"/>
+                <a:cs typeface="Arial" pitchFamily="34" charset="-120"/>
+              </a:rPr>
+              <a:t>CAPL · SoFA :  "cross-image 정보가 부족하다" → attention을 연다</a:t>
+            </a:r>
+            <a:endParaRPr lang="en-US" sz="1050" dirty="0"/>
+          </a:p>
+          <a:p>
+            <a:pPr indent="0" marL="0">
+              <a:lnSpc>
+                <a:spcPct val="115000"/>
+              </a:lnSpc>
+              <a:buNone/>
+            </a:pPr>
+            <a:r>
+              <a:rPr lang="en-US" sz="1050" dirty="0">
+                <a:solidFill>
+                  <a:srgbClr val="1F3B57"/>
+                </a:solidFill>
+                <a:latin typeface="Arial" pitchFamily="34" charset="0"/>
+                <a:ea typeface="Arial" pitchFamily="34" charset="-122"/>
+                <a:cs typeface="Arial" pitchFamily="34" charset="-120"/>
+              </a:rPr>
+              <a:t>MIMIC :  "cross-image가 오염시킨다" → 균일하게 막는다</a:t>
+            </a:r>
+            <a:endParaRPr lang="en-US" sz="1050" dirty="0"/>
+          </a:p>
+          <a:p>
+            <a:pPr indent="0" marL="0">
+              <a:lnSpc>
+                <a:spcPct val="115000"/>
+              </a:lnSpc>
+              <a:buNone/>
+            </a:pPr>
+            <a:endParaRPr lang="en-US" sz="1050" dirty="0"/>
+          </a:p>
+          <a:p>
+            <a:pPr indent="0" marL="0">
+              <a:lnSpc>
+                <a:spcPct val="115000"/>
+              </a:lnSpc>
+              <a:buNone/>
+            </a:pPr>
+            <a:r>
+              <a:rPr lang="en-US" sz="1050" dirty="0">
+                <a:solidFill>
+                  <a:srgbClr val="1F3B57"/>
+                </a:solidFill>
+                <a:latin typeface="Arial" pitchFamily="34" charset="0"/>
+                <a:ea typeface="Arial" pitchFamily="34" charset="-122"/>
+                <a:cs typeface="Arial" pitchFamily="34" charset="-120"/>
+              </a:rPr>
+              <a:t>정반대 처방인데 양쪽 다 개선을 보고합니다. 아무도 이유를 설명하지 못했습니다.</a:t>
+            </a:r>
+            <a:endParaRPr lang="en-US" sz="1050" dirty="0"/>
+          </a:p>
+        </p:txBody>
+      </p:sp>
+      <p:sp>
+        <p:nvSpPr>
+          <p:cNvPr id="9" name="Shape 7"/>
+          <p:cNvSpPr/>
+          <p:nvPr/>
+        </p:nvSpPr>
+        <p:spPr>
+          <a:xfrm>
+            <a:off x="6199632" y="2286000"/>
+            <a:ext cx="5504688" cy="1481328"/>
+          </a:xfrm>
+          <a:prstGeom prst="roundRect">
+            <a:avLst>
+              <a:gd name="adj" fmla="val 4938"/>
+            </a:avLst>
+          </a:prstGeom>
+          <a:solidFill>
+            <a:srgbClr val="E9F4EE"/>
+          </a:solidFill>
+          <a:ln w="15875">
+            <a:solidFill>
+              <a:srgbClr val="2E8B57"/>
+            </a:solidFill>
+            <a:prstDash val="solid"/>
+          </a:ln>
+        </p:spPr>
+      </p:sp>
+      <p:sp>
+        <p:nvSpPr>
+          <p:cNvPr id="10" name="Text 8"/>
+          <p:cNvSpPr/>
+          <p:nvPr/>
+        </p:nvSpPr>
+        <p:spPr>
+          <a:xfrm>
+            <a:off x="6409944" y="2395728"/>
+            <a:ext cx="5120640" cy="256032"/>
+          </a:xfrm>
+          <a:prstGeom prst="rect">
+            <a:avLst/>
+          </a:prstGeom>
+          <a:noFill/>
+          <a:ln/>
+        </p:spPr>
+        <p:txBody>
+          <a:bodyPr wrap="square" lIns="0" tIns="0" rIns="0" bIns="0" rtlCol="0" anchor="ctr"/>
+          <a:lstStyle/>
+          <a:p>
+            <a:pPr indent="0" marL="0">
+              <a:buNone/>
+            </a:pPr>
+            <a:r>
+              <a:rPr lang="en-US" sz="1250" b="1" dirty="0">
+                <a:solidFill>
+                  <a:srgbClr val="2E8B57"/>
+                </a:solidFill>
+                <a:latin typeface="Arial" pitchFamily="34" charset="0"/>
+                <a:ea typeface="Arial" pitchFamily="34" charset="-122"/>
+                <a:cs typeface="Arial" pitchFamily="34" charset="-120"/>
+              </a:rPr>
+              <a:t>우리 답 — 경로를 나누면 둘 다 맞다</a:t>
+            </a:r>
+            <a:endParaRPr lang="en-US" sz="1250" dirty="0"/>
+          </a:p>
+        </p:txBody>
+      </p:sp>
+      <p:sp>
+        <p:nvSpPr>
+          <p:cNvPr id="11" name="Text 9"/>
+          <p:cNvSpPr/>
+          <p:nvPr/>
+        </p:nvSpPr>
+        <p:spPr>
+          <a:xfrm>
+            <a:off x="6409944" y="2688336"/>
+            <a:ext cx="5120640" cy="1005840"/>
+          </a:xfrm>
+          <a:prstGeom prst="rect">
+            <a:avLst/>
+          </a:prstGeom>
+          <a:noFill/>
+          <a:ln/>
+        </p:spPr>
+        <p:txBody>
+          <a:bodyPr wrap="square" lIns="0" tIns="0" rIns="0" bIns="0" rtlCol="0" anchor="ctr"/>
+          <a:lstStyle/>
+          <a:p>
+            <a:pPr indent="0" marL="0">
+              <a:lnSpc>
+                <a:spcPct val="115000"/>
+              </a:lnSpc>
+              <a:buNone/>
+            </a:pPr>
+            <a:r>
+              <a:rPr lang="en-US" sz="1050" dirty="0">
+                <a:solidFill>
+                  <a:srgbClr val="1F3B57"/>
+                </a:solidFill>
+                <a:latin typeface="Arial" pitchFamily="34" charset="0"/>
+                <a:ea typeface="Arial" pitchFamily="34" charset="-122"/>
+                <a:cs typeface="Arial" pitchFamily="34" charset="-120"/>
+              </a:rPr>
+              <a:t>이미지 → 이미지 (혼합) :  도움이 된다. 끊으면 −0.23 ~ −0.43</a:t>
+            </a:r>
+            <a:endParaRPr lang="en-US" sz="1050" dirty="0"/>
+          </a:p>
+          <a:p>
+            <a:pPr indent="0" marL="0">
+              <a:lnSpc>
+                <a:spcPct val="115000"/>
+              </a:lnSpc>
+              <a:buNone/>
+            </a:pPr>
+            <a:r>
+              <a:rPr lang="en-US" sz="1050" dirty="0">
+                <a:solidFill>
+                  <a:srgbClr val="1F3B57"/>
+                </a:solidFill>
+                <a:latin typeface="Arial" pitchFamily="34" charset="0"/>
+                <a:ea typeface="Arial" pitchFamily="34" charset="-122"/>
+                <a:cs typeface="Arial" pitchFamily="34" charset="-120"/>
+              </a:rPr>
+              <a:t>질문 → 이미지 (읽기) :  해악이 전부 여기. 끊으면 회복</a:t>
+            </a:r>
+            <a:endParaRPr lang="en-US" sz="1050" dirty="0"/>
+          </a:p>
+          <a:p>
+            <a:pPr indent="0" marL="0">
+              <a:lnSpc>
+                <a:spcPct val="115000"/>
+              </a:lnSpc>
+              <a:buNone/>
+            </a:pPr>
+            <a:endParaRPr lang="en-US" sz="1050" dirty="0"/>
+          </a:p>
+          <a:p>
+            <a:pPr indent="0" marL="0">
+              <a:lnSpc>
+                <a:spcPct val="115000"/>
+              </a:lnSpc>
+              <a:buNone/>
+            </a:pPr>
+            <a:r>
+              <a:rPr lang="en-US" sz="1050" dirty="0">
+                <a:solidFill>
+                  <a:srgbClr val="1F3B57"/>
+                </a:solidFill>
+                <a:latin typeface="Arial" pitchFamily="34" charset="0"/>
+                <a:ea typeface="Arial" pitchFamily="34" charset="-122"/>
+                <a:cs typeface="Arial" pitchFamily="34" charset="-120"/>
+              </a:rPr>
+              <a:t>→ 최적 개입은 '제거'도 '개방'도 아닌 제3의 처방입니다</a:t>
+            </a:r>
+            <a:endParaRPr lang="en-US" sz="1050" dirty="0"/>
+          </a:p>
+        </p:txBody>
+      </p:sp>
+      <p:sp>
+        <p:nvSpPr>
+          <p:cNvPr id="12" name="Text 10"/>
+          <p:cNvSpPr/>
+          <p:nvPr/>
+        </p:nvSpPr>
+        <p:spPr>
+          <a:xfrm>
+            <a:off x="502920" y="3913632"/>
+            <a:ext cx="11201400" cy="256032"/>
+          </a:xfrm>
+          <a:prstGeom prst="rect">
+            <a:avLst/>
+          </a:prstGeom>
+          <a:noFill/>
+          <a:ln/>
+        </p:spPr>
+        <p:txBody>
+          <a:bodyPr wrap="square" lIns="0" tIns="0" rIns="0" bIns="0" rtlCol="0" anchor="ctr"/>
+          <a:lstStyle/>
+          <a:p>
+            <a:pPr indent="0" marL="0">
+              <a:buNone/>
+            </a:pPr>
+            <a:r>
+              <a:rPr lang="en-US" sz="1250" b="1" dirty="0">
+                <a:solidFill>
+                  <a:srgbClr val="1F3B57"/>
+                </a:solidFill>
+                <a:latin typeface="Arial" pitchFamily="34" charset="0"/>
+                <a:ea typeface="Arial" pitchFamily="34" charset="-122"/>
+                <a:cs typeface="Arial" pitchFamily="34" charset="-120"/>
+              </a:rPr>
+              <a:t>기여 5가지 — 전부 실측 (n=300, 사전 등록 후 실행)</a:t>
+            </a:r>
+            <a:endParaRPr lang="en-US" sz="1250" dirty="0"/>
+          </a:p>
+        </p:txBody>
+      </p:sp>
+      <p:sp>
+        <p:nvSpPr>
+          <p:cNvPr id="13" name="Shape 11"/>
+          <p:cNvSpPr/>
+          <p:nvPr/>
+        </p:nvSpPr>
+        <p:spPr>
+          <a:xfrm>
+            <a:off x="502920" y="4224528"/>
+            <a:ext cx="11201400" cy="338328"/>
+          </a:xfrm>
+          <a:prstGeom prst="roundRect">
+            <a:avLst>
+              <a:gd name="adj" fmla="val 13514"/>
+            </a:avLst>
+          </a:prstGeom>
+          <a:solidFill>
+            <a:srgbClr val="F3F4F6"/>
+          </a:solidFill>
+          <a:ln/>
+        </p:spPr>
+      </p:sp>
+      <p:sp>
+        <p:nvSpPr>
+          <p:cNvPr id="14" name="Text 12"/>
+          <p:cNvSpPr/>
+          <p:nvPr/>
+        </p:nvSpPr>
+        <p:spPr>
+          <a:xfrm>
+            <a:off x="658368" y="4224528"/>
+            <a:ext cx="457200" cy="338328"/>
+          </a:xfrm>
+          <a:prstGeom prst="rect">
+            <a:avLst/>
+          </a:prstGeom>
+          <a:noFill/>
+          <a:ln/>
+        </p:spPr>
+        <p:txBody>
+          <a:bodyPr wrap="square" lIns="0" tIns="0" rIns="0" bIns="0" rtlCol="0" anchor="ctr"/>
+          <a:lstStyle/>
+          <a:p>
+            <a:pPr indent="0" marL="0">
+              <a:buNone/>
+            </a:pPr>
+            <a:r>
+              <a:rPr lang="en-US" sz="1100" b="1" dirty="0">
+                <a:solidFill>
+                  <a:srgbClr val="1F77B4"/>
+                </a:solidFill>
+                <a:latin typeface="Arial" pitchFamily="34" charset="0"/>
+                <a:ea typeface="Arial" pitchFamily="34" charset="-122"/>
+                <a:cs typeface="Arial" pitchFamily="34" charset="-120"/>
+              </a:rPr>
+              <a:t>C1</a:t>
+            </a:r>
+            <a:endParaRPr lang="en-US" sz="1100" dirty="0"/>
+          </a:p>
+        </p:txBody>
+      </p:sp>
+      <p:sp>
+        <p:nvSpPr>
+          <p:cNvPr id="15" name="Text 13"/>
+          <p:cNvSpPr/>
+          <p:nvPr/>
+        </p:nvSpPr>
+        <p:spPr>
+          <a:xfrm>
+            <a:off x="1188720" y="4224528"/>
+            <a:ext cx="2286000" cy="338328"/>
+          </a:xfrm>
+          <a:prstGeom prst="rect">
+            <a:avLst/>
+          </a:prstGeom>
+          <a:noFill/>
+          <a:ln/>
+        </p:spPr>
+        <p:txBody>
+          <a:bodyPr wrap="square" lIns="0" tIns="0" rIns="0" bIns="0" rtlCol="0" anchor="ctr"/>
+          <a:lstStyle/>
+          <a:p>
+            <a:pPr indent="0" marL="0">
+              <a:buNone/>
+            </a:pPr>
+            <a:r>
+              <a:rPr lang="en-US" sz="1100" b="1" dirty="0">
+                <a:solidFill>
+                  <a:srgbClr val="1F3B57"/>
+                </a:solidFill>
+                <a:latin typeface="Arial" pitchFamily="34" charset="0"/>
+                <a:ea typeface="Arial" pitchFamily="34" charset="-122"/>
+                <a:cs typeface="Arial" pitchFamily="34" charset="-120"/>
+              </a:rPr>
+              <a:t>경로 분해</a:t>
+            </a:r>
+            <a:endParaRPr lang="en-US" sz="1100" dirty="0"/>
+          </a:p>
+        </p:txBody>
+      </p:sp>
+      <p:sp>
+        <p:nvSpPr>
+          <p:cNvPr id="16" name="Text 14"/>
+          <p:cNvSpPr/>
+          <p:nvPr/>
+        </p:nvSpPr>
+        <p:spPr>
+          <a:xfrm>
+            <a:off x="3566160" y="4224528"/>
+            <a:ext cx="3931920" cy="338328"/>
+          </a:xfrm>
+          <a:prstGeom prst="rect">
+            <a:avLst/>
+          </a:prstGeom>
+          <a:noFill/>
+          <a:ln/>
+        </p:spPr>
+        <p:txBody>
+          <a:bodyPr wrap="square" lIns="0" tIns="0" rIns="0" bIns="0" rtlCol="0" anchor="ctr"/>
+          <a:lstStyle/>
+          <a:p>
+            <a:pPr indent="0" marL="0">
+              <a:buNone/>
+            </a:pPr>
+            <a:r>
+              <a:rPr lang="en-US" sz="1050" dirty="0">
+                <a:solidFill>
+                  <a:srgbClr val="1F3B57"/>
+                </a:solidFill>
+                <a:latin typeface="Arial" pitchFamily="34" charset="0"/>
+                <a:ea typeface="Arial" pitchFamily="34" charset="-122"/>
+                <a:cs typeface="Arial" pitchFamily="34" charset="-120"/>
+              </a:rPr>
+              <a:t>해악은 읽기 경로에만. 혼합은 보호막</a:t>
+            </a:r>
+            <a:endParaRPr lang="en-US" sz="1050" dirty="0"/>
+          </a:p>
+        </p:txBody>
+      </p:sp>
+      <p:sp>
+        <p:nvSpPr>
+          <p:cNvPr id="17" name="Text 15"/>
+          <p:cNvSpPr/>
+          <p:nvPr/>
+        </p:nvSpPr>
+        <p:spPr>
+          <a:xfrm>
+            <a:off x="7589520" y="4224528"/>
+            <a:ext cx="4023360" cy="338328"/>
+          </a:xfrm>
+          <a:prstGeom prst="rect">
+            <a:avLst/>
+          </a:prstGeom>
+          <a:noFill/>
+          <a:ln/>
+        </p:spPr>
+        <p:txBody>
+          <a:bodyPr wrap="square" lIns="0" tIns="0" rIns="0" bIns="0" rtlCol="0" anchor="ctr"/>
+          <a:lstStyle/>
+          <a:p>
+            <a:pPr indent="0" marL="0">
+              <a:buNone/>
+            </a:pPr>
+            <a:r>
+              <a:rPr lang="en-US" sz="1000" dirty="0">
+                <a:solidFill>
+                  <a:srgbClr val="6B7280"/>
+                </a:solidFill>
+                <a:latin typeface="Arial" pitchFamily="34" charset="0"/>
+                <a:ea typeface="Arial" pitchFamily="34" charset="-122"/>
+                <a:cs typeface="Arial" pitchFamily="34" charset="-120"/>
+              </a:rPr>
+              <a:t>2배치 × 2모델 = 4조건 전부 일관</a:t>
+            </a:r>
+            <a:endParaRPr lang="en-US" sz="1000" dirty="0"/>
+          </a:p>
+        </p:txBody>
+      </p:sp>
+      <p:sp>
+        <p:nvSpPr>
+          <p:cNvPr id="18" name="Shape 16"/>
+          <p:cNvSpPr/>
+          <p:nvPr/>
+        </p:nvSpPr>
+        <p:spPr>
+          <a:xfrm>
+            <a:off x="502920" y="4599432"/>
+            <a:ext cx="11201400" cy="338328"/>
+          </a:xfrm>
+          <a:prstGeom prst="roundRect">
+            <a:avLst>
+              <a:gd name="adj" fmla="val 13514"/>
+            </a:avLst>
+          </a:prstGeom>
+          <a:solidFill>
+            <a:srgbClr val="EFF4F9"/>
+          </a:solidFill>
+          <a:ln/>
+        </p:spPr>
+      </p:sp>
+      <p:sp>
+        <p:nvSpPr>
+          <p:cNvPr id="19" name="Text 17"/>
+          <p:cNvSpPr/>
+          <p:nvPr/>
+        </p:nvSpPr>
+        <p:spPr>
+          <a:xfrm>
+            <a:off x="658368" y="4599432"/>
+            <a:ext cx="457200" cy="338328"/>
+          </a:xfrm>
+          <a:prstGeom prst="rect">
+            <a:avLst/>
+          </a:prstGeom>
+          <a:noFill/>
+          <a:ln/>
+        </p:spPr>
+        <p:txBody>
+          <a:bodyPr wrap="square" lIns="0" tIns="0" rIns="0" bIns="0" rtlCol="0" anchor="ctr"/>
+          <a:lstStyle/>
+          <a:p>
+            <a:pPr indent="0" marL="0">
+              <a:buNone/>
+            </a:pPr>
+            <a:r>
+              <a:rPr lang="en-US" sz="1100" b="1" dirty="0">
+                <a:solidFill>
+                  <a:srgbClr val="1F77B4"/>
+                </a:solidFill>
+                <a:latin typeface="Arial" pitchFamily="34" charset="0"/>
+                <a:ea typeface="Arial" pitchFamily="34" charset="-122"/>
+                <a:cs typeface="Arial" pitchFamily="34" charset="-120"/>
+              </a:rPr>
+              <a:t>C2</a:t>
+            </a:r>
+            <a:endParaRPr lang="en-US" sz="1100" dirty="0"/>
+          </a:p>
+        </p:txBody>
+      </p:sp>
+      <p:sp>
+        <p:nvSpPr>
+          <p:cNvPr id="20" name="Text 18"/>
+          <p:cNvSpPr/>
+          <p:nvPr/>
+        </p:nvSpPr>
+        <p:spPr>
+          <a:xfrm>
+            <a:off x="1188720" y="4599432"/>
+            <a:ext cx="2286000" cy="338328"/>
+          </a:xfrm>
+          <a:prstGeom prst="rect">
+            <a:avLst/>
+          </a:prstGeom>
+          <a:noFill/>
+          <a:ln/>
+        </p:spPr>
+        <p:txBody>
+          <a:bodyPr wrap="square" lIns="0" tIns="0" rIns="0" bIns="0" rtlCol="0" anchor="ctr"/>
+          <a:lstStyle/>
+          <a:p>
+            <a:pPr indent="0" marL="0">
+              <a:buNone/>
+            </a:pPr>
+            <a:r>
+              <a:rPr lang="en-US" sz="1100" b="1" dirty="0">
+                <a:solidFill>
+                  <a:srgbClr val="1F3B57"/>
+                </a:solidFill>
+                <a:latin typeface="Arial" pitchFamily="34" charset="0"/>
+                <a:ea typeface="Arial" pitchFamily="34" charset="-122"/>
+                <a:cs typeface="Arial" pitchFamily="34" charset="-120"/>
+              </a:rPr>
+              <a:t>경로 선택적 개입</a:t>
+            </a:r>
+            <a:endParaRPr lang="en-US" sz="1100" dirty="0"/>
+          </a:p>
+        </p:txBody>
+      </p:sp>
+      <p:sp>
+        <p:nvSpPr>
+          <p:cNvPr id="21" name="Text 19"/>
+          <p:cNvSpPr/>
+          <p:nvPr/>
+        </p:nvSpPr>
+        <p:spPr>
+          <a:xfrm>
+            <a:off x="3566160" y="4599432"/>
+            <a:ext cx="3931920" cy="338328"/>
+          </a:xfrm>
+          <a:prstGeom prst="rect">
+            <a:avLst/>
+          </a:prstGeom>
+          <a:noFill/>
+          <a:ln/>
+        </p:spPr>
+        <p:txBody>
+          <a:bodyPr wrap="square" lIns="0" tIns="0" rIns="0" bIns="0" rtlCol="0" anchor="ctr"/>
+          <a:lstStyle/>
+          <a:p>
+            <a:pPr indent="0" marL="0">
+              <a:buNone/>
+            </a:pPr>
+            <a:r>
+              <a:rPr lang="en-US" sz="1050" dirty="0">
+                <a:solidFill>
+                  <a:srgbClr val="1F3B57"/>
+                </a:solidFill>
+                <a:latin typeface="Arial" pitchFamily="34" charset="0"/>
+                <a:ea typeface="Arial" pitchFamily="34" charset="-122"/>
+                <a:cs typeface="Arial" pitchFamily="34" charset="-120"/>
+              </a:rPr>
+              <a:t>읽기만 끊는 것 &gt; 통째로 지우기</a:t>
+            </a:r>
+            <a:endParaRPr lang="en-US" sz="1050" dirty="0"/>
+          </a:p>
+        </p:txBody>
+      </p:sp>
+      <p:sp>
+        <p:nvSpPr>
+          <p:cNvPr id="22" name="Text 20"/>
+          <p:cNvSpPr/>
+          <p:nvPr/>
+        </p:nvSpPr>
+        <p:spPr>
+          <a:xfrm>
+            <a:off x="7589520" y="4599432"/>
+            <a:ext cx="4023360" cy="338328"/>
+          </a:xfrm>
+          <a:prstGeom prst="rect">
+            <a:avLst/>
+          </a:prstGeom>
+          <a:noFill/>
+          <a:ln/>
+        </p:spPr>
+        <p:txBody>
+          <a:bodyPr wrap="square" lIns="0" tIns="0" rIns="0" bIns="0" rtlCol="0" anchor="ctr"/>
+          <a:lstStyle/>
+          <a:p>
+            <a:pPr indent="0" marL="0">
+              <a:buNone/>
+            </a:pPr>
+            <a:r>
+              <a:rPr lang="en-US" sz="1000" dirty="0">
+                <a:solidFill>
+                  <a:srgbClr val="6B7280"/>
+                </a:solidFill>
+                <a:latin typeface="Arial" pitchFamily="34" charset="0"/>
+                <a:ea typeface="Arial" pitchFamily="34" charset="-122"/>
+                <a:cs typeface="Arial" pitchFamily="34" charset="-120"/>
+              </a:rPr>
+              <a:t>+0.018  CI [+.007,+.031]  회복 121%</a:t>
+            </a:r>
+            <a:endParaRPr lang="en-US" sz="1000" dirty="0"/>
+          </a:p>
+        </p:txBody>
+      </p:sp>
+      <p:sp>
+        <p:nvSpPr>
+          <p:cNvPr id="23" name="Shape 21"/>
+          <p:cNvSpPr/>
+          <p:nvPr/>
+        </p:nvSpPr>
+        <p:spPr>
+          <a:xfrm>
+            <a:off x="502920" y="4974336"/>
+            <a:ext cx="11201400" cy="338328"/>
+          </a:xfrm>
+          <a:prstGeom prst="roundRect">
+            <a:avLst>
+              <a:gd name="adj" fmla="val 13514"/>
+            </a:avLst>
+          </a:prstGeom>
+          <a:solidFill>
+            <a:srgbClr val="F3F4F6"/>
+          </a:solidFill>
+          <a:ln/>
+        </p:spPr>
+      </p:sp>
+      <p:sp>
+        <p:nvSpPr>
+          <p:cNvPr id="24" name="Text 22"/>
+          <p:cNvSpPr/>
+          <p:nvPr/>
+        </p:nvSpPr>
+        <p:spPr>
+          <a:xfrm>
+            <a:off x="658368" y="4974336"/>
+            <a:ext cx="457200" cy="338328"/>
+          </a:xfrm>
+          <a:prstGeom prst="rect">
+            <a:avLst/>
+          </a:prstGeom>
+          <a:noFill/>
+          <a:ln/>
+        </p:spPr>
+        <p:txBody>
+          <a:bodyPr wrap="square" lIns="0" tIns="0" rIns="0" bIns="0" rtlCol="0" anchor="ctr"/>
+          <a:lstStyle/>
+          <a:p>
+            <a:pPr indent="0" marL="0">
+              <a:buNone/>
+            </a:pPr>
+            <a:r>
+              <a:rPr lang="en-US" sz="1100" b="1" dirty="0">
+                <a:solidFill>
+                  <a:srgbClr val="1F77B4"/>
+                </a:solidFill>
+                <a:latin typeface="Arial" pitchFamily="34" charset="0"/>
+                <a:ea typeface="Arial" pitchFamily="34" charset="-122"/>
+                <a:cs typeface="Arial" pitchFamily="34" charset="-120"/>
+              </a:rPr>
+              <a:t>C3</a:t>
+            </a:r>
+            <a:endParaRPr lang="en-US" sz="1100" dirty="0"/>
+          </a:p>
+        </p:txBody>
+      </p:sp>
+      <p:sp>
+        <p:nvSpPr>
+          <p:cNvPr id="25" name="Text 23"/>
+          <p:cNvSpPr/>
+          <p:nvPr/>
+        </p:nvSpPr>
+        <p:spPr>
+          <a:xfrm>
+            <a:off x="1188720" y="4974336"/>
+            <a:ext cx="2286000" cy="338328"/>
+          </a:xfrm>
+          <a:prstGeom prst="rect">
+            <a:avLst/>
+          </a:prstGeom>
+          <a:noFill/>
+          <a:ln/>
+        </p:spPr>
+        <p:txBody>
+          <a:bodyPr wrap="square" lIns="0" tIns="0" rIns="0" bIns="0" rtlCol="0" anchor="ctr"/>
+          <a:lstStyle/>
+          <a:p>
+            <a:pPr indent="0" marL="0">
+              <a:buNone/>
+            </a:pPr>
+            <a:r>
+              <a:rPr lang="en-US" sz="1100" b="1" dirty="0">
+                <a:solidFill>
+                  <a:srgbClr val="1F3B57"/>
+                </a:solidFill>
+                <a:latin typeface="Arial" pitchFamily="34" charset="0"/>
+                <a:ea typeface="Arial" pitchFamily="34" charset="-122"/>
+                <a:cs typeface="Arial" pitchFamily="34" charset="-120"/>
+              </a:rPr>
+              <a:t>층 경계 특정</a:t>
+            </a:r>
+            <a:endParaRPr lang="en-US" sz="1100" dirty="0"/>
+          </a:p>
+        </p:txBody>
+      </p:sp>
+      <p:sp>
+        <p:nvSpPr>
+          <p:cNvPr id="26" name="Text 24"/>
+          <p:cNvSpPr/>
+          <p:nvPr/>
+        </p:nvSpPr>
+        <p:spPr>
+          <a:xfrm>
+            <a:off x="3566160" y="4974336"/>
+            <a:ext cx="3931920" cy="338328"/>
+          </a:xfrm>
+          <a:prstGeom prst="rect">
+            <a:avLst/>
+          </a:prstGeom>
+          <a:noFill/>
+          <a:ln/>
+        </p:spPr>
+        <p:txBody>
+          <a:bodyPr wrap="square" lIns="0" tIns="0" rIns="0" bIns="0" rtlCol="0" anchor="ctr"/>
+          <a:lstStyle/>
+          <a:p>
+            <a:pPr indent="0" marL="0">
+              <a:buNone/>
+            </a:pPr>
+            <a:r>
+              <a:rPr lang="en-US" sz="1050" dirty="0">
+                <a:solidFill>
+                  <a:srgbClr val="1F3B57"/>
+                </a:solidFill>
+                <a:latin typeface="Arial" pitchFamily="34" charset="0"/>
+                <a:ea typeface="Arial" pitchFamily="34" charset="-122"/>
+                <a:cs typeface="Arial" pitchFamily="34" charset="-120"/>
+              </a:rPr>
+              <a:t>통합은 앞쪽 16층에서 끝난다</a:t>
+            </a:r>
+            <a:endParaRPr lang="en-US" sz="1050" dirty="0"/>
+          </a:p>
+        </p:txBody>
+      </p:sp>
+      <p:sp>
+        <p:nvSpPr>
+          <p:cNvPr id="27" name="Text 25"/>
+          <p:cNvSpPr/>
+          <p:nvPr/>
+        </p:nvSpPr>
+        <p:spPr>
+          <a:xfrm>
+            <a:off x="7589520" y="4974336"/>
+            <a:ext cx="4023360" cy="338328"/>
+          </a:xfrm>
+          <a:prstGeom prst="rect">
+            <a:avLst/>
+          </a:prstGeom>
+          <a:noFill/>
+          <a:ln/>
+        </p:spPr>
+        <p:txBody>
+          <a:bodyPr wrap="square" lIns="0" tIns="0" rIns="0" bIns="0" rtlCol="0" anchor="ctr"/>
+          <a:lstStyle/>
+          <a:p>
+            <a:pPr indent="0" marL="0">
+              <a:buNone/>
+            </a:pPr>
+            <a:r>
+              <a:rPr lang="en-US" sz="1000" dirty="0">
+                <a:solidFill>
+                  <a:srgbClr val="6B7280"/>
+                </a:solidFill>
+                <a:latin typeface="Arial" pitchFamily="34" charset="0"/>
+                <a:ea typeface="Arial" pitchFamily="34" charset="-122"/>
+                <a:cs typeface="Arial" pitchFamily="34" charset="-120"/>
+              </a:rPr>
+              <a:t>ISO0 −0.055(유의) vs ISO16 −0.005</a:t>
+            </a:r>
+            <a:endParaRPr lang="en-US" sz="1000" dirty="0"/>
+          </a:p>
+        </p:txBody>
+      </p:sp>
+      <p:sp>
+        <p:nvSpPr>
+          <p:cNvPr id="28" name="Shape 26"/>
+          <p:cNvSpPr/>
+          <p:nvPr/>
+        </p:nvSpPr>
+        <p:spPr>
+          <a:xfrm>
+            <a:off x="502920" y="5349240"/>
+            <a:ext cx="11201400" cy="338328"/>
+          </a:xfrm>
+          <a:prstGeom prst="roundRect">
+            <a:avLst>
+              <a:gd name="adj" fmla="val 13514"/>
+            </a:avLst>
+          </a:prstGeom>
+          <a:solidFill>
+            <a:srgbClr val="EFF4F9"/>
+          </a:solidFill>
+          <a:ln/>
+        </p:spPr>
+      </p:sp>
+      <p:sp>
+        <p:nvSpPr>
+          <p:cNvPr id="29" name="Text 27"/>
+          <p:cNvSpPr/>
+          <p:nvPr/>
+        </p:nvSpPr>
+        <p:spPr>
+          <a:xfrm>
+            <a:off x="658368" y="5349240"/>
+            <a:ext cx="457200" cy="338328"/>
+          </a:xfrm>
+          <a:prstGeom prst="rect">
+            <a:avLst/>
+          </a:prstGeom>
+          <a:noFill/>
+          <a:ln/>
+        </p:spPr>
+        <p:txBody>
+          <a:bodyPr wrap="square" lIns="0" tIns="0" rIns="0" bIns="0" rtlCol="0" anchor="ctr"/>
+          <a:lstStyle/>
+          <a:p>
+            <a:pPr indent="0" marL="0">
+              <a:buNone/>
+            </a:pPr>
+            <a:r>
+              <a:rPr lang="en-US" sz="1100" b="1" dirty="0">
+                <a:solidFill>
+                  <a:srgbClr val="1F77B4"/>
+                </a:solidFill>
+                <a:latin typeface="Arial" pitchFamily="34" charset="0"/>
+                <a:ea typeface="Arial" pitchFamily="34" charset="-122"/>
+                <a:cs typeface="Arial" pitchFamily="34" charset="-120"/>
+              </a:rPr>
+              <a:t>C4</a:t>
+            </a:r>
+            <a:endParaRPr lang="en-US" sz="1100" dirty="0"/>
+          </a:p>
+        </p:txBody>
+      </p:sp>
+      <p:sp>
+        <p:nvSpPr>
+          <p:cNvPr id="30" name="Text 28"/>
+          <p:cNvSpPr/>
+          <p:nvPr/>
+        </p:nvSpPr>
+        <p:spPr>
+          <a:xfrm>
+            <a:off x="1188720" y="5349240"/>
+            <a:ext cx="2286000" cy="338328"/>
+          </a:xfrm>
+          <a:prstGeom prst="rect">
+            <a:avLst/>
+          </a:prstGeom>
+          <a:noFill/>
+          <a:ln/>
+        </p:spPr>
+        <p:txBody>
+          <a:bodyPr wrap="square" lIns="0" tIns="0" rIns="0" bIns="0" rtlCol="0" anchor="ctr"/>
+          <a:lstStyle/>
+          <a:p>
+            <a:pPr indent="0" marL="0">
+              <a:buNone/>
+            </a:pPr>
+            <a:r>
+              <a:rPr lang="en-US" sz="1100" b="1" dirty="0">
+                <a:solidFill>
+                  <a:srgbClr val="1F3B57"/>
+                </a:solidFill>
+                <a:latin typeface="Arial" pitchFamily="34" charset="0"/>
+                <a:ea typeface="Arial" pitchFamily="34" charset="-122"/>
+                <a:cs typeface="Arial" pitchFamily="34" charset="-120"/>
+              </a:rPr>
+              <a:t>모델 상대적 관련도</a:t>
+            </a:r>
+            <a:endParaRPr lang="en-US" sz="1100" dirty="0"/>
+          </a:p>
+        </p:txBody>
+      </p:sp>
+      <p:sp>
+        <p:nvSpPr>
+          <p:cNvPr id="31" name="Text 29"/>
+          <p:cNvSpPr/>
+          <p:nvPr/>
+        </p:nvSpPr>
+        <p:spPr>
+          <a:xfrm>
+            <a:off x="3566160" y="5349240"/>
+            <a:ext cx="3931920" cy="338328"/>
+          </a:xfrm>
+          <a:prstGeom prst="rect">
+            <a:avLst/>
+          </a:prstGeom>
+          <a:noFill/>
+          <a:ln/>
+        </p:spPr>
+        <p:txBody>
+          <a:bodyPr wrap="square" lIns="0" tIns="0" rIns="0" bIns="0" rtlCol="0" anchor="ctr"/>
+          <a:lstStyle/>
+          <a:p>
+            <a:pPr indent="0" marL="0">
+              <a:buNone/>
+            </a:pPr>
+            <a:r>
+              <a:rPr lang="en-US" sz="1050" dirty="0">
+                <a:solidFill>
+                  <a:srgbClr val="1F3B57"/>
+                </a:solidFill>
+                <a:latin typeface="Arial" pitchFamily="34" charset="0"/>
+                <a:ea typeface="Arial" pitchFamily="34" charset="-122"/>
+                <a:cs typeface="Arial" pitchFamily="34" charset="-120"/>
+              </a:rPr>
+              <a:t>의미 유사도로는 못 푼다</a:t>
+            </a:r>
+            <a:endParaRPr lang="en-US" sz="1050" dirty="0"/>
+          </a:p>
+        </p:txBody>
+      </p:sp>
+      <p:sp>
+        <p:nvSpPr>
+          <p:cNvPr id="32" name="Text 30"/>
+          <p:cNvSpPr/>
+          <p:nvPr/>
+        </p:nvSpPr>
+        <p:spPr>
+          <a:xfrm>
+            <a:off x="7589520" y="5349240"/>
+            <a:ext cx="4023360" cy="338328"/>
+          </a:xfrm>
+          <a:prstGeom prst="rect">
+            <a:avLst/>
+          </a:prstGeom>
+          <a:noFill/>
+          <a:ln/>
+        </p:spPr>
+        <p:txBody>
+          <a:bodyPr wrap="square" lIns="0" tIns="0" rIns="0" bIns="0" rtlCol="0" anchor="ctr"/>
+          <a:lstStyle/>
+          <a:p>
+            <a:pPr indent="0" marL="0">
+              <a:buNone/>
+            </a:pPr>
+            <a:r>
+              <a:rPr lang="en-US" sz="1000" dirty="0">
+                <a:solidFill>
+                  <a:srgbClr val="6B7280"/>
+                </a:solidFill>
+                <a:latin typeface="Arial" pitchFamily="34" charset="0"/>
+                <a:ea typeface="Arial" pitchFamily="34" charset="-122"/>
+                <a:cs typeface="Arial" pitchFamily="34" charset="-120"/>
+              </a:rPr>
+              <a:t>CLIP 0.51/0.39/0.33 vs 우리 0.69/0.71/0.73</a:t>
+            </a:r>
+            <a:endParaRPr lang="en-US" sz="1000" dirty="0"/>
+          </a:p>
+        </p:txBody>
+      </p:sp>
+      <p:sp>
+        <p:nvSpPr>
+          <p:cNvPr id="33" name="Shape 31"/>
+          <p:cNvSpPr/>
+          <p:nvPr/>
+        </p:nvSpPr>
+        <p:spPr>
+          <a:xfrm>
+            <a:off x="502920" y="5724144"/>
+            <a:ext cx="11201400" cy="338328"/>
+          </a:xfrm>
+          <a:prstGeom prst="roundRect">
+            <a:avLst>
+              <a:gd name="adj" fmla="val 13514"/>
+            </a:avLst>
+          </a:prstGeom>
+          <a:solidFill>
+            <a:srgbClr val="F3F4F6"/>
+          </a:solidFill>
+          <a:ln/>
+        </p:spPr>
+      </p:sp>
+      <p:sp>
+        <p:nvSpPr>
+          <p:cNvPr id="34" name="Text 32"/>
+          <p:cNvSpPr/>
+          <p:nvPr/>
+        </p:nvSpPr>
+        <p:spPr>
+          <a:xfrm>
+            <a:off x="658368" y="5724144"/>
+            <a:ext cx="457200" cy="338328"/>
+          </a:xfrm>
+          <a:prstGeom prst="rect">
+            <a:avLst/>
+          </a:prstGeom>
+          <a:noFill/>
+          <a:ln/>
+        </p:spPr>
+        <p:txBody>
+          <a:bodyPr wrap="square" lIns="0" tIns="0" rIns="0" bIns="0" rtlCol="0" anchor="ctr"/>
+          <a:lstStyle/>
+          <a:p>
+            <a:pPr indent="0" marL="0">
+              <a:buNone/>
+            </a:pPr>
+            <a:r>
+              <a:rPr lang="en-US" sz="1100" b="1" dirty="0">
+                <a:solidFill>
+                  <a:srgbClr val="1F77B4"/>
+                </a:solidFill>
+                <a:latin typeface="Arial" pitchFamily="34" charset="0"/>
+                <a:ea typeface="Arial" pitchFamily="34" charset="-122"/>
+                <a:cs typeface="Arial" pitchFamily="34" charset="-120"/>
+              </a:rPr>
+              <a:t>C5</a:t>
+            </a:r>
+            <a:endParaRPr lang="en-US" sz="1100" dirty="0"/>
+          </a:p>
+        </p:txBody>
+      </p:sp>
+      <p:sp>
+        <p:nvSpPr>
+          <p:cNvPr id="35" name="Text 33"/>
+          <p:cNvSpPr/>
+          <p:nvPr/>
+        </p:nvSpPr>
+        <p:spPr>
+          <a:xfrm>
+            <a:off x="1188720" y="5724144"/>
+            <a:ext cx="2286000" cy="338328"/>
+          </a:xfrm>
+          <a:prstGeom prst="rect">
+            <a:avLst/>
+          </a:prstGeom>
+          <a:noFill/>
+          <a:ln/>
+        </p:spPr>
+        <p:txBody>
+          <a:bodyPr wrap="square" lIns="0" tIns="0" rIns="0" bIns="0" rtlCol="0" anchor="ctr"/>
+          <a:lstStyle/>
+          <a:p>
+            <a:pPr indent="0" marL="0">
+              <a:buNone/>
+            </a:pPr>
+            <a:r>
+              <a:rPr lang="en-US" sz="1100" b="1" dirty="0">
+                <a:solidFill>
+                  <a:srgbClr val="1F3B57"/>
+                </a:solidFill>
+                <a:latin typeface="Arial" pitchFamily="34" charset="0"/>
+                <a:ea typeface="Arial" pitchFamily="34" charset="-122"/>
+                <a:cs typeface="Arial" pitchFamily="34" charset="-120"/>
+              </a:rPr>
+              <a:t>오라클 없는 컨트롤러</a:t>
+            </a:r>
+            <a:endParaRPr lang="en-US" sz="1100" dirty="0"/>
+          </a:p>
+        </p:txBody>
+      </p:sp>
+      <p:sp>
+        <p:nvSpPr>
+          <p:cNvPr id="36" name="Text 34"/>
+          <p:cNvSpPr/>
+          <p:nvPr/>
+        </p:nvSpPr>
+        <p:spPr>
+          <a:xfrm>
+            <a:off x="3566160" y="5724144"/>
+            <a:ext cx="3931920" cy="338328"/>
+          </a:xfrm>
+          <a:prstGeom prst="rect">
+            <a:avLst/>
+          </a:prstGeom>
+          <a:noFill/>
+          <a:ln/>
+        </p:spPr>
+        <p:txBody>
+          <a:bodyPr wrap="square" lIns="0" tIns="0" rIns="0" bIns="0" rtlCol="0" anchor="ctr"/>
+          <a:lstStyle/>
+          <a:p>
+            <a:pPr indent="0" marL="0">
+              <a:buNone/>
+            </a:pPr>
+            <a:r>
+              <a:rPr lang="en-US" sz="1050" dirty="0">
+                <a:solidFill>
+                  <a:srgbClr val="1F3B57"/>
+                </a:solidFill>
+                <a:latin typeface="Arial" pitchFamily="34" charset="0"/>
+                <a:ea typeface="Arial" pitchFamily="34" charset="-122"/>
+                <a:cs typeface="Arial" pitchFamily="34" charset="-120"/>
+              </a:rPr>
+              <a:t>반사실 신호가 손익분기를 넘는다</a:t>
+            </a:r>
+            <a:endParaRPr lang="en-US" sz="1050" dirty="0"/>
+          </a:p>
+        </p:txBody>
+      </p:sp>
+      <p:sp>
+        <p:nvSpPr>
+          <p:cNvPr id="37" name="Text 35"/>
+          <p:cNvSpPr/>
+          <p:nvPr/>
+        </p:nvSpPr>
+        <p:spPr>
+          <a:xfrm>
+            <a:off x="7589520" y="5724144"/>
+            <a:ext cx="4023360" cy="338328"/>
+          </a:xfrm>
+          <a:prstGeom prst="rect">
+            <a:avLst/>
+          </a:prstGeom>
+          <a:noFill/>
+          <a:ln/>
+        </p:spPr>
+        <p:txBody>
+          <a:bodyPr wrap="square" lIns="0" tIns="0" rIns="0" bIns="0" rtlCol="0" anchor="ctr"/>
+          <a:lstStyle/>
+          <a:p>
+            <a:pPr indent="0" marL="0">
+              <a:buNone/>
+            </a:pPr>
+            <a:r>
+              <a:rPr lang="en-US" sz="1000" dirty="0">
+                <a:solidFill>
+                  <a:srgbClr val="6B7280"/>
+                </a:solidFill>
+                <a:latin typeface="Arial" pitchFamily="34" charset="0"/>
+                <a:ea typeface="Arial" pitchFamily="34" charset="-122"/>
+                <a:cs typeface="Arial" pitchFamily="34" charset="-120"/>
+              </a:rPr>
+              <a:t>3B N=3 무개입 대비 +18.2%p</a:t>
+            </a:r>
+            <a:endParaRPr lang="en-US" sz="1000" dirty="0"/>
+          </a:p>
+        </p:txBody>
+      </p:sp>
+      <p:sp>
+        <p:nvSpPr>
+          <p:cNvPr id="38" name="Shape 36"/>
+          <p:cNvSpPr/>
+          <p:nvPr/>
+        </p:nvSpPr>
+        <p:spPr>
+          <a:xfrm>
+            <a:off x="502920" y="6053328"/>
+            <a:ext cx="11201400" cy="548640"/>
+          </a:xfrm>
+          <a:prstGeom prst="roundRect">
+            <a:avLst>
+              <a:gd name="adj" fmla="val 13333"/>
+            </a:avLst>
+          </a:prstGeom>
+          <a:solidFill>
+            <a:srgbClr val="1F3B57"/>
+          </a:solidFill>
+          <a:ln/>
+        </p:spPr>
+      </p:sp>
+      <p:sp>
+        <p:nvSpPr>
+          <p:cNvPr id="39" name="Text 37"/>
+          <p:cNvSpPr/>
+          <p:nvPr/>
+        </p:nvSpPr>
+        <p:spPr>
+          <a:xfrm>
+            <a:off x="777240" y="6053328"/>
+            <a:ext cx="10744200" cy="548640"/>
+          </a:xfrm>
+          <a:prstGeom prst="rect">
+            <a:avLst/>
+          </a:prstGeom>
+          <a:noFill/>
+          <a:ln/>
+        </p:spPr>
+        <p:txBody>
+          <a:bodyPr wrap="square" lIns="0" tIns="0" rIns="0" bIns="0" rtlCol="0" anchor="ctr"/>
+          <a:lstStyle/>
+          <a:p>
+            <a:pPr indent="0" marL="0">
+              <a:buNone/>
+            </a:pPr>
+            <a:r>
+              <a:rPr lang="en-US" sz="1250" b="1" dirty="0">
+                <a:solidFill>
+                  <a:srgbClr val="FFFFFF"/>
+                </a:solidFill>
+                <a:latin typeface="Arial" pitchFamily="34" charset="0"/>
+                <a:ea typeface="Arial" pitchFamily="34" charset="-122"/>
+                <a:cs typeface="Arial" pitchFamily="34" charset="-120"/>
+              </a:rPr>
+              <a:t>→ 차별성: 이미지↔이미지 edge의 layer 분해 knockout은 문헌에 0편. 무관 이미지 레짐 자체를 CAPL·SoFA는 실험한 적이 없습니다</a:t>
+            </a:r>
+            <a:endParaRPr lang="en-US" sz="1250" dirty="0"/>
+          </a:p>
+        </p:txBody>
+      </p:sp>
+    </p:spTree>
+  </p:cSld>
+  <p:clrMapOvr>
+    <a:masterClrMapping/>
+  </p:clrMapOvr>
+</p:sld>
+</file>
+
+<file path=ppt/slides/slide3.xml><?xml version="1.0" encoding="utf-8"?>
+<p:sld xmlns:a="http://schemas.openxmlformats.org/drawingml/2006/main" xmlns:r="http://schemas.openxmlformats.org/officeDocument/2006/relationships" xmlns:p="http://schemas.openxmlformats.org/presentationml/2006/main">
+  <p:cSld name="Slide 3">
     <p:spTree>
       <p:nvGrpSpPr>
         <p:cNvPr id="1" name=""/>
@@ -3505,7 +5944,7 @@
       </p:sp>
       <p:graphicFrame>
         <p:nvGraphicFramePr>
-          <p:cNvPr id="3" name="Table 0"/>
+          <p:cNvPr id="4" name="Table 0"/>
           <p:cNvGraphicFramePr>
             <a:graphicFrameLocks noGrp="1"/>
           </p:cNvGraphicFramePr>
@@ -5110,9 +7549,9 @@
 </p:sld>
 </file>
 
-<file path=ppt/slides/slide3.xml><?xml version="1.0" encoding="utf-8"?>
+<file path=ppt/slides/slide4.xml><?xml version="1.0" encoding="utf-8"?>
 <p:sld xmlns:a="http://schemas.openxmlformats.org/drawingml/2006/main" xmlns:r="http://schemas.openxmlformats.org/officeDocument/2006/relationships" xmlns:p="http://schemas.openxmlformats.org/presentationml/2006/main">
-  <p:cSld name="Slide 3">
+  <p:cSld name="Slide 4">
     <p:spTree>
       <p:nvGrpSpPr>
         <p:cNvPr id="1" name=""/>
@@ -5207,7 +7646,7 @@
       </p:sp>
       <p:graphicFrame>
         <p:nvGraphicFramePr>
-          <p:cNvPr id="4" name="Table 0"/>
+          <p:cNvPr id="5" name="Table 0"/>
           <p:cNvGraphicFramePr>
             <a:graphicFrameLocks noGrp="1"/>
           </p:cNvGraphicFramePr>
@@ -7898,9 +10337,9 @@
 </p:sld>
 </file>
 
-<file path=ppt/slides/slide4.xml><?xml version="1.0" encoding="utf-8"?>
+<file path=ppt/slides/slide5.xml><?xml version="1.0" encoding="utf-8"?>
 <p:sld xmlns:a="http://schemas.openxmlformats.org/drawingml/2006/main" xmlns:r="http://schemas.openxmlformats.org/officeDocument/2006/relationships" xmlns:p="http://schemas.openxmlformats.org/presentationml/2006/main">
-  <p:cSld name="Slide 4">
+  <p:cSld name="Slide 5">
     <p:spTree>
       <p:nvGrpSpPr>
         <p:cNvPr id="1" name=""/>
@@ -8034,7 +10473,7 @@
       </p:sp>
       <p:graphicFrame>
         <p:nvGraphicFramePr>
-          <p:cNvPr id="5" name="Table 0"/>
+          <p:cNvPr id="6" name="Table 0"/>
           <p:cNvGraphicFramePr>
             <a:graphicFrameLocks noGrp="1"/>
           </p:cNvGraphicFramePr>
@@ -10568,9 +13007,9 @@
 </p:sld>
 </file>
 
-<file path=ppt/slides/slide5.xml><?xml version="1.0" encoding="utf-8"?>
+<file path=ppt/slides/slide6.xml><?xml version="1.0" encoding="utf-8"?>
 <p:sld xmlns:a="http://schemas.openxmlformats.org/drawingml/2006/main" xmlns:r="http://schemas.openxmlformats.org/officeDocument/2006/relationships" xmlns:p="http://schemas.openxmlformats.org/presentationml/2006/main">
-  <p:cSld name="Slide 5">
+  <p:cSld name="Slide 6">
     <p:spTree>
       <p:nvGrpSpPr>
         <p:cNvPr id="1" name=""/>
@@ -10665,7 +13104,7 @@
       </p:sp>
       <p:graphicFrame>
         <p:nvGraphicFramePr>
-          <p:cNvPr id="6" name="Table 0"/>
+          <p:cNvPr id="7" name="Table 0"/>
           <p:cNvGraphicFramePr>
             <a:graphicFrameLocks noGrp="1"/>
           </p:cNvGraphicFramePr>
@@ -12066,9 +14505,9 @@
 </p:sld>
 </file>
 
-<file path=ppt/slides/slide6.xml><?xml version="1.0" encoding="utf-8"?>
+<file path=ppt/slides/slide7.xml><?xml version="1.0" encoding="utf-8"?>
 <p:sld xmlns:a="http://schemas.openxmlformats.org/drawingml/2006/main" xmlns:r="http://schemas.openxmlformats.org/officeDocument/2006/relationships" xmlns:p="http://schemas.openxmlformats.org/presentationml/2006/main">
-  <p:cSld name="Slide 6">
+  <p:cSld name="Slide 7">
     <p:spTree>
       <p:nvGrpSpPr>
         <p:cNvPr id="1" name=""/>
@@ -12163,7 +14602,7 @@
       </p:sp>
       <p:graphicFrame>
         <p:nvGraphicFramePr>
-          <p:cNvPr id="7" name="Table 0"/>
+          <p:cNvPr id="8" name="Table 0"/>
           <p:cNvGraphicFramePr>
             <a:graphicFrameLocks noGrp="1"/>
           </p:cNvGraphicFramePr>
@@ -14620,9 +17059,9 @@
 </p:sld>
 </file>
 
-<file path=ppt/slides/slide7.xml><?xml version="1.0" encoding="utf-8"?>
+<file path=ppt/slides/slide8.xml><?xml version="1.0" encoding="utf-8"?>
 <p:sld xmlns:a="http://schemas.openxmlformats.org/drawingml/2006/main" xmlns:r="http://schemas.openxmlformats.org/officeDocument/2006/relationships" xmlns:p="http://schemas.openxmlformats.org/presentationml/2006/main">
-  <p:cSld name="Slide 7">
+  <p:cSld name="Slide 8">
     <p:spTree>
       <p:nvGrpSpPr>
         <p:cNvPr id="1" name=""/>
@@ -14717,7 +17156,7 @@
       </p:sp>
       <p:graphicFrame>
         <p:nvGraphicFramePr>
-          <p:cNvPr id="8" name="Table 0"/>
+          <p:cNvPr id="9" name="Table 0"/>
           <p:cNvGraphicFramePr>
             <a:graphicFrameLocks noGrp="1"/>
           </p:cNvGraphicFramePr>
@@ -15560,7 +17999,7 @@
       </p:graphicFrame>
       <p:graphicFrame>
         <p:nvGraphicFramePr>
-          <p:cNvPr id="15" name="Table 1"/>
+          <p:cNvPr id="17" name="Table 1"/>
           <p:cNvGraphicFramePr>
             <a:graphicFrameLocks noGrp="1"/>
           </p:cNvGraphicFramePr>
@@ -18195,9 +20634,9 @@
 </p:sld>
 </file>
 
-<file path=ppt/slides/slide8.xml><?xml version="1.0" encoding="utf-8"?>
+<file path=ppt/slides/slide9.xml><?xml version="1.0" encoding="utf-8"?>
 <p:sld xmlns:a="http://schemas.openxmlformats.org/drawingml/2006/main" xmlns:r="http://schemas.openxmlformats.org/officeDocument/2006/relationships" xmlns:p="http://schemas.openxmlformats.org/presentationml/2006/main">
-  <p:cSld name="Slide 8">
+  <p:cSld name="Slide 9">
     <p:spTree>
       <p:nvGrpSpPr>
         <p:cNvPr id="1" name=""/>
@@ -18292,7 +20731,7 @@
       </p:sp>
       <p:graphicFrame>
         <p:nvGraphicFramePr>
-          <p:cNvPr id="9" name="Table 0"/>
+          <p:cNvPr id="10" name="Table 0"/>
           <p:cNvGraphicFramePr>
             <a:graphicFrameLocks noGrp="1"/>
           </p:cNvGraphicFramePr>
@@ -20416,7 +22855,7 @@
       </p:sp>
       <p:graphicFrame>
         <p:nvGraphicFramePr>
-          <p:cNvPr id="17" name="Table 1"/>
+          <p:cNvPr id="19" name="Table 1"/>
           <p:cNvGraphicFramePr>
             <a:graphicFrameLocks noGrp="1"/>
           </p:cNvGraphicFramePr>
@@ -21605,848 +24044,6 @@
                 <a:cs typeface="Arial" pitchFamily="34" charset="-120"/>
               </a:rPr>
               <a:t>→ 가설 정정에 따라 'neg attention으로 뒤쪽 층에서 분리'는 폐기합니다 — 분리할 대상이 문제가 아니었습니다</a:t>
-            </a:r>
-            <a:endParaRPr lang="en-US" sz="1250" dirty="0"/>
-          </a:p>
-        </p:txBody>
-      </p:sp>
-    </p:spTree>
-  </p:cSld>
-  <p:clrMapOvr>
-    <a:masterClrMapping/>
-  </p:clrMapOvr>
-</p:sld>
-</file>
-
-<file path=ppt/slides/slide9.xml><?xml version="1.0" encoding="utf-8"?>
-<p:sld xmlns:a="http://schemas.openxmlformats.org/drawingml/2006/main" xmlns:r="http://schemas.openxmlformats.org/officeDocument/2006/relationships" xmlns:p="http://schemas.openxmlformats.org/presentationml/2006/main">
-  <p:cSld name="Slide 9">
-    <p:spTree>
-      <p:nvGrpSpPr>
-        <p:cNvPr id="1" name=""/>
-        <p:cNvGrpSpPr/>
-        <p:nvPr/>
-      </p:nvGrpSpPr>
-      <p:grpSpPr>
-        <a:xfrm>
-          <a:off x="0" y="0"/>
-          <a:ext cx="0" cy="0"/>
-          <a:chOff x="0" y="0"/>
-          <a:chExt cx="0" cy="0"/>
-        </a:xfrm>
-      </p:grpSpPr>
-      <p:sp>
-        <p:nvSpPr>
-          <p:cNvPr id="2" name="Text 0"/>
-          <p:cNvSpPr/>
-          <p:nvPr/>
-        </p:nvSpPr>
-        <p:spPr>
-          <a:xfrm>
-            <a:off x="502920" y="237744"/>
-            <a:ext cx="10515600" cy="274320"/>
-          </a:xfrm>
-          <a:prstGeom prst="rect">
-            <a:avLst/>
-          </a:prstGeom>
-          <a:noFill/>
-          <a:ln/>
-        </p:spPr>
-        <p:txBody>
-          <a:bodyPr wrap="square" lIns="0" tIns="0" rIns="0" bIns="0" rtlCol="0" anchor="ctr"/>
-          <a:lstStyle/>
-          <a:p>
-            <a:pPr indent="0" marL="0">
-              <a:buNone/>
-            </a:pPr>
-            <a:r>
-              <a:rPr lang="en-US" sz="1100" b="1" dirty="0">
-                <a:solidFill>
-                  <a:srgbClr val="1F77B4"/>
-                </a:solidFill>
-                <a:latin typeface="Arial" pitchFamily="34" charset="0"/>
-                <a:ea typeface="Arial" pitchFamily="34" charset="-122"/>
-                <a:cs typeface="Arial" pitchFamily="34" charset="-120"/>
-              </a:rPr>
-              <a:t>정직한 한계</a:t>
-            </a:r>
-            <a:endParaRPr lang="en-US" sz="1100" dirty="0"/>
-          </a:p>
-        </p:txBody>
-      </p:sp>
-      <p:sp>
-        <p:nvSpPr>
-          <p:cNvPr id="3" name="Text 1"/>
-          <p:cNvSpPr/>
-          <p:nvPr/>
-        </p:nvSpPr>
-        <p:spPr>
-          <a:xfrm>
-            <a:off x="502920" y="493776"/>
-            <a:ext cx="11155680" cy="658368"/>
-          </a:xfrm>
-          <a:prstGeom prst="rect">
-            <a:avLst/>
-          </a:prstGeom>
-          <a:noFill/>
-          <a:ln/>
-        </p:spPr>
-        <p:txBody>
-          <a:bodyPr wrap="square" lIns="0" tIns="0" rIns="0" bIns="0" rtlCol="0" anchor="ctr"/>
-          <a:lstStyle/>
-          <a:p>
-            <a:pPr indent="0" marL="0">
-              <a:buNone/>
-            </a:pPr>
-            <a:r>
-              <a:rPr lang="en-US" sz="2100" b="1" dirty="0">
-                <a:solidFill>
-                  <a:srgbClr val="1F3B57"/>
-                </a:solidFill>
-                <a:latin typeface="Arial" pitchFamily="34" charset="0"/>
-                <a:ea typeface="Arial" pitchFamily="34" charset="-122"/>
-                <a:cs typeface="Arial" pitchFamily="34" charset="-120"/>
-              </a:rPr>
-              <a:t>지금 이 연구를 무너뜨릴 수 있는 것 세 가지</a:t>
-            </a:r>
-            <a:endParaRPr lang="en-US" sz="2100" dirty="0"/>
-          </a:p>
-        </p:txBody>
-      </p:sp>
-      <p:sp>
-        <p:nvSpPr>
-          <p:cNvPr id="4" name="Shape 2"/>
-          <p:cNvSpPr/>
-          <p:nvPr/>
-        </p:nvSpPr>
-        <p:spPr>
-          <a:xfrm>
-            <a:off x="502920" y="1298448"/>
-            <a:ext cx="11201400" cy="1408176"/>
-          </a:xfrm>
-          <a:prstGeom prst="roundRect">
-            <a:avLst>
-              <a:gd name="adj" fmla="val 5195"/>
-            </a:avLst>
-          </a:prstGeom>
-          <a:solidFill>
-            <a:srgbClr val="FBEAEA"/>
-          </a:solidFill>
-          <a:ln w="12700">
-            <a:solidFill>
-              <a:srgbClr val="D62728"/>
-            </a:solidFill>
-            <a:prstDash val="solid"/>
-          </a:ln>
-        </p:spPr>
-      </p:sp>
-      <p:sp>
-        <p:nvSpPr>
-          <p:cNvPr id="5" name="Shape 3"/>
-          <p:cNvSpPr/>
-          <p:nvPr/>
-        </p:nvSpPr>
-        <p:spPr>
-          <a:xfrm>
-            <a:off x="749808" y="1463040"/>
-            <a:ext cx="402336" cy="402336"/>
-          </a:xfrm>
-          <a:prstGeom prst="ellipse">
-            <a:avLst/>
-          </a:prstGeom>
-          <a:solidFill>
-            <a:srgbClr val="D62728"/>
-          </a:solidFill>
-          <a:ln/>
-        </p:spPr>
-      </p:sp>
-      <p:sp>
-        <p:nvSpPr>
-          <p:cNvPr id="6" name="Text 4"/>
-          <p:cNvSpPr/>
-          <p:nvPr/>
-        </p:nvSpPr>
-        <p:spPr>
-          <a:xfrm>
-            <a:off x="749808" y="1463040"/>
-            <a:ext cx="402336" cy="402336"/>
-          </a:xfrm>
-          <a:prstGeom prst="rect">
-            <a:avLst/>
-          </a:prstGeom>
-          <a:noFill/>
-          <a:ln/>
-        </p:spPr>
-        <p:txBody>
-          <a:bodyPr wrap="square" lIns="0" tIns="0" rIns="0" bIns="0" rtlCol="0" anchor="ctr"/>
-          <a:lstStyle/>
-          <a:p>
-            <a:pPr algn="ctr" indent="0" marL="0">
-              <a:buNone/>
-            </a:pPr>
-            <a:r>
-              <a:rPr lang="en-US" sz="1300" b="1" dirty="0">
-                <a:solidFill>
-                  <a:srgbClr val="FFFFFF"/>
-                </a:solidFill>
-                <a:latin typeface="Arial" pitchFamily="34" charset="0"/>
-                <a:ea typeface="Arial" pitchFamily="34" charset="-122"/>
-                <a:cs typeface="Arial" pitchFamily="34" charset="-120"/>
-              </a:rPr>
-              <a:t>1</a:t>
-            </a:r>
-            <a:endParaRPr lang="en-US" sz="1300" dirty="0"/>
-          </a:p>
-        </p:txBody>
-      </p:sp>
-      <p:sp>
-        <p:nvSpPr>
-          <p:cNvPr id="7" name="Text 5"/>
-          <p:cNvSpPr/>
-          <p:nvPr/>
-        </p:nvSpPr>
-        <p:spPr>
-          <a:xfrm>
-            <a:off x="1316736" y="1444752"/>
-            <a:ext cx="10149840" cy="274320"/>
-          </a:xfrm>
-          <a:prstGeom prst="rect">
-            <a:avLst/>
-          </a:prstGeom>
-          <a:noFill/>
-          <a:ln/>
-        </p:spPr>
-        <p:txBody>
-          <a:bodyPr wrap="square" lIns="0" tIns="0" rIns="0" bIns="0" rtlCol="0" anchor="ctr"/>
-          <a:lstStyle/>
-          <a:p>
-            <a:pPr indent="0" marL="0">
-              <a:buNone/>
-            </a:pPr>
-            <a:r>
-              <a:rPr lang="en-US" sz="1300" b="1" dirty="0">
-                <a:solidFill>
-                  <a:srgbClr val="1F3B57"/>
-                </a:solidFill>
-                <a:latin typeface="Arial" pitchFamily="34" charset="0"/>
-                <a:ea typeface="Arial" pitchFamily="34" charset="-122"/>
-                <a:cs typeface="Arial" pitchFamily="34" charset="-120"/>
-              </a:rPr>
-              <a:t>벤치마크가 위치로 대상을 지목한다</a:t>
-            </a:r>
-            <a:endParaRPr lang="en-US" sz="1300" dirty="0"/>
-          </a:p>
-        </p:txBody>
-      </p:sp>
-      <p:sp>
-        <p:nvSpPr>
-          <p:cNvPr id="8" name="Text 6"/>
-          <p:cNvSpPr/>
-          <p:nvPr/>
-        </p:nvSpPr>
-        <p:spPr>
-          <a:xfrm>
-            <a:off x="1316736" y="1755648"/>
-            <a:ext cx="10149840" cy="548640"/>
-          </a:xfrm>
-          <a:prstGeom prst="rect">
-            <a:avLst/>
-          </a:prstGeom>
-          <a:noFill/>
-          <a:ln/>
-        </p:spPr>
-        <p:txBody>
-          <a:bodyPr wrap="square" lIns="0" tIns="0" rIns="0" bIns="0" rtlCol="0" anchor="ctr"/>
-          <a:lstStyle/>
-          <a:p>
-            <a:pPr indent="0" marL="0">
-              <a:lnSpc>
-                <a:spcPct val="115000"/>
-              </a:lnSpc>
-              <a:buNone/>
-            </a:pPr>
-            <a:r>
-              <a:rPr lang="en-US" sz="1100" dirty="0">
-                <a:solidFill>
-                  <a:srgbClr val="1F3B57"/>
-                </a:solidFill>
-                <a:latin typeface="Arial" pitchFamily="34" charset="0"/>
-                <a:ea typeface="Arial" pitchFamily="34" charset="-122"/>
-                <a:cs typeface="Arial" pitchFamily="34" charset="-120"/>
-              </a:rPr>
-              <a:t>질문이 "첫 번째 이미지에"로 시작하므로, 앞단 모듈이 텍스트만 파싱해도 100% 맞힙니다.</a:t>
-            </a:r>
-            <a:endParaRPr lang="en-US" sz="1100" dirty="0"/>
-          </a:p>
-          <a:p>
-            <a:pPr indent="0" marL="0">
-              <a:lnSpc>
-                <a:spcPct val="115000"/>
-              </a:lnSpc>
-              <a:buNone/>
-            </a:pPr>
-            <a:r>
-              <a:rPr lang="en-US" sz="1100" dirty="0">
-                <a:solidFill>
-                  <a:srgbClr val="1F3B57"/>
-                </a:solidFill>
-                <a:latin typeface="Arial" pitchFamily="34" charset="0"/>
-                <a:ea typeface="Arial" pitchFamily="34" charset="-122"/>
-                <a:cs typeface="Arial" pitchFamily="34" charset="-120"/>
-              </a:rPr>
-              <a:t>현 벤치마크로는 '내부 개입이어야 하는 이유'를 증명할 수 없습니다.</a:t>
-            </a:r>
-            <a:endParaRPr lang="en-US" sz="1100" dirty="0"/>
-          </a:p>
-        </p:txBody>
-      </p:sp>
-      <p:sp>
-        <p:nvSpPr>
-          <p:cNvPr id="9" name="Text 7"/>
-          <p:cNvSpPr/>
-          <p:nvPr/>
-        </p:nvSpPr>
-        <p:spPr>
-          <a:xfrm>
-            <a:off x="1316736" y="2340864"/>
-            <a:ext cx="10149840" cy="274320"/>
-          </a:xfrm>
-          <a:prstGeom prst="rect">
-            <a:avLst/>
-          </a:prstGeom>
-          <a:noFill/>
-          <a:ln/>
-        </p:spPr>
-        <p:txBody>
-          <a:bodyPr wrap="square" lIns="0" tIns="0" rIns="0" bIns="0" rtlCol="0" anchor="ctr"/>
-          <a:lstStyle/>
-          <a:p>
-            <a:pPr indent="0" marL="0">
-              <a:buNone/>
-            </a:pPr>
-            <a:r>
-              <a:rPr lang="en-US" sz="1100" b="1" dirty="0">
-                <a:solidFill>
-                  <a:srgbClr val="2E8B57"/>
-                </a:solidFill>
-                <a:latin typeface="Arial" pitchFamily="34" charset="0"/>
-                <a:ea typeface="Arial" pitchFamily="34" charset="-122"/>
-                <a:cs typeface="Arial" pitchFamily="34" charset="-120"/>
-              </a:rPr>
-              <a:t>대응: 관련도가 추론의 결과인 질문으로 교체 — all-of-3 세트 측정 중</a:t>
-            </a:r>
-            <a:endParaRPr lang="en-US" sz="1100" dirty="0"/>
-          </a:p>
-        </p:txBody>
-      </p:sp>
-      <p:sp>
-        <p:nvSpPr>
-          <p:cNvPr id="10" name="Shape 8"/>
-          <p:cNvSpPr/>
-          <p:nvPr/>
-        </p:nvSpPr>
-        <p:spPr>
-          <a:xfrm>
-            <a:off x="502920" y="2834640"/>
-            <a:ext cx="11201400" cy="1408176"/>
-          </a:xfrm>
-          <a:prstGeom prst="roundRect">
-            <a:avLst>
-              <a:gd name="adj" fmla="val 5195"/>
-            </a:avLst>
-          </a:prstGeom>
-          <a:solidFill>
-            <a:srgbClr val="FBEAEA"/>
-          </a:solidFill>
-          <a:ln w="12700">
-            <a:solidFill>
-              <a:srgbClr val="D62728"/>
-            </a:solidFill>
-            <a:prstDash val="solid"/>
-          </a:ln>
-        </p:spPr>
-      </p:sp>
-      <p:sp>
-        <p:nvSpPr>
-          <p:cNvPr id="11" name="Shape 9"/>
-          <p:cNvSpPr/>
-          <p:nvPr/>
-        </p:nvSpPr>
-        <p:spPr>
-          <a:xfrm>
-            <a:off x="749808" y="2999232"/>
-            <a:ext cx="402336" cy="402336"/>
-          </a:xfrm>
-          <a:prstGeom prst="ellipse">
-            <a:avLst/>
-          </a:prstGeom>
-          <a:solidFill>
-            <a:srgbClr val="D62728"/>
-          </a:solidFill>
-          <a:ln/>
-        </p:spPr>
-      </p:sp>
-      <p:sp>
-        <p:nvSpPr>
-          <p:cNvPr id="12" name="Text 10"/>
-          <p:cNvSpPr/>
-          <p:nvPr/>
-        </p:nvSpPr>
-        <p:spPr>
-          <a:xfrm>
-            <a:off x="749808" y="2999232"/>
-            <a:ext cx="402336" cy="402336"/>
-          </a:xfrm>
-          <a:prstGeom prst="rect">
-            <a:avLst/>
-          </a:prstGeom>
-          <a:noFill/>
-          <a:ln/>
-        </p:spPr>
-        <p:txBody>
-          <a:bodyPr wrap="square" lIns="0" tIns="0" rIns="0" bIns="0" rtlCol="0" anchor="ctr"/>
-          <a:lstStyle/>
-          <a:p>
-            <a:pPr algn="ctr" indent="0" marL="0">
-              <a:buNone/>
-            </a:pPr>
-            <a:r>
-              <a:rPr lang="en-US" sz="1300" b="1" dirty="0">
-                <a:solidFill>
-                  <a:srgbClr val="FFFFFF"/>
-                </a:solidFill>
-                <a:latin typeface="Arial" pitchFamily="34" charset="0"/>
-                <a:ea typeface="Arial" pitchFamily="34" charset="-122"/>
-                <a:cs typeface="Arial" pitchFamily="34" charset="-120"/>
-              </a:rPr>
-              <a:t>2</a:t>
-            </a:r>
-            <a:endParaRPr lang="en-US" sz="1300" dirty="0"/>
-          </a:p>
-        </p:txBody>
-      </p:sp>
-      <p:sp>
-        <p:nvSpPr>
-          <p:cNvPr id="13" name="Text 11"/>
-          <p:cNvSpPr/>
-          <p:nvPr/>
-        </p:nvSpPr>
-        <p:spPr>
-          <a:xfrm>
-            <a:off x="1316736" y="2980944"/>
-            <a:ext cx="10149840" cy="274320"/>
-          </a:xfrm>
-          <a:prstGeom prst="rect">
-            <a:avLst/>
-          </a:prstGeom>
-          <a:noFill/>
-          <a:ln/>
-        </p:spPr>
-        <p:txBody>
-          <a:bodyPr wrap="square" lIns="0" tIns="0" rIns="0" bIns="0" rtlCol="0" anchor="ctr"/>
-          <a:lstStyle/>
-          <a:p>
-            <a:pPr indent="0" marL="0">
-              <a:buNone/>
-            </a:pPr>
-            <a:r>
-              <a:rPr lang="en-US" sz="1300" b="1" dirty="0">
-                <a:solidFill>
-                  <a:srgbClr val="1F3B57"/>
-                </a:solidFill>
-                <a:latin typeface="Arial" pitchFamily="34" charset="0"/>
-                <a:ea typeface="Arial" pitchFamily="34" charset="-122"/>
-                <a:cs typeface="Arial" pitchFamily="34" charset="-120"/>
-              </a:rPr>
-              <a:t>실현 성능이 아직 오라클 상한에 크게 못 미친다</a:t>
-            </a:r>
-            <a:endParaRPr lang="en-US" sz="1300" dirty="0"/>
-          </a:p>
-        </p:txBody>
-      </p:sp>
-      <p:sp>
-        <p:nvSpPr>
-          <p:cNvPr id="14" name="Text 12"/>
-          <p:cNvSpPr/>
-          <p:nvPr/>
-        </p:nvSpPr>
-        <p:spPr>
-          <a:xfrm>
-            <a:off x="1316736" y="3291840"/>
-            <a:ext cx="10149840" cy="548640"/>
-          </a:xfrm>
-          <a:prstGeom prst="rect">
-            <a:avLst/>
-          </a:prstGeom>
-          <a:noFill/>
-          <a:ln/>
-        </p:spPr>
-        <p:txBody>
-          <a:bodyPr wrap="square" lIns="0" tIns="0" rIns="0" bIns="0" rtlCol="0" anchor="ctr"/>
-          <a:lstStyle/>
-          <a:p>
-            <a:pPr indent="0" marL="0">
-              <a:lnSpc>
-                <a:spcPct val="115000"/>
-              </a:lnSpc>
-              <a:buNone/>
-            </a:pPr>
-            <a:r>
-              <a:rPr lang="en-US" sz="1100" dirty="0">
-                <a:solidFill>
-                  <a:srgbClr val="1F3B57"/>
-                </a:solidFill>
-                <a:latin typeface="Arial" pitchFamily="34" charset="0"/>
-                <a:ea typeface="Arial" pitchFamily="34" charset="-122"/>
-                <a:cs typeface="Arial" pitchFamily="34" charset="-120"/>
-              </a:rPr>
-              <a:t>N=3에서 오라클 0.904 vs 실현 0.703. 손상의 절반만 회수합니다.</a:t>
-            </a:r>
-            <a:endParaRPr lang="en-US" sz="1100" dirty="0"/>
-          </a:p>
-          <a:p>
-            <a:pPr indent="0" marL="0">
-              <a:lnSpc>
-                <a:spcPct val="115000"/>
-              </a:lnSpc>
-              <a:buNone/>
-            </a:pPr>
-            <a:r>
-              <a:rPr lang="en-US" sz="1100" dirty="0">
-                <a:solidFill>
-                  <a:srgbClr val="1F3B57"/>
-                </a:solidFill>
-                <a:latin typeface="Arial" pitchFamily="34" charset="0"/>
-                <a:ea typeface="Arial" pitchFamily="34" charset="-122"/>
-                <a:cs typeface="Arial" pitchFamily="34" charset="-120"/>
-              </a:rPr>
-              <a:t>그리고 forward N+1회라 효율 이득이 없습니다.</a:t>
-            </a:r>
-            <a:endParaRPr lang="en-US" sz="1100" dirty="0"/>
-          </a:p>
-        </p:txBody>
-      </p:sp>
-      <p:sp>
-        <p:nvSpPr>
-          <p:cNvPr id="15" name="Text 13"/>
-          <p:cNvSpPr/>
-          <p:nvPr/>
-        </p:nvSpPr>
-        <p:spPr>
-          <a:xfrm>
-            <a:off x="1316736" y="3877056"/>
-            <a:ext cx="10149840" cy="274320"/>
-          </a:xfrm>
-          <a:prstGeom prst="rect">
-            <a:avLst/>
-          </a:prstGeom>
-          <a:noFill/>
-          <a:ln/>
-        </p:spPr>
-        <p:txBody>
-          <a:bodyPr wrap="square" lIns="0" tIns="0" rIns="0" bIns="0" rtlCol="0" anchor="ctr"/>
-          <a:lstStyle/>
-          <a:p>
-            <a:pPr indent="0" marL="0">
-              <a:buNone/>
-            </a:pPr>
-            <a:r>
-              <a:rPr lang="en-US" sz="1100" b="1" dirty="0">
-                <a:solidFill>
-                  <a:srgbClr val="2E8B57"/>
-                </a:solidFill>
-                <a:latin typeface="Arial" pitchFamily="34" charset="0"/>
-                <a:ea typeface="Arial" pitchFamily="34" charset="-122"/>
-                <a:cs typeface="Arial" pitchFamily="34" charset="-120"/>
-              </a:rPr>
-              <a:t>대응: 컨트롤러 신호 개선 + 소프트 개입(λ)으로 오판 비용 완화</a:t>
-            </a:r>
-            <a:endParaRPr lang="en-US" sz="1100" dirty="0"/>
-          </a:p>
-        </p:txBody>
-      </p:sp>
-      <p:sp>
-        <p:nvSpPr>
-          <p:cNvPr id="16" name="Shape 14"/>
-          <p:cNvSpPr/>
-          <p:nvPr/>
-        </p:nvSpPr>
-        <p:spPr>
-          <a:xfrm>
-            <a:off x="502920" y="4370832"/>
-            <a:ext cx="11201400" cy="1408176"/>
-          </a:xfrm>
-          <a:prstGeom prst="roundRect">
-            <a:avLst>
-              <a:gd name="adj" fmla="val 5195"/>
-            </a:avLst>
-          </a:prstGeom>
-          <a:solidFill>
-            <a:srgbClr val="FBEAEA"/>
-          </a:solidFill>
-          <a:ln w="12700">
-            <a:solidFill>
-              <a:srgbClr val="D62728"/>
-            </a:solidFill>
-            <a:prstDash val="solid"/>
-          </a:ln>
-        </p:spPr>
-      </p:sp>
-      <p:sp>
-        <p:nvSpPr>
-          <p:cNvPr id="17" name="Shape 15"/>
-          <p:cNvSpPr/>
-          <p:nvPr/>
-        </p:nvSpPr>
-        <p:spPr>
-          <a:xfrm>
-            <a:off x="749808" y="4535424"/>
-            <a:ext cx="402336" cy="402336"/>
-          </a:xfrm>
-          <a:prstGeom prst="ellipse">
-            <a:avLst/>
-          </a:prstGeom>
-          <a:solidFill>
-            <a:srgbClr val="D62728"/>
-          </a:solidFill>
-          <a:ln/>
-        </p:spPr>
-      </p:sp>
-      <p:sp>
-        <p:nvSpPr>
-          <p:cNvPr id="18" name="Text 16"/>
-          <p:cNvSpPr/>
-          <p:nvPr/>
-        </p:nvSpPr>
-        <p:spPr>
-          <a:xfrm>
-            <a:off x="749808" y="4535424"/>
-            <a:ext cx="402336" cy="402336"/>
-          </a:xfrm>
-          <a:prstGeom prst="rect">
-            <a:avLst/>
-          </a:prstGeom>
-          <a:noFill/>
-          <a:ln/>
-        </p:spPr>
-        <p:txBody>
-          <a:bodyPr wrap="square" lIns="0" tIns="0" rIns="0" bIns="0" rtlCol="0" anchor="ctr"/>
-          <a:lstStyle/>
-          <a:p>
-            <a:pPr algn="ctr" indent="0" marL="0">
-              <a:buNone/>
-            </a:pPr>
-            <a:r>
-              <a:rPr lang="en-US" sz="1300" b="1" dirty="0">
-                <a:solidFill>
-                  <a:srgbClr val="FFFFFF"/>
-                </a:solidFill>
-                <a:latin typeface="Arial" pitchFamily="34" charset="0"/>
-                <a:ea typeface="Arial" pitchFamily="34" charset="-122"/>
-                <a:cs typeface="Arial" pitchFamily="34" charset="-120"/>
-              </a:rPr>
-              <a:t>3</a:t>
-            </a:r>
-            <a:endParaRPr lang="en-US" sz="1300" dirty="0"/>
-          </a:p>
-        </p:txBody>
-      </p:sp>
-      <p:sp>
-        <p:nvSpPr>
-          <p:cNvPr id="19" name="Text 17"/>
-          <p:cNvSpPr/>
-          <p:nvPr/>
-        </p:nvSpPr>
-        <p:spPr>
-          <a:xfrm>
-            <a:off x="1316736" y="4517136"/>
-            <a:ext cx="10149840" cy="274320"/>
-          </a:xfrm>
-          <a:prstGeom prst="rect">
-            <a:avLst/>
-          </a:prstGeom>
-          <a:noFill/>
-          <a:ln/>
-        </p:spPr>
-        <p:txBody>
-          <a:bodyPr wrap="square" lIns="0" tIns="0" rIns="0" bIns="0" rtlCol="0" anchor="ctr"/>
-          <a:lstStyle/>
-          <a:p>
-            <a:pPr indent="0" marL="0">
-              <a:buNone/>
-            </a:pPr>
-            <a:r>
-              <a:rPr lang="en-US" sz="1300" b="1" dirty="0">
-                <a:solidFill>
-                  <a:srgbClr val="1F3B57"/>
-                </a:solidFill>
-                <a:latin typeface="Arial" pitchFamily="34" charset="0"/>
-                <a:ea typeface="Arial" pitchFamily="34" charset="-122"/>
-                <a:cs typeface="Arial" pitchFamily="34" charset="-120"/>
-              </a:rPr>
-              <a:t>표준 벤치마크에서 아직 보이지 않았다</a:t>
-            </a:r>
-            <a:endParaRPr lang="en-US" sz="1300" dirty="0"/>
-          </a:p>
-        </p:txBody>
-      </p:sp>
-      <p:sp>
-        <p:nvSpPr>
-          <p:cNvPr id="20" name="Text 18"/>
-          <p:cNvSpPr/>
-          <p:nvPr/>
-        </p:nvSpPr>
-        <p:spPr>
-          <a:xfrm>
-            <a:off x="1316736" y="4828032"/>
-            <a:ext cx="10149840" cy="548640"/>
-          </a:xfrm>
-          <a:prstGeom prst="rect">
-            <a:avLst/>
-          </a:prstGeom>
-          <a:noFill/>
-          <a:ln/>
-        </p:spPr>
-        <p:txBody>
-          <a:bodyPr wrap="square" lIns="0" tIns="0" rIns="0" bIns="0" rtlCol="0" anchor="ctr"/>
-          <a:lstStyle/>
-          <a:p>
-            <a:pPr indent="0" marL="0">
-              <a:lnSpc>
-                <a:spcPct val="115000"/>
-              </a:lnSpc>
-              <a:buNone/>
-            </a:pPr>
-            <a:r>
-              <a:rPr lang="en-US" sz="1100" dirty="0">
-                <a:solidFill>
-                  <a:srgbClr val="1F3B57"/>
-                </a:solidFill>
-                <a:latin typeface="Arial" pitchFamily="34" charset="0"/>
-                <a:ea typeface="Arial" pitchFamily="34" charset="-122"/>
-                <a:cs typeface="Arial" pitchFamily="34" charset="-120"/>
-              </a:rPr>
-              <a:t>CAPL은 "추론시 attention 수정만으로는 일시적 개선"이라고 선점 반론을 폈습니다.</a:t>
-            </a:r>
-            <a:endParaRPr lang="en-US" sz="1100" dirty="0"/>
-          </a:p>
-          <a:p>
-            <a:pPr indent="0" marL="0">
-              <a:lnSpc>
-                <a:spcPct val="115000"/>
-              </a:lnSpc>
-              <a:buNone/>
-            </a:pPr>
-            <a:r>
-              <a:rPr lang="en-US" sz="1100" dirty="0">
-                <a:solidFill>
-                  <a:srgbClr val="1F3B57"/>
-                </a:solidFill>
-                <a:latin typeface="Arial" pitchFamily="34" charset="0"/>
-                <a:ea typeface="Arial" pitchFamily="34" charset="-122"/>
-                <a:cs typeface="Arial" pitchFamily="34" charset="-120"/>
-              </a:rPr>
-              <a:t>BLINK·MUIRBench 같은 공개 벤치에서 재현해야 이 반론을 막습니다.</a:t>
-            </a:r>
-            <a:endParaRPr lang="en-US" sz="1100" dirty="0"/>
-          </a:p>
-        </p:txBody>
-      </p:sp>
-      <p:sp>
-        <p:nvSpPr>
-          <p:cNvPr id="21" name="Text 19"/>
-          <p:cNvSpPr/>
-          <p:nvPr/>
-        </p:nvSpPr>
-        <p:spPr>
-          <a:xfrm>
-            <a:off x="1316736" y="5413248"/>
-            <a:ext cx="10149840" cy="274320"/>
-          </a:xfrm>
-          <a:prstGeom prst="rect">
-            <a:avLst/>
-          </a:prstGeom>
-          <a:noFill/>
-          <a:ln/>
-        </p:spPr>
-        <p:txBody>
-          <a:bodyPr wrap="square" lIns="0" tIns="0" rIns="0" bIns="0" rtlCol="0" anchor="ctr"/>
-          <a:lstStyle/>
-          <a:p>
-            <a:pPr indent="0" marL="0">
-              <a:buNone/>
-            </a:pPr>
-            <a:r>
-              <a:rPr lang="en-US" sz="1100" b="1" dirty="0">
-                <a:solidFill>
-                  <a:srgbClr val="2E8B57"/>
-                </a:solidFill>
-                <a:latin typeface="Arial" pitchFamily="34" charset="0"/>
-                <a:ea typeface="Arial" pitchFamily="34" charset="-122"/>
-                <a:cs typeface="Arial" pitchFamily="34" charset="-120"/>
-              </a:rPr>
-              <a:t>대응: 다음 단계 1순위</a:t>
-            </a:r>
-            <a:endParaRPr lang="en-US" sz="1100" dirty="0"/>
-          </a:p>
-        </p:txBody>
-      </p:sp>
-      <p:sp>
-        <p:nvSpPr>
-          <p:cNvPr id="22" name="Shape 20"/>
-          <p:cNvSpPr/>
-          <p:nvPr/>
-        </p:nvSpPr>
-        <p:spPr>
-          <a:xfrm>
-            <a:off x="502920" y="6053328"/>
-            <a:ext cx="11201400" cy="548640"/>
-          </a:xfrm>
-          <a:prstGeom prst="roundRect">
-            <a:avLst>
-              <a:gd name="adj" fmla="val 13333"/>
-            </a:avLst>
-          </a:prstGeom>
-          <a:solidFill>
-            <a:srgbClr val="1F3B57"/>
-          </a:solidFill>
-          <a:ln/>
-        </p:spPr>
-      </p:sp>
-      <p:sp>
-        <p:nvSpPr>
-          <p:cNvPr id="23" name="Text 21"/>
-          <p:cNvSpPr/>
-          <p:nvPr/>
-        </p:nvSpPr>
-        <p:spPr>
-          <a:xfrm>
-            <a:off x="777240" y="6053328"/>
-            <a:ext cx="10744200" cy="548640"/>
-          </a:xfrm>
-          <a:prstGeom prst="rect">
-            <a:avLst/>
-          </a:prstGeom>
-          <a:noFill/>
-          <a:ln/>
-        </p:spPr>
-        <p:txBody>
-          <a:bodyPr wrap="square" lIns="0" tIns="0" rIns="0" bIns="0" rtlCol="0" anchor="ctr"/>
-          <a:lstStyle/>
-          <a:p>
-            <a:pPr indent="0" marL="0">
-              <a:buNone/>
-            </a:pPr>
-            <a:r>
-              <a:rPr lang="en-US" sz="1250" b="1" dirty="0">
-                <a:solidFill>
-                  <a:srgbClr val="FFFFFF"/>
-                </a:solidFill>
-                <a:latin typeface="Arial" pitchFamily="34" charset="0"/>
-                <a:ea typeface="Arial" pitchFamily="34" charset="-122"/>
-                <a:cs typeface="Arial" pitchFamily="34" charset="-120"/>
-              </a:rPr>
-              <a:t>→ 셋 다 알고 있고, 셋 다 측정으로 답할 수 있습니다</a:t>
             </a:r>
             <a:endParaRPr lang="en-US" sz="1250" dirty="0"/>
           </a:p>
